--- a/My-plaform기획2.pptx
+++ b/My-plaform기획2.pptx
@@ -5,46 +5,49 @@
     <p:sldMasterId id="2147483648" r:id="rId1"/>
   </p:sldMasterIdLst>
   <p:notesMasterIdLst>
-    <p:notesMasterId r:id="rId39"/>
+    <p:notesMasterId r:id="rId42"/>
   </p:notesMasterIdLst>
   <p:sldIdLst>
     <p:sldId id="256" r:id="rId2"/>
     <p:sldId id="291" r:id="rId3"/>
     <p:sldId id="292" r:id="rId4"/>
-    <p:sldId id="284" r:id="rId5"/>
-    <p:sldId id="285" r:id="rId6"/>
-    <p:sldId id="286" r:id="rId7"/>
-    <p:sldId id="287" r:id="rId8"/>
-    <p:sldId id="288" r:id="rId9"/>
-    <p:sldId id="289" r:id="rId10"/>
-    <p:sldId id="290" r:id="rId11"/>
-    <p:sldId id="275" r:id="rId12"/>
-    <p:sldId id="278" r:id="rId13"/>
-    <p:sldId id="279" r:id="rId14"/>
-    <p:sldId id="280" r:id="rId15"/>
-    <p:sldId id="281" r:id="rId16"/>
-    <p:sldId id="282" r:id="rId17"/>
-    <p:sldId id="283" r:id="rId18"/>
-    <p:sldId id="270" r:id="rId19"/>
-    <p:sldId id="271" r:id="rId20"/>
-    <p:sldId id="272" r:id="rId21"/>
-    <p:sldId id="273" r:id="rId22"/>
-    <p:sldId id="274" r:id="rId23"/>
-    <p:sldId id="276" r:id="rId24"/>
-    <p:sldId id="277" r:id="rId25"/>
-    <p:sldId id="269" r:id="rId26"/>
-    <p:sldId id="268" r:id="rId27"/>
-    <p:sldId id="261" r:id="rId28"/>
-    <p:sldId id="257" r:id="rId29"/>
-    <p:sldId id="258" r:id="rId30"/>
-    <p:sldId id="262" r:id="rId31"/>
-    <p:sldId id="259" r:id="rId32"/>
-    <p:sldId id="267" r:id="rId33"/>
-    <p:sldId id="263" r:id="rId34"/>
-    <p:sldId id="260" r:id="rId35"/>
-    <p:sldId id="264" r:id="rId36"/>
-    <p:sldId id="265" r:id="rId37"/>
-    <p:sldId id="266" r:id="rId38"/>
+    <p:sldId id="293" r:id="rId5"/>
+    <p:sldId id="294" r:id="rId6"/>
+    <p:sldId id="295" r:id="rId7"/>
+    <p:sldId id="284" r:id="rId8"/>
+    <p:sldId id="285" r:id="rId9"/>
+    <p:sldId id="286" r:id="rId10"/>
+    <p:sldId id="287" r:id="rId11"/>
+    <p:sldId id="288" r:id="rId12"/>
+    <p:sldId id="289" r:id="rId13"/>
+    <p:sldId id="290" r:id="rId14"/>
+    <p:sldId id="275" r:id="rId15"/>
+    <p:sldId id="278" r:id="rId16"/>
+    <p:sldId id="279" r:id="rId17"/>
+    <p:sldId id="280" r:id="rId18"/>
+    <p:sldId id="281" r:id="rId19"/>
+    <p:sldId id="282" r:id="rId20"/>
+    <p:sldId id="283" r:id="rId21"/>
+    <p:sldId id="270" r:id="rId22"/>
+    <p:sldId id="271" r:id="rId23"/>
+    <p:sldId id="272" r:id="rId24"/>
+    <p:sldId id="273" r:id="rId25"/>
+    <p:sldId id="274" r:id="rId26"/>
+    <p:sldId id="276" r:id="rId27"/>
+    <p:sldId id="277" r:id="rId28"/>
+    <p:sldId id="269" r:id="rId29"/>
+    <p:sldId id="268" r:id="rId30"/>
+    <p:sldId id="261" r:id="rId31"/>
+    <p:sldId id="257" r:id="rId32"/>
+    <p:sldId id="258" r:id="rId33"/>
+    <p:sldId id="262" r:id="rId34"/>
+    <p:sldId id="259" r:id="rId35"/>
+    <p:sldId id="267" r:id="rId36"/>
+    <p:sldId id="263" r:id="rId37"/>
+    <p:sldId id="260" r:id="rId38"/>
+    <p:sldId id="264" r:id="rId39"/>
+    <p:sldId id="265" r:id="rId40"/>
+    <p:sldId id="266" r:id="rId41"/>
   </p:sldIdLst>
   <p:sldSz cx="9144000" cy="6858000" type="screen4x3"/>
   <p:notesSz cx="6858000" cy="9144000"/>
@@ -244,7 +247,7 @@
           <a:p>
             <a:fld id="{CA327A70-99B0-4C6B-97CA-130B17C8EC7F}" type="datetimeFigureOut">
               <a:rPr lang="ko-KR" altLang="en-US" smtClean="0"/>
-              <a:t>2026-09-07</a:t>
+              <a:t>2026-09-11</a:t>
             </a:fld>
             <a:endParaRPr lang="ko-KR" altLang="en-US"/>
           </a:p>
@@ -577,7 +580,7 @@
           <a:p>
             <a:fld id="{ADF721E1-0787-45D0-ABD5-65A323428C8A}" type="slidenum">
               <a:rPr lang="ko-KR" altLang="en-US" smtClean="0"/>
-              <a:t>20</a:t>
+              <a:t>23</a:t>
             </a:fld>
             <a:endParaRPr lang="ko-KR" altLang="en-US"/>
           </a:p>
@@ -777,7 +780,7 @@
           <a:p>
             <a:fld id="{952AB49B-C0AE-447B-876C-1A453E2B644F}" type="datetimeFigureOut">
               <a:rPr lang="ko-KR" altLang="en-US" smtClean="0"/>
-              <a:t>2026-09-07</a:t>
+              <a:t>2026-09-11</a:t>
             </a:fld>
             <a:endParaRPr lang="ko-KR" altLang="en-US"/>
           </a:p>
@@ -947,7 +950,7 @@
           <a:p>
             <a:fld id="{952AB49B-C0AE-447B-876C-1A453E2B644F}" type="datetimeFigureOut">
               <a:rPr lang="ko-KR" altLang="en-US" smtClean="0"/>
-              <a:t>2026-09-07</a:t>
+              <a:t>2026-09-11</a:t>
             </a:fld>
             <a:endParaRPr lang="ko-KR" altLang="en-US"/>
           </a:p>
@@ -1127,7 +1130,7 @@
           <a:p>
             <a:fld id="{952AB49B-C0AE-447B-876C-1A453E2B644F}" type="datetimeFigureOut">
               <a:rPr lang="ko-KR" altLang="en-US" smtClean="0"/>
-              <a:t>2026-09-07</a:t>
+              <a:t>2026-09-11</a:t>
             </a:fld>
             <a:endParaRPr lang="ko-KR" altLang="en-US"/>
           </a:p>
@@ -1297,7 +1300,7 @@
           <a:p>
             <a:fld id="{952AB49B-C0AE-447B-876C-1A453E2B644F}" type="datetimeFigureOut">
               <a:rPr lang="ko-KR" altLang="en-US" smtClean="0"/>
-              <a:t>2026-09-07</a:t>
+              <a:t>2026-09-11</a:t>
             </a:fld>
             <a:endParaRPr lang="ko-KR" altLang="en-US"/>
           </a:p>
@@ -1543,7 +1546,7 @@
           <a:p>
             <a:fld id="{952AB49B-C0AE-447B-876C-1A453E2B644F}" type="datetimeFigureOut">
               <a:rPr lang="ko-KR" altLang="en-US" smtClean="0"/>
-              <a:t>2026-09-07</a:t>
+              <a:t>2026-09-11</a:t>
             </a:fld>
             <a:endParaRPr lang="ko-KR" altLang="en-US"/>
           </a:p>
@@ -1831,7 +1834,7 @@
           <a:p>
             <a:fld id="{952AB49B-C0AE-447B-876C-1A453E2B644F}" type="datetimeFigureOut">
               <a:rPr lang="ko-KR" altLang="en-US" smtClean="0"/>
-              <a:t>2026-09-07</a:t>
+              <a:t>2026-09-11</a:t>
             </a:fld>
             <a:endParaRPr lang="ko-KR" altLang="en-US"/>
           </a:p>
@@ -2253,7 +2256,7 @@
           <a:p>
             <a:fld id="{952AB49B-C0AE-447B-876C-1A453E2B644F}" type="datetimeFigureOut">
               <a:rPr lang="ko-KR" altLang="en-US" smtClean="0"/>
-              <a:t>2026-09-07</a:t>
+              <a:t>2026-09-11</a:t>
             </a:fld>
             <a:endParaRPr lang="ko-KR" altLang="en-US"/>
           </a:p>
@@ -2371,7 +2374,7 @@
           <a:p>
             <a:fld id="{952AB49B-C0AE-447B-876C-1A453E2B644F}" type="datetimeFigureOut">
               <a:rPr lang="ko-KR" altLang="en-US" smtClean="0"/>
-              <a:t>2026-09-07</a:t>
+              <a:t>2026-09-11</a:t>
             </a:fld>
             <a:endParaRPr lang="ko-KR" altLang="en-US"/>
           </a:p>
@@ -2466,7 +2469,7 @@
           <a:p>
             <a:fld id="{952AB49B-C0AE-447B-876C-1A453E2B644F}" type="datetimeFigureOut">
               <a:rPr lang="ko-KR" altLang="en-US" smtClean="0"/>
-              <a:t>2026-09-07</a:t>
+              <a:t>2026-09-11</a:t>
             </a:fld>
             <a:endParaRPr lang="ko-KR" altLang="en-US"/>
           </a:p>
@@ -2743,7 +2746,7 @@
           <a:p>
             <a:fld id="{952AB49B-C0AE-447B-876C-1A453E2B644F}" type="datetimeFigureOut">
               <a:rPr lang="ko-KR" altLang="en-US" smtClean="0"/>
-              <a:t>2026-09-07</a:t>
+              <a:t>2026-09-11</a:t>
             </a:fld>
             <a:endParaRPr lang="ko-KR" altLang="en-US"/>
           </a:p>
@@ -2996,7 +2999,7 @@
           <a:p>
             <a:fld id="{952AB49B-C0AE-447B-876C-1A453E2B644F}" type="datetimeFigureOut">
               <a:rPr lang="ko-KR" altLang="en-US" smtClean="0"/>
-              <a:t>2026-09-07</a:t>
+              <a:t>2026-09-11</a:t>
             </a:fld>
             <a:endParaRPr lang="ko-KR" altLang="en-US"/>
           </a:p>
@@ -3209,7 +3212,7 @@
           <a:p>
             <a:fld id="{952AB49B-C0AE-447B-876C-1A453E2B644F}" type="datetimeFigureOut">
               <a:rPr lang="ko-KR" altLang="en-US" smtClean="0"/>
-              <a:t>2026-09-07</a:t>
+              <a:t>2026-09-11</a:t>
             </a:fld>
             <a:endParaRPr lang="ko-KR" altLang="en-US"/>
           </a:p>
@@ -3675,10 +3678,143 @@
           <a:chExt cx="0" cy="0"/>
         </a:xfrm>
       </p:grpSpPr>
+      <p:sp>
+        <p:nvSpPr>
+          <p:cNvPr id="2" name="TextBox 1"/>
+          <p:cNvSpPr txBox="1"/>
+          <p:nvPr/>
+        </p:nvSpPr>
+        <p:spPr>
+          <a:xfrm>
+            <a:off x="395536" y="404664"/>
+            <a:ext cx="4824536" cy="523220"/>
+          </a:xfrm>
+          <a:prstGeom prst="rect">
+            <a:avLst/>
+          </a:prstGeom>
+          <a:noFill/>
+        </p:spPr>
+        <p:txBody>
+          <a:bodyPr wrap="square" rtlCol="0">
+            <a:spAutoFit/>
+          </a:bodyPr>
+          <a:lstStyle/>
+          <a:p>
+            <a:r>
+              <a:rPr lang="ko-KR" altLang="en-US" sz="1400" dirty="0" err="1" smtClean="0"/>
+              <a:t>테이블명</a:t>
+            </a:r>
+            <a:r>
+              <a:rPr lang="ko-KR" altLang="en-US" sz="1400" dirty="0" smtClean="0"/>
+              <a:t> 사상 점검</a:t>
+            </a:r>
+            <a:endParaRPr lang="en-US" altLang="ko-KR" sz="1400" dirty="0" smtClean="0"/>
+          </a:p>
+          <a:p>
+            <a:r>
+              <a:rPr lang="ko-KR" altLang="en-US" sz="1400" dirty="0" smtClean="0"/>
+              <a:t>사용주최기준으로 명칭 변경필요검토</a:t>
+            </a:r>
+            <a:endParaRPr lang="ko-KR" altLang="en-US" sz="1400" dirty="0"/>
+          </a:p>
+        </p:txBody>
+      </p:sp>
+      <p:pic>
+        <p:nvPicPr>
+          <p:cNvPr id="3" name="그림 2"/>
+          <p:cNvPicPr>
+            <a:picLocks noChangeAspect="1"/>
+          </p:cNvPicPr>
+          <p:nvPr/>
+        </p:nvPicPr>
+        <p:blipFill>
+          <a:blip r:embed="rId2"/>
+          <a:stretch>
+            <a:fillRect/>
+          </a:stretch>
+        </p:blipFill>
+        <p:spPr>
+          <a:xfrm>
+            <a:off x="251520" y="1196752"/>
+            <a:ext cx="4159113" cy="3384376"/>
+          </a:xfrm>
+          <a:prstGeom prst="rect">
+            <a:avLst/>
+          </a:prstGeom>
+        </p:spPr>
+      </p:pic>
+      <p:pic>
+        <p:nvPicPr>
+          <p:cNvPr id="4" name="그림 3"/>
+          <p:cNvPicPr>
+            <a:picLocks noChangeAspect="1"/>
+          </p:cNvPicPr>
+          <p:nvPr/>
+        </p:nvPicPr>
+        <p:blipFill>
+          <a:blip r:embed="rId3"/>
+          <a:stretch>
+            <a:fillRect/>
+          </a:stretch>
+        </p:blipFill>
+        <p:spPr>
+          <a:xfrm>
+            <a:off x="3528833" y="2564904"/>
+            <a:ext cx="5598716" cy="3899352"/>
+          </a:xfrm>
+          <a:prstGeom prst="rect">
+            <a:avLst/>
+          </a:prstGeom>
+        </p:spPr>
+      </p:pic>
+      <p:sp>
+        <p:nvSpPr>
+          <p:cNvPr id="5" name="사각형 설명선 4"/>
+          <p:cNvSpPr/>
+          <p:nvPr/>
+        </p:nvSpPr>
+        <p:spPr>
+          <a:xfrm>
+            <a:off x="6444208" y="1628800"/>
+            <a:ext cx="1728192" cy="864096"/>
+          </a:xfrm>
+          <a:prstGeom prst="wedgeRectCallout">
+            <a:avLst/>
+          </a:prstGeom>
+        </p:spPr>
+        <p:style>
+          <a:lnRef idx="2">
+            <a:schemeClr val="accent1">
+              <a:shade val="50000"/>
+            </a:schemeClr>
+          </a:lnRef>
+          <a:fillRef idx="1">
+            <a:schemeClr val="accent1"/>
+          </a:fillRef>
+          <a:effectRef idx="0">
+            <a:schemeClr val="accent1"/>
+          </a:effectRef>
+          <a:fontRef idx="minor">
+            <a:schemeClr val="lt1"/>
+          </a:fontRef>
+        </p:style>
+        <p:txBody>
+          <a:bodyPr rtlCol="0" anchor="ctr"/>
+          <a:lstStyle/>
+          <a:p>
+            <a:pPr algn="ctr"/>
+            <a:r>
+              <a:rPr lang="ko-KR" altLang="en-US" dirty="0" smtClean="0"/>
+              <a:t>플랫폼기준으로 선정</a:t>
+            </a:r>
+            <a:endParaRPr lang="ko-KR" altLang="en-US" dirty="0"/>
+          </a:p>
+        </p:txBody>
+      </p:sp>
     </p:spTree>
     <p:extLst>
       <p:ext uri="{BB962C8B-B14F-4D97-AF65-F5344CB8AC3E}">
-        <p14:creationId xmlns:p14="http://schemas.microsoft.com/office/powerpoint/2010/main" val="2436579104"/>
+        <p14:creationId xmlns:p14="http://schemas.microsoft.com/office/powerpoint/2010/main" val="576452792"/>
       </p:ext>
     </p:extLst>
   </p:cSld>
@@ -3713,8 +3849,8 @@
         </p:nvSpPr>
         <p:spPr>
           <a:xfrm>
-            <a:off x="323528" y="332656"/>
-            <a:ext cx="2304256" cy="369332"/>
+            <a:off x="323528" y="404664"/>
+            <a:ext cx="2736304" cy="369332"/>
           </a:xfrm>
           <a:prstGeom prst="rect">
             <a:avLst/>
@@ -3729,45 +3865,15 @@
           <a:p>
             <a:r>
               <a:rPr lang="ko-KR" altLang="en-US" dirty="0" smtClean="0"/>
-              <a:t>정지된 사이트 점검</a:t>
+              <a:t>사이트 배포</a:t>
             </a:r>
             <a:endParaRPr lang="ko-KR" altLang="en-US" dirty="0"/>
-          </a:p>
-        </p:txBody>
-      </p:sp>
-      <p:sp>
-        <p:nvSpPr>
-          <p:cNvPr id="3" name="TextBox 2"/>
-          <p:cNvSpPr txBox="1"/>
-          <p:nvPr/>
-        </p:nvSpPr>
-        <p:spPr>
-          <a:xfrm>
-            <a:off x="539552" y="1196752"/>
-            <a:ext cx="1944216" cy="461665"/>
-          </a:xfrm>
-          <a:prstGeom prst="rect">
-            <a:avLst/>
-          </a:prstGeom>
-          <a:noFill/>
-        </p:spPr>
-        <p:txBody>
-          <a:bodyPr wrap="square" rtlCol="0">
-            <a:spAutoFit/>
-          </a:bodyPr>
-          <a:lstStyle/>
-          <a:p>
-            <a:r>
-              <a:rPr lang="ko-KR" altLang="en-US" sz="1200" dirty="0" smtClean="0"/>
-              <a:t>사이트와 구독 테이블 확인해보자</a:t>
-            </a:r>
-            <a:endParaRPr lang="ko-KR" altLang="en-US" sz="1200" dirty="0"/>
           </a:p>
         </p:txBody>
       </p:sp>
       <p:pic>
         <p:nvPicPr>
-          <p:cNvPr id="4" name="그림 3"/>
+          <p:cNvPr id="3" name="그림 2"/>
           <p:cNvPicPr>
             <a:picLocks noChangeAspect="1"/>
           </p:cNvPicPr>
@@ -3781,96 +3887,24 @@
         </p:blipFill>
         <p:spPr>
           <a:xfrm>
-            <a:off x="3707904" y="538139"/>
-            <a:ext cx="4425059" cy="3092496"/>
+            <a:off x="19537" y="692696"/>
+            <a:ext cx="2720555" cy="1960225"/>
           </a:xfrm>
           <a:prstGeom prst="rect">
             <a:avLst/>
           </a:prstGeom>
         </p:spPr>
       </p:pic>
-      <p:pic>
-        <p:nvPicPr>
-          <p:cNvPr id="5" name="그림 4"/>
-          <p:cNvPicPr>
-            <a:picLocks noChangeAspect="1"/>
-          </p:cNvPicPr>
-          <p:nvPr/>
-        </p:nvPicPr>
-        <p:blipFill>
-          <a:blip r:embed="rId3"/>
-          <a:stretch>
-            <a:fillRect/>
-          </a:stretch>
-        </p:blipFill>
-        <p:spPr>
-          <a:xfrm>
-            <a:off x="899592" y="3831189"/>
-            <a:ext cx="8063898" cy="588419"/>
-          </a:xfrm>
-          <a:prstGeom prst="rect">
-            <a:avLst/>
-          </a:prstGeom>
-        </p:spPr>
-      </p:pic>
-      <p:pic>
-        <p:nvPicPr>
-          <p:cNvPr id="6" name="그림 5"/>
-          <p:cNvPicPr>
-            <a:picLocks noChangeAspect="1"/>
-          </p:cNvPicPr>
-          <p:nvPr/>
-        </p:nvPicPr>
-        <p:blipFill>
-          <a:blip r:embed="rId4"/>
-          <a:stretch>
-            <a:fillRect/>
-          </a:stretch>
-        </p:blipFill>
-        <p:spPr>
-          <a:xfrm>
-            <a:off x="523562" y="2791913"/>
-            <a:ext cx="3076149" cy="716511"/>
-          </a:xfrm>
-          <a:prstGeom prst="rect">
-            <a:avLst/>
-          </a:prstGeom>
-        </p:spPr>
-      </p:pic>
-      <p:pic>
-        <p:nvPicPr>
-          <p:cNvPr id="7" name="그림 6"/>
-          <p:cNvPicPr>
-            <a:picLocks noChangeAspect="1"/>
-          </p:cNvPicPr>
-          <p:nvPr/>
-        </p:nvPicPr>
-        <p:blipFill>
-          <a:blip r:embed="rId5"/>
-          <a:stretch>
-            <a:fillRect/>
-          </a:stretch>
-        </p:blipFill>
-        <p:spPr>
-          <a:xfrm>
-            <a:off x="585530" y="1839112"/>
-            <a:ext cx="3261345" cy="628137"/>
-          </a:xfrm>
-          <a:prstGeom prst="rect">
-            <a:avLst/>
-          </a:prstGeom>
-        </p:spPr>
-      </p:pic>
-      <p:sp>
-        <p:nvSpPr>
-          <p:cNvPr id="8" name="직사각형 7"/>
+      <p:sp>
+        <p:nvSpPr>
+          <p:cNvPr id="4" name="직사각형 3"/>
           <p:cNvSpPr/>
           <p:nvPr/>
         </p:nvSpPr>
         <p:spPr>
           <a:xfrm>
-            <a:off x="539551" y="5085184"/>
-            <a:ext cx="3307323" cy="720080"/>
+            <a:off x="3059832" y="980728"/>
+            <a:ext cx="3816424" cy="1672193"/>
           </a:xfrm>
           <a:prstGeom prst="rect">
             <a:avLst/>
@@ -3898,37 +3932,77 @@
           <a:p>
             <a:pPr algn="ctr"/>
             <a:r>
-              <a:rPr lang="ko-KR" altLang="en-US" dirty="0" err="1" smtClean="0"/>
-              <a:t>본사의뢰</a:t>
-            </a:r>
-            <a:r>
-              <a:rPr lang="ko-KR" altLang="en-US" dirty="0" smtClean="0"/>
-              <a:t> </a:t>
-            </a:r>
-            <a:r>
-              <a:rPr lang="en-US" altLang="ko-KR" dirty="0" smtClean="0"/>
-              <a:t>, </a:t>
-            </a:r>
-            <a:r>
-              <a:rPr lang="ko-KR" altLang="en-US" dirty="0" err="1" smtClean="0"/>
-              <a:t>제작중</a:t>
-            </a:r>
-            <a:r>
-              <a:rPr lang="en-US" altLang="ko-KR" dirty="0" smtClean="0"/>
-              <a:t>, </a:t>
-            </a:r>
-            <a:r>
-              <a:rPr lang="ko-KR" altLang="en-US" dirty="0" smtClean="0"/>
-              <a:t>잔금 미납</a:t>
-            </a:r>
-            <a:endParaRPr lang="ko-KR" altLang="en-US" dirty="0"/>
-          </a:p>
-        </p:txBody>
-      </p:sp>
+              <a:rPr lang="ko-KR" altLang="en-US" sz="1200" dirty="0" err="1" smtClean="0"/>
+              <a:t>카드등록해두면</a:t>
+            </a:r>
+            <a:r>
+              <a:rPr lang="ko-KR" altLang="en-US" sz="1200" dirty="0" smtClean="0"/>
+              <a:t> 배포되고 </a:t>
+            </a:r>
+            <a:r>
+              <a:rPr lang="en-US" altLang="ko-KR" sz="1200" dirty="0" smtClean="0"/>
+              <a:t>&gt; trial</a:t>
+            </a:r>
+            <a:r>
+              <a:rPr lang="ko-KR" altLang="en-US" sz="1200" dirty="0" smtClean="0"/>
+              <a:t>기간 들어가고 </a:t>
+            </a:r>
+            <a:r>
+              <a:rPr lang="en-US" altLang="ko-KR" sz="1200" dirty="0" smtClean="0"/>
+              <a:t>(14</a:t>
+            </a:r>
+            <a:r>
+              <a:rPr lang="ko-KR" altLang="en-US" sz="1200" dirty="0" smtClean="0"/>
+              <a:t>일</a:t>
+            </a:r>
+            <a:r>
+              <a:rPr lang="en-US" altLang="ko-KR" sz="1200" dirty="0" smtClean="0"/>
+              <a:t>) </a:t>
+            </a:r>
+            <a:r>
+              <a:rPr lang="ko-KR" altLang="en-US" sz="1200" dirty="0" smtClean="0"/>
+              <a:t>이후에는 </a:t>
+            </a:r>
+            <a:r>
+              <a:rPr lang="ko-KR" altLang="en-US" sz="1200" dirty="0" err="1" smtClean="0"/>
+              <a:t>자동결재되는건가</a:t>
+            </a:r>
+            <a:r>
+              <a:rPr lang="en-US" altLang="ko-KR" sz="1200" dirty="0" smtClean="0"/>
+              <a:t>?</a:t>
+            </a:r>
+            <a:endParaRPr lang="ko-KR" altLang="en-US" sz="1200" dirty="0"/>
+          </a:p>
+        </p:txBody>
+      </p:sp>
+      <p:pic>
+        <p:nvPicPr>
+          <p:cNvPr id="5" name="그림 4"/>
+          <p:cNvPicPr>
+            <a:picLocks noChangeAspect="1"/>
+          </p:cNvPicPr>
+          <p:nvPr/>
+        </p:nvPicPr>
+        <p:blipFill>
+          <a:blip r:embed="rId3"/>
+          <a:stretch>
+            <a:fillRect/>
+          </a:stretch>
+        </p:blipFill>
+        <p:spPr>
+          <a:xfrm>
+            <a:off x="971600" y="3933056"/>
+            <a:ext cx="5567107" cy="2543564"/>
+          </a:xfrm>
+          <a:prstGeom prst="rect">
+            <a:avLst/>
+          </a:prstGeom>
+        </p:spPr>
+      </p:pic>
     </p:spTree>
     <p:extLst>
       <p:ext uri="{BB962C8B-B14F-4D97-AF65-F5344CB8AC3E}">
-        <p14:creationId xmlns:p14="http://schemas.microsoft.com/office/powerpoint/2010/main" val="1743070877"/>
+        <p14:creationId xmlns:p14="http://schemas.microsoft.com/office/powerpoint/2010/main" val="3165312771"/>
       </p:ext>
     </p:extLst>
   </p:cSld>
@@ -3955,81 +4029,52 @@
           <a:chExt cx="0" cy="0"/>
         </a:xfrm>
       </p:grpSpPr>
-      <p:pic>
-        <p:nvPicPr>
-          <p:cNvPr id="2" name="그림 1"/>
-          <p:cNvPicPr>
-            <a:picLocks noChangeAspect="1"/>
-          </p:cNvPicPr>
-          <p:nvPr/>
-        </p:nvPicPr>
-        <p:blipFill>
-          <a:blip r:embed="rId2"/>
-          <a:stretch>
-            <a:fillRect/>
-          </a:stretch>
-        </p:blipFill>
-        <p:spPr>
-          <a:xfrm>
-            <a:off x="395536" y="1340768"/>
-            <a:ext cx="5692282" cy="4128081"/>
-          </a:xfrm>
-          <a:prstGeom prst="rect">
-            <a:avLst/>
-          </a:prstGeom>
-        </p:spPr>
-      </p:pic>
-      <p:sp>
-        <p:nvSpPr>
-          <p:cNvPr id="3" name="직사각형 2"/>
-          <p:cNvSpPr/>
-          <p:nvPr/>
-        </p:nvSpPr>
-        <p:spPr>
-          <a:xfrm>
-            <a:off x="395536" y="188640"/>
-            <a:ext cx="3024336" cy="864096"/>
-          </a:xfrm>
-          <a:prstGeom prst="rect">
-            <a:avLst/>
-          </a:prstGeom>
-        </p:spPr>
-        <p:style>
-          <a:lnRef idx="2">
-            <a:schemeClr val="accent1">
-              <a:shade val="50000"/>
-            </a:schemeClr>
-          </a:lnRef>
-          <a:fillRef idx="1">
-            <a:schemeClr val="accent1"/>
-          </a:fillRef>
-          <a:effectRef idx="0">
-            <a:schemeClr val="accent1"/>
-          </a:effectRef>
-          <a:fontRef idx="minor">
-            <a:schemeClr val="lt1"/>
-          </a:fontRef>
-        </p:style>
-        <p:txBody>
-          <a:bodyPr rtlCol="0" anchor="ctr"/>
-          <a:lstStyle/>
-          <a:p>
-            <a:pPr algn="ctr"/>
-            <a:r>
-              <a:rPr lang="ko-KR" altLang="en-US" dirty="0" smtClean="0"/>
-              <a:t>근데 사이트운영중</a:t>
-            </a:r>
-            <a:r>
-              <a:rPr lang="en-US" altLang="ko-KR" dirty="0" smtClean="0"/>
-              <a:t>?</a:t>
-            </a:r>
+      <p:sp>
+        <p:nvSpPr>
+          <p:cNvPr id="2" name="TextBox 1"/>
+          <p:cNvSpPr txBox="1"/>
+          <p:nvPr/>
+        </p:nvSpPr>
+        <p:spPr>
+          <a:xfrm>
+            <a:off x="539552" y="404664"/>
+            <a:ext cx="2448272" cy="523220"/>
+          </a:xfrm>
+          <a:prstGeom prst="rect">
+            <a:avLst/>
+          </a:prstGeom>
+          <a:noFill/>
+        </p:spPr>
+        <p:txBody>
+          <a:bodyPr wrap="square" rtlCol="0">
+            <a:spAutoFit/>
+          </a:bodyPr>
+          <a:lstStyle/>
+          <a:p>
+            <a:r>
+              <a:rPr lang="ko-KR" altLang="en-US" sz="1400" dirty="0" err="1" smtClean="0"/>
+              <a:t>공통코드</a:t>
+            </a:r>
+            <a:r>
+              <a:rPr lang="ko-KR" altLang="en-US" sz="1400" dirty="0" smtClean="0"/>
+              <a:t> </a:t>
+            </a:r>
+            <a:r>
+              <a:rPr lang="ko-KR" altLang="en-US" sz="1400" dirty="0" err="1" smtClean="0"/>
+              <a:t>디비</a:t>
+            </a:r>
+            <a:r>
+              <a:rPr lang="ko-KR" altLang="en-US" sz="1400" dirty="0" smtClean="0"/>
+              <a:t> 구조 적용 완료</a:t>
+            </a:r>
+            <a:endParaRPr lang="ko-KR" altLang="en-US" sz="1400" dirty="0"/>
           </a:p>
         </p:txBody>
       </p:sp>
     </p:spTree>
     <p:extLst>
       <p:ext uri="{BB962C8B-B14F-4D97-AF65-F5344CB8AC3E}">
-        <p14:creationId xmlns:p14="http://schemas.microsoft.com/office/powerpoint/2010/main" val="3341958474"/>
+        <p14:creationId xmlns:p14="http://schemas.microsoft.com/office/powerpoint/2010/main" val="1140657134"/>
       </p:ext>
     </p:extLst>
   </p:cSld>
@@ -4056,82 +4101,10 @@
           <a:chExt cx="0" cy="0"/>
         </a:xfrm>
       </p:grpSpPr>
-      <p:pic>
-        <p:nvPicPr>
-          <p:cNvPr id="2" name="그림 1"/>
-          <p:cNvPicPr>
-            <a:picLocks noChangeAspect="1"/>
-          </p:cNvPicPr>
-          <p:nvPr/>
-        </p:nvPicPr>
-        <p:blipFill>
-          <a:blip r:embed="rId2"/>
-          <a:stretch>
-            <a:fillRect/>
-          </a:stretch>
-        </p:blipFill>
-        <p:spPr>
-          <a:xfrm>
-            <a:off x="467544" y="1295277"/>
-            <a:ext cx="4608512" cy="1036142"/>
-          </a:xfrm>
-          <a:prstGeom prst="rect">
-            <a:avLst/>
-          </a:prstGeom>
-        </p:spPr>
-      </p:pic>
-      <p:pic>
-        <p:nvPicPr>
-          <p:cNvPr id="3" name="그림 2"/>
-          <p:cNvPicPr>
-            <a:picLocks noChangeAspect="1"/>
-          </p:cNvPicPr>
-          <p:nvPr/>
-        </p:nvPicPr>
-        <p:blipFill>
-          <a:blip r:embed="rId3"/>
-          <a:stretch>
-            <a:fillRect/>
-          </a:stretch>
-        </p:blipFill>
-        <p:spPr>
-          <a:xfrm>
-            <a:off x="5120386" y="1358229"/>
-            <a:ext cx="3772094" cy="990651"/>
-          </a:xfrm>
-          <a:prstGeom prst="rect">
-            <a:avLst/>
-          </a:prstGeom>
-        </p:spPr>
-      </p:pic>
-      <p:pic>
-        <p:nvPicPr>
-          <p:cNvPr id="4" name="그림 3"/>
-          <p:cNvPicPr>
-            <a:picLocks noChangeAspect="1"/>
-          </p:cNvPicPr>
-          <p:nvPr/>
-        </p:nvPicPr>
-        <p:blipFill>
-          <a:blip r:embed="rId4"/>
-          <a:stretch>
-            <a:fillRect/>
-          </a:stretch>
-        </p:blipFill>
-        <p:spPr>
-          <a:xfrm>
-            <a:off x="611560" y="2492896"/>
-            <a:ext cx="7753748" cy="4210266"/>
-          </a:xfrm>
-          <a:prstGeom prst="rect">
-            <a:avLst/>
-          </a:prstGeom>
-        </p:spPr>
-      </p:pic>
     </p:spTree>
     <p:extLst>
       <p:ext uri="{BB962C8B-B14F-4D97-AF65-F5344CB8AC3E}">
-        <p14:creationId xmlns:p14="http://schemas.microsoft.com/office/powerpoint/2010/main" val="677929063"/>
+        <p14:creationId xmlns:p14="http://schemas.microsoft.com/office/powerpoint/2010/main" val="2436579104"/>
       </p:ext>
     </p:extLst>
   </p:cSld>
@@ -4158,9 +4131,69 @@
           <a:chExt cx="0" cy="0"/>
         </a:xfrm>
       </p:grpSpPr>
+      <p:sp>
+        <p:nvSpPr>
+          <p:cNvPr id="2" name="TextBox 1"/>
+          <p:cNvSpPr txBox="1"/>
+          <p:nvPr/>
+        </p:nvSpPr>
+        <p:spPr>
+          <a:xfrm>
+            <a:off x="323528" y="332656"/>
+            <a:ext cx="2304256" cy="369332"/>
+          </a:xfrm>
+          <a:prstGeom prst="rect">
+            <a:avLst/>
+          </a:prstGeom>
+          <a:noFill/>
+        </p:spPr>
+        <p:txBody>
+          <a:bodyPr wrap="square" rtlCol="0">
+            <a:spAutoFit/>
+          </a:bodyPr>
+          <a:lstStyle/>
+          <a:p>
+            <a:r>
+              <a:rPr lang="ko-KR" altLang="en-US" dirty="0" smtClean="0"/>
+              <a:t>정지된 사이트 점검</a:t>
+            </a:r>
+            <a:endParaRPr lang="ko-KR" altLang="en-US" dirty="0"/>
+          </a:p>
+        </p:txBody>
+      </p:sp>
+      <p:sp>
+        <p:nvSpPr>
+          <p:cNvPr id="3" name="TextBox 2"/>
+          <p:cNvSpPr txBox="1"/>
+          <p:nvPr/>
+        </p:nvSpPr>
+        <p:spPr>
+          <a:xfrm>
+            <a:off x="539552" y="1196752"/>
+            <a:ext cx="1944216" cy="461665"/>
+          </a:xfrm>
+          <a:prstGeom prst="rect">
+            <a:avLst/>
+          </a:prstGeom>
+          <a:noFill/>
+        </p:spPr>
+        <p:txBody>
+          <a:bodyPr wrap="square" rtlCol="0">
+            <a:spAutoFit/>
+          </a:bodyPr>
+          <a:lstStyle/>
+          <a:p>
+            <a:r>
+              <a:rPr lang="ko-KR" altLang="en-US" sz="1200" dirty="0" smtClean="0"/>
+              <a:t>사이트와 구독 테이블 확인해보자</a:t>
+            </a:r>
+            <a:endParaRPr lang="ko-KR" altLang="en-US" sz="1200" dirty="0"/>
+          </a:p>
+        </p:txBody>
+      </p:sp>
       <p:pic>
         <p:nvPicPr>
-          <p:cNvPr id="2" name="그림 1"/>
+          <p:cNvPr id="4" name="그림 3"/>
           <p:cNvPicPr>
             <a:picLocks noChangeAspect="1"/>
           </p:cNvPicPr>
@@ -4174,18 +4207,154 @@
         </p:blipFill>
         <p:spPr>
           <a:xfrm>
-            <a:off x="395536" y="620688"/>
-            <a:ext cx="7487035" cy="3200564"/>
+            <a:off x="3707904" y="538139"/>
+            <a:ext cx="4425059" cy="3092496"/>
           </a:xfrm>
           <a:prstGeom prst="rect">
             <a:avLst/>
           </a:prstGeom>
         </p:spPr>
       </p:pic>
+      <p:pic>
+        <p:nvPicPr>
+          <p:cNvPr id="5" name="그림 4"/>
+          <p:cNvPicPr>
+            <a:picLocks noChangeAspect="1"/>
+          </p:cNvPicPr>
+          <p:nvPr/>
+        </p:nvPicPr>
+        <p:blipFill>
+          <a:blip r:embed="rId3"/>
+          <a:stretch>
+            <a:fillRect/>
+          </a:stretch>
+        </p:blipFill>
+        <p:spPr>
+          <a:xfrm>
+            <a:off x="899592" y="3831189"/>
+            <a:ext cx="8063898" cy="588419"/>
+          </a:xfrm>
+          <a:prstGeom prst="rect">
+            <a:avLst/>
+          </a:prstGeom>
+        </p:spPr>
+      </p:pic>
+      <p:pic>
+        <p:nvPicPr>
+          <p:cNvPr id="6" name="그림 5"/>
+          <p:cNvPicPr>
+            <a:picLocks noChangeAspect="1"/>
+          </p:cNvPicPr>
+          <p:nvPr/>
+        </p:nvPicPr>
+        <p:blipFill>
+          <a:blip r:embed="rId4"/>
+          <a:stretch>
+            <a:fillRect/>
+          </a:stretch>
+        </p:blipFill>
+        <p:spPr>
+          <a:xfrm>
+            <a:off x="523562" y="2791913"/>
+            <a:ext cx="3076149" cy="716511"/>
+          </a:xfrm>
+          <a:prstGeom prst="rect">
+            <a:avLst/>
+          </a:prstGeom>
+        </p:spPr>
+      </p:pic>
+      <p:pic>
+        <p:nvPicPr>
+          <p:cNvPr id="7" name="그림 6"/>
+          <p:cNvPicPr>
+            <a:picLocks noChangeAspect="1"/>
+          </p:cNvPicPr>
+          <p:nvPr/>
+        </p:nvPicPr>
+        <p:blipFill>
+          <a:blip r:embed="rId5"/>
+          <a:stretch>
+            <a:fillRect/>
+          </a:stretch>
+        </p:blipFill>
+        <p:spPr>
+          <a:xfrm>
+            <a:off x="585530" y="1839112"/>
+            <a:ext cx="3261345" cy="628137"/>
+          </a:xfrm>
+          <a:prstGeom prst="rect">
+            <a:avLst/>
+          </a:prstGeom>
+        </p:spPr>
+      </p:pic>
+      <p:sp>
+        <p:nvSpPr>
+          <p:cNvPr id="8" name="직사각형 7"/>
+          <p:cNvSpPr/>
+          <p:nvPr/>
+        </p:nvSpPr>
+        <p:spPr>
+          <a:xfrm>
+            <a:off x="539551" y="5085184"/>
+            <a:ext cx="3307323" cy="720080"/>
+          </a:xfrm>
+          <a:prstGeom prst="rect">
+            <a:avLst/>
+          </a:prstGeom>
+        </p:spPr>
+        <p:style>
+          <a:lnRef idx="2">
+            <a:schemeClr val="accent1">
+              <a:shade val="50000"/>
+            </a:schemeClr>
+          </a:lnRef>
+          <a:fillRef idx="1">
+            <a:schemeClr val="accent1"/>
+          </a:fillRef>
+          <a:effectRef idx="0">
+            <a:schemeClr val="accent1"/>
+          </a:effectRef>
+          <a:fontRef idx="minor">
+            <a:schemeClr val="lt1"/>
+          </a:fontRef>
+        </p:style>
+        <p:txBody>
+          <a:bodyPr rtlCol="0" anchor="ctr"/>
+          <a:lstStyle/>
+          <a:p>
+            <a:pPr algn="ctr"/>
+            <a:r>
+              <a:rPr lang="ko-KR" altLang="en-US" dirty="0" err="1" smtClean="0"/>
+              <a:t>본사의뢰</a:t>
+            </a:r>
+            <a:r>
+              <a:rPr lang="ko-KR" altLang="en-US" dirty="0" smtClean="0"/>
+              <a:t> </a:t>
+            </a:r>
+            <a:r>
+              <a:rPr lang="en-US" altLang="ko-KR" dirty="0" smtClean="0"/>
+              <a:t>, </a:t>
+            </a:r>
+            <a:r>
+              <a:rPr lang="ko-KR" altLang="en-US" dirty="0" err="1" smtClean="0"/>
+              <a:t>제작중</a:t>
+            </a:r>
+            <a:r>
+              <a:rPr lang="en-US" altLang="ko-KR" dirty="0" smtClean="0"/>
+              <a:t>, </a:t>
+            </a:r>
+            <a:r>
+              <a:rPr lang="ko-KR" altLang="en-US" dirty="0" smtClean="0"/>
+              <a:t>잔금 미납</a:t>
+            </a:r>
+            <a:endParaRPr lang="ko-KR" altLang="en-US" dirty="0"/>
+          </a:p>
+        </p:txBody>
+      </p:sp>
     </p:spTree>
     <p:extLst>
       <p:ext uri="{BB962C8B-B14F-4D97-AF65-F5344CB8AC3E}">
-        <p14:creationId xmlns:p14="http://schemas.microsoft.com/office/powerpoint/2010/main" val="2168295793"/>
+        <p14:creationId xmlns:p14="http://schemas.microsoft.com/office/powerpoint/2010/main" val="1743070877"/>
       </p:ext>
     </p:extLst>
   </p:cSld>
@@ -4228,8 +4397,8 @@
         </p:blipFill>
         <p:spPr>
           <a:xfrm>
-            <a:off x="611560" y="1772816"/>
-            <a:ext cx="3974401" cy="3482801"/>
+            <a:off x="395536" y="1340768"/>
+            <a:ext cx="5692282" cy="4128081"/>
           </a:xfrm>
           <a:prstGeom prst="rect">
             <a:avLst/>
@@ -4238,94 +4407,55 @@
       </p:pic>
       <p:sp>
         <p:nvSpPr>
-          <p:cNvPr id="3" name="TextBox 2"/>
-          <p:cNvSpPr txBox="1"/>
-          <p:nvPr/>
-        </p:nvSpPr>
-        <p:spPr>
-          <a:xfrm>
-            <a:off x="539552" y="404664"/>
-            <a:ext cx="3168352" cy="369332"/>
-          </a:xfrm>
-          <a:prstGeom prst="rect">
-            <a:avLst/>
-          </a:prstGeom>
-          <a:noFill/>
-        </p:spPr>
-        <p:txBody>
-          <a:bodyPr wrap="square" rtlCol="0">
-            <a:spAutoFit/>
-          </a:bodyPr>
-          <a:lstStyle/>
-          <a:p>
-            <a:r>
-              <a:rPr lang="ko-KR" altLang="en-US" dirty="0" err="1" smtClean="0"/>
-              <a:t>검수중인데</a:t>
-            </a:r>
+          <p:cNvPr id="3" name="직사각형 2"/>
+          <p:cNvSpPr/>
+          <p:nvPr/>
+        </p:nvSpPr>
+        <p:spPr>
+          <a:xfrm>
+            <a:off x="395536" y="188640"/>
+            <a:ext cx="3024336" cy="864096"/>
+          </a:xfrm>
+          <a:prstGeom prst="rect">
+            <a:avLst/>
+          </a:prstGeom>
+        </p:spPr>
+        <p:style>
+          <a:lnRef idx="2">
+            <a:schemeClr val="accent1">
+              <a:shade val="50000"/>
+            </a:schemeClr>
+          </a:lnRef>
+          <a:fillRef idx="1">
+            <a:schemeClr val="accent1"/>
+          </a:fillRef>
+          <a:effectRef idx="0">
+            <a:schemeClr val="accent1"/>
+          </a:effectRef>
+          <a:fontRef idx="minor">
+            <a:schemeClr val="lt1"/>
+          </a:fontRef>
+        </p:style>
+        <p:txBody>
+          <a:bodyPr rtlCol="0" anchor="ctr"/>
+          <a:lstStyle/>
+          <a:p>
+            <a:pPr algn="ctr"/>
             <a:r>
               <a:rPr lang="ko-KR" altLang="en-US" dirty="0" smtClean="0"/>
-              <a:t> </a:t>
-            </a:r>
-            <a:r>
-              <a:rPr lang="ko-KR" altLang="en-US" dirty="0" err="1" smtClean="0"/>
-              <a:t>사이트나오네</a:t>
-            </a:r>
-            <a:endParaRPr lang="ko-KR" altLang="en-US" dirty="0"/>
-          </a:p>
-        </p:txBody>
-      </p:sp>
-      <p:pic>
-        <p:nvPicPr>
-          <p:cNvPr id="4" name="그림 3"/>
-          <p:cNvPicPr>
-            <a:picLocks noChangeAspect="1"/>
-          </p:cNvPicPr>
-          <p:nvPr/>
-        </p:nvPicPr>
-        <p:blipFill>
-          <a:blip r:embed="rId3"/>
-          <a:stretch>
-            <a:fillRect/>
-          </a:stretch>
-        </p:blipFill>
-        <p:spPr>
-          <a:xfrm>
-            <a:off x="5148064" y="1772816"/>
-            <a:ext cx="3778489" cy="3030141"/>
-          </a:xfrm>
-          <a:prstGeom prst="rect">
-            <a:avLst/>
-          </a:prstGeom>
-        </p:spPr>
-      </p:pic>
-      <p:pic>
-        <p:nvPicPr>
-          <p:cNvPr id="5" name="그림 4"/>
-          <p:cNvPicPr>
-            <a:picLocks noChangeAspect="1"/>
-          </p:cNvPicPr>
-          <p:nvPr/>
-        </p:nvPicPr>
-        <p:blipFill>
-          <a:blip r:embed="rId4"/>
-          <a:stretch>
-            <a:fillRect/>
-          </a:stretch>
-        </p:blipFill>
-        <p:spPr>
-          <a:xfrm>
-            <a:off x="2134925" y="5085184"/>
-            <a:ext cx="5524784" cy="1968601"/>
-          </a:xfrm>
-          <a:prstGeom prst="rect">
-            <a:avLst/>
-          </a:prstGeom>
-        </p:spPr>
-      </p:pic>
+              <a:t>근데 사이트운영중</a:t>
+            </a:r>
+            <a:r>
+              <a:rPr lang="en-US" altLang="ko-KR" dirty="0" smtClean="0"/>
+              <a:t>?</a:t>
+            </a:r>
+          </a:p>
+        </p:txBody>
+      </p:sp>
     </p:spTree>
     <p:extLst>
       <p:ext uri="{BB962C8B-B14F-4D97-AF65-F5344CB8AC3E}">
-        <p14:creationId xmlns:p14="http://schemas.microsoft.com/office/powerpoint/2010/main" val="1610696907"/>
+        <p14:creationId xmlns:p14="http://schemas.microsoft.com/office/powerpoint/2010/main" val="3341958474"/>
       </p:ext>
     </p:extLst>
   </p:cSld>
@@ -4352,60 +4482,82 @@
           <a:chExt cx="0" cy="0"/>
         </a:xfrm>
       </p:grpSpPr>
-      <p:sp>
-        <p:nvSpPr>
-          <p:cNvPr id="2" name="TextBox 1"/>
-          <p:cNvSpPr txBox="1"/>
-          <p:nvPr/>
-        </p:nvSpPr>
-        <p:spPr>
-          <a:xfrm>
-            <a:off x="467544" y="476672"/>
-            <a:ext cx="3600400" cy="523220"/>
-          </a:xfrm>
-          <a:prstGeom prst="rect">
-            <a:avLst/>
-          </a:prstGeom>
-          <a:noFill/>
-        </p:spPr>
-        <p:txBody>
-          <a:bodyPr wrap="square" rtlCol="0">
-            <a:spAutoFit/>
-          </a:bodyPr>
-          <a:lstStyle/>
-          <a:p>
-            <a:r>
-              <a:rPr lang="ko-KR" altLang="en-US" sz="1400" dirty="0" smtClean="0"/>
-              <a:t>계좌이체고객</a:t>
-            </a:r>
-            <a:r>
-              <a:rPr lang="en-US" altLang="ko-KR" sz="1400" dirty="0" smtClean="0"/>
-              <a:t>case : </a:t>
-            </a:r>
-            <a:r>
-              <a:rPr lang="ko-KR" altLang="en-US" sz="1400" dirty="0" smtClean="0"/>
-              <a:t>고객이 잔금을 이체한다</a:t>
-            </a:r>
-            <a:r>
-              <a:rPr lang="en-US" altLang="ko-KR" sz="1400" dirty="0" smtClean="0"/>
-              <a:t>. &gt; </a:t>
-            </a:r>
-            <a:r>
-              <a:rPr lang="ko-KR" altLang="en-US" sz="1400" dirty="0" smtClean="0"/>
-              <a:t>어떻게</a:t>
-            </a:r>
-            <a:r>
-              <a:rPr lang="en-US" altLang="ko-KR" sz="1400" dirty="0" smtClean="0"/>
-              <a:t>?  &gt; </a:t>
-            </a:r>
-            <a:endParaRPr lang="ko-KR" altLang="en-US" sz="1400" dirty="0"/>
-          </a:p>
-        </p:txBody>
-      </p:sp>
+      <p:pic>
+        <p:nvPicPr>
+          <p:cNvPr id="2" name="그림 1"/>
+          <p:cNvPicPr>
+            <a:picLocks noChangeAspect="1"/>
+          </p:cNvPicPr>
+          <p:nvPr/>
+        </p:nvPicPr>
+        <p:blipFill>
+          <a:blip r:embed="rId2"/>
+          <a:stretch>
+            <a:fillRect/>
+          </a:stretch>
+        </p:blipFill>
+        <p:spPr>
+          <a:xfrm>
+            <a:off x="467544" y="1295277"/>
+            <a:ext cx="4608512" cy="1036142"/>
+          </a:xfrm>
+          <a:prstGeom prst="rect">
+            <a:avLst/>
+          </a:prstGeom>
+        </p:spPr>
+      </p:pic>
+      <p:pic>
+        <p:nvPicPr>
+          <p:cNvPr id="3" name="그림 2"/>
+          <p:cNvPicPr>
+            <a:picLocks noChangeAspect="1"/>
+          </p:cNvPicPr>
+          <p:nvPr/>
+        </p:nvPicPr>
+        <p:blipFill>
+          <a:blip r:embed="rId3"/>
+          <a:stretch>
+            <a:fillRect/>
+          </a:stretch>
+        </p:blipFill>
+        <p:spPr>
+          <a:xfrm>
+            <a:off x="5120386" y="1358229"/>
+            <a:ext cx="3772094" cy="990651"/>
+          </a:xfrm>
+          <a:prstGeom prst="rect">
+            <a:avLst/>
+          </a:prstGeom>
+        </p:spPr>
+      </p:pic>
+      <p:pic>
+        <p:nvPicPr>
+          <p:cNvPr id="4" name="그림 3"/>
+          <p:cNvPicPr>
+            <a:picLocks noChangeAspect="1"/>
+          </p:cNvPicPr>
+          <p:nvPr/>
+        </p:nvPicPr>
+        <p:blipFill>
+          <a:blip r:embed="rId4"/>
+          <a:stretch>
+            <a:fillRect/>
+          </a:stretch>
+        </p:blipFill>
+        <p:spPr>
+          <a:xfrm>
+            <a:off x="611560" y="2492896"/>
+            <a:ext cx="7753748" cy="4210266"/>
+          </a:xfrm>
+          <a:prstGeom prst="rect">
+            <a:avLst/>
+          </a:prstGeom>
+        </p:spPr>
+      </p:pic>
     </p:spTree>
     <p:extLst>
       <p:ext uri="{BB962C8B-B14F-4D97-AF65-F5344CB8AC3E}">
-        <p14:creationId xmlns:p14="http://schemas.microsoft.com/office/powerpoint/2010/main" val="2975310196"/>
+        <p14:creationId xmlns:p14="http://schemas.microsoft.com/office/powerpoint/2010/main" val="677929063"/>
       </p:ext>
     </p:extLst>
   </p:cSld>
@@ -4432,10 +4584,34 @@
           <a:chExt cx="0" cy="0"/>
         </a:xfrm>
       </p:grpSpPr>
+      <p:pic>
+        <p:nvPicPr>
+          <p:cNvPr id="2" name="그림 1"/>
+          <p:cNvPicPr>
+            <a:picLocks noChangeAspect="1"/>
+          </p:cNvPicPr>
+          <p:nvPr/>
+        </p:nvPicPr>
+        <p:blipFill>
+          <a:blip r:embed="rId2"/>
+          <a:stretch>
+            <a:fillRect/>
+          </a:stretch>
+        </p:blipFill>
+        <p:spPr>
+          <a:xfrm>
+            <a:off x="395536" y="620688"/>
+            <a:ext cx="7487035" cy="3200564"/>
+          </a:xfrm>
+          <a:prstGeom prst="rect">
+            <a:avLst/>
+          </a:prstGeom>
+        </p:spPr>
+      </p:pic>
     </p:spTree>
     <p:extLst>
       <p:ext uri="{BB962C8B-B14F-4D97-AF65-F5344CB8AC3E}">
-        <p14:creationId xmlns:p14="http://schemas.microsoft.com/office/powerpoint/2010/main" val="1862719168"/>
+        <p14:creationId xmlns:p14="http://schemas.microsoft.com/office/powerpoint/2010/main" val="2168295793"/>
       </p:ext>
     </p:extLst>
   </p:cSld>
@@ -4462,43 +4638,9 @@
           <a:chExt cx="0" cy="0"/>
         </a:xfrm>
       </p:grpSpPr>
-      <p:sp>
-        <p:nvSpPr>
-          <p:cNvPr id="2" name="TextBox 1"/>
-          <p:cNvSpPr txBox="1"/>
-          <p:nvPr/>
-        </p:nvSpPr>
-        <p:spPr>
-          <a:xfrm>
-            <a:off x="395536" y="476672"/>
-            <a:ext cx="3600400" cy="369332"/>
-          </a:xfrm>
-          <a:prstGeom prst="rect">
-            <a:avLst/>
-          </a:prstGeom>
-          <a:noFill/>
-        </p:spPr>
-        <p:txBody>
-          <a:bodyPr wrap="square" rtlCol="0">
-            <a:spAutoFit/>
-          </a:bodyPr>
-          <a:lstStyle/>
-          <a:p>
-            <a:r>
-              <a:rPr lang="en-US" altLang="ko-KR" dirty="0" smtClean="0"/>
-              <a:t>20260901 flow</a:t>
-            </a:r>
-            <a:r>
-              <a:rPr lang="ko-KR" altLang="en-US" dirty="0" smtClean="0"/>
-              <a:t>점검</a:t>
-            </a:r>
-            <a:endParaRPr lang="ko-KR" altLang="en-US" dirty="0"/>
-          </a:p>
-        </p:txBody>
-      </p:sp>
       <p:pic>
         <p:nvPicPr>
-          <p:cNvPr id="3" name="그림 2"/>
+          <p:cNvPr id="2" name="그림 1"/>
           <p:cNvPicPr>
             <a:picLocks noChangeAspect="1"/>
           </p:cNvPicPr>
@@ -4512,8 +4654,8 @@
         </p:blipFill>
         <p:spPr>
           <a:xfrm>
-            <a:off x="467544" y="1124744"/>
-            <a:ext cx="8298973" cy="572887"/>
+            <a:off x="611560" y="1772816"/>
+            <a:ext cx="3974401" cy="3482801"/>
           </a:xfrm>
           <a:prstGeom prst="rect">
             <a:avLst/>
@@ -4522,14 +4664,14 @@
       </p:pic>
       <p:sp>
         <p:nvSpPr>
-          <p:cNvPr id="4" name="TextBox 3"/>
+          <p:cNvPr id="3" name="TextBox 2"/>
           <p:cNvSpPr txBox="1"/>
           <p:nvPr/>
         </p:nvSpPr>
         <p:spPr>
           <a:xfrm>
-            <a:off x="446221" y="2195622"/>
-            <a:ext cx="3744416" cy="923330"/>
+            <a:off x="539552" y="404664"/>
+            <a:ext cx="3168352" cy="369332"/>
           </a:xfrm>
           <a:prstGeom prst="rect">
             <a:avLst/>
@@ -4543,37 +4685,24 @@
           <a:lstStyle/>
           <a:p>
             <a:r>
+              <a:rPr lang="ko-KR" altLang="en-US" dirty="0" err="1" smtClean="0"/>
+              <a:t>검수중인데</a:t>
+            </a:r>
+            <a:r>
               <a:rPr lang="ko-KR" altLang="en-US" dirty="0" smtClean="0"/>
-              <a:t>배포되고있음</a:t>
-            </a:r>
-            <a:r>
-              <a:rPr lang="en-US" altLang="ko-KR" dirty="0" smtClean="0"/>
-              <a:t>. </a:t>
+              <a:t> </a:t>
             </a:r>
             <a:r>
               <a:rPr lang="ko-KR" altLang="en-US" dirty="0" err="1" smtClean="0"/>
-              <a:t>돈냈나</a:t>
-            </a:r>
-            <a:r>
-              <a:rPr lang="en-US" altLang="ko-KR" dirty="0" smtClean="0"/>
-              <a:t>? </a:t>
-            </a:r>
-          </a:p>
-          <a:p>
-            <a:r>
-              <a:rPr lang="ko-KR" altLang="en-US" dirty="0" err="1" smtClean="0"/>
-              <a:t>운영중</a:t>
-            </a:r>
-            <a:endParaRPr lang="en-US" altLang="ko-KR" dirty="0" smtClean="0"/>
-          </a:p>
-          <a:p>
+              <a:t>사이트나오네</a:t>
+            </a:r>
             <a:endParaRPr lang="ko-KR" altLang="en-US" dirty="0"/>
           </a:p>
         </p:txBody>
       </p:sp>
       <p:pic>
         <p:nvPicPr>
-          <p:cNvPr id="5" name="그림 4"/>
+          <p:cNvPr id="4" name="그림 3"/>
           <p:cNvPicPr>
             <a:picLocks noChangeAspect="1"/>
           </p:cNvPicPr>
@@ -4587,8 +4716,8 @@
         </p:blipFill>
         <p:spPr>
           <a:xfrm>
-            <a:off x="395536" y="3138807"/>
-            <a:ext cx="4877511" cy="1897879"/>
+            <a:off x="5148064" y="1772816"/>
+            <a:ext cx="3778489" cy="3030141"/>
           </a:xfrm>
           <a:prstGeom prst="rect">
             <a:avLst/>
@@ -4597,7 +4726,7 @@
       </p:pic>
       <p:pic>
         <p:nvPicPr>
-          <p:cNvPr id="6" name="그림 5"/>
+          <p:cNvPr id="5" name="그림 4"/>
           <p:cNvPicPr>
             <a:picLocks noChangeAspect="1"/>
           </p:cNvPicPr>
@@ -4611,8 +4740,8 @@
         </p:blipFill>
         <p:spPr>
           <a:xfrm>
-            <a:off x="2123728" y="2636912"/>
-            <a:ext cx="5544616" cy="3517552"/>
+            <a:off x="2134925" y="5085184"/>
+            <a:ext cx="5524784" cy="1968601"/>
           </a:xfrm>
           <a:prstGeom prst="rect">
             <a:avLst/>
@@ -4622,7 +4751,7 @@
     </p:spTree>
     <p:extLst>
       <p:ext uri="{BB962C8B-B14F-4D97-AF65-F5344CB8AC3E}">
-        <p14:creationId xmlns:p14="http://schemas.microsoft.com/office/powerpoint/2010/main" val="1988109650"/>
+        <p14:creationId xmlns:p14="http://schemas.microsoft.com/office/powerpoint/2010/main" val="1610696907"/>
       </p:ext>
     </p:extLst>
   </p:cSld>
@@ -4651,420 +4780,58 @@
       </p:grpSpPr>
       <p:sp>
         <p:nvSpPr>
-          <p:cNvPr id="2" name="직사각형 1"/>
-          <p:cNvSpPr/>
-          <p:nvPr/>
-        </p:nvSpPr>
-        <p:spPr>
-          <a:xfrm>
-            <a:off x="-1548680" y="1196752"/>
-            <a:ext cx="3672408" cy="576064"/>
-          </a:xfrm>
-          <a:prstGeom prst="rect">
-            <a:avLst/>
-          </a:prstGeom>
-        </p:spPr>
-        <p:style>
-          <a:lnRef idx="2">
-            <a:schemeClr val="accent1">
-              <a:shade val="50000"/>
-            </a:schemeClr>
-          </a:lnRef>
-          <a:fillRef idx="1">
-            <a:schemeClr val="accent1"/>
-          </a:fillRef>
-          <a:effectRef idx="0">
-            <a:schemeClr val="accent1"/>
-          </a:effectRef>
-          <a:fontRef idx="minor">
-            <a:schemeClr val="lt1"/>
-          </a:fontRef>
-        </p:style>
-        <p:txBody>
-          <a:bodyPr rtlCol="0" anchor="ctr"/>
-          <a:lstStyle/>
-          <a:p>
-            <a:pPr algn="ctr"/>
-            <a:r>
-              <a:rPr lang="ko-KR" altLang="en-US" dirty="0" smtClean="0"/>
-              <a:t>루트</a:t>
-            </a:r>
-            <a:r>
-              <a:rPr lang="en-US" altLang="ko-KR" dirty="0" smtClean="0"/>
-              <a:t>1: </a:t>
-            </a:r>
-            <a:r>
-              <a:rPr lang="ko-KR" altLang="en-US" dirty="0" err="1" smtClean="0"/>
-              <a:t>직접개발</a:t>
-            </a:r>
-            <a:r>
-              <a:rPr lang="ko-KR" altLang="en-US" dirty="0" smtClean="0"/>
-              <a:t> 배포</a:t>
-            </a:r>
-            <a:endParaRPr lang="en-US" altLang="ko-KR" dirty="0" smtClean="0"/>
-          </a:p>
-          <a:p>
-            <a:pPr algn="ctr"/>
-            <a:endParaRPr lang="ko-KR" altLang="en-US" dirty="0"/>
-          </a:p>
-        </p:txBody>
-      </p:sp>
-      <p:sp>
-        <p:nvSpPr>
-          <p:cNvPr id="3" name="직사각형 2"/>
-          <p:cNvSpPr/>
-          <p:nvPr/>
-        </p:nvSpPr>
-        <p:spPr>
-          <a:xfrm>
-            <a:off x="2339752" y="620688"/>
-            <a:ext cx="6192688" cy="1512168"/>
-          </a:xfrm>
-          <a:prstGeom prst="rect">
-            <a:avLst/>
-          </a:prstGeom>
-        </p:spPr>
-        <p:style>
-          <a:lnRef idx="2">
-            <a:schemeClr val="accent1">
-              <a:shade val="50000"/>
-            </a:schemeClr>
-          </a:lnRef>
-          <a:fillRef idx="1">
-            <a:schemeClr val="accent1"/>
-          </a:fillRef>
-          <a:effectRef idx="0">
-            <a:schemeClr val="accent1"/>
-          </a:effectRef>
-          <a:fontRef idx="minor">
-            <a:schemeClr val="lt1"/>
-          </a:fontRef>
-        </p:style>
-        <p:txBody>
-          <a:bodyPr rtlCol="0" anchor="ctr"/>
-          <a:lstStyle/>
-          <a:p>
-            <a:pPr algn="ctr"/>
-            <a:r>
-              <a:rPr lang="ko-KR" altLang="en-US" sz="1200" dirty="0" smtClean="0"/>
-              <a:t>사이트 제작</a:t>
-            </a:r>
-            <a:r>
-              <a:rPr lang="en-US" altLang="ko-KR" sz="1200" dirty="0" smtClean="0"/>
-              <a:t>&gt; </a:t>
-            </a:r>
-            <a:r>
-              <a:rPr lang="ko-KR" altLang="en-US" sz="1200" dirty="0" smtClean="0"/>
-              <a:t>구독 결제수단 선택</a:t>
-            </a:r>
-            <a:r>
-              <a:rPr lang="en-US" altLang="ko-KR" sz="1200" dirty="0" smtClean="0"/>
-              <a:t>(</a:t>
-            </a:r>
-            <a:r>
-              <a:rPr lang="ko-KR" altLang="en-US" sz="1200" dirty="0" smtClean="0"/>
-              <a:t>카드</a:t>
-            </a:r>
-            <a:r>
-              <a:rPr lang="en-US" altLang="ko-KR" sz="1200" dirty="0" smtClean="0"/>
-              <a:t> or</a:t>
-            </a:r>
-            <a:r>
-              <a:rPr lang="ko-KR" altLang="en-US" sz="1200" dirty="0" smtClean="0"/>
-              <a:t> 이체 선택</a:t>
-            </a:r>
-            <a:r>
-              <a:rPr lang="en-US" altLang="ko-KR" sz="1200" dirty="0" smtClean="0"/>
-              <a:t>) &gt; </a:t>
-            </a:r>
-            <a:r>
-              <a:rPr lang="ko-KR" altLang="en-US" sz="1200" dirty="0" smtClean="0"/>
-              <a:t>배포</a:t>
-            </a:r>
-            <a:r>
-              <a:rPr lang="en-US" altLang="ko-KR" sz="1200" dirty="0" smtClean="0"/>
-              <a:t>(14</a:t>
-            </a:r>
-            <a:r>
-              <a:rPr lang="ko-KR" altLang="en-US" sz="1200" dirty="0" smtClean="0"/>
-              <a:t>일 </a:t>
-            </a:r>
-            <a:r>
-              <a:rPr lang="en-US" altLang="ko-KR" sz="1200" dirty="0" smtClean="0"/>
-              <a:t>trial) &gt; 14</a:t>
-            </a:r>
-            <a:r>
-              <a:rPr lang="ko-KR" altLang="en-US" sz="1200" dirty="0" smtClean="0"/>
-              <a:t>일이후 자동결제</a:t>
-            </a:r>
-            <a:r>
-              <a:rPr lang="en-US" altLang="ko-KR" sz="1200" dirty="0" smtClean="0"/>
-              <a:t>, </a:t>
-            </a:r>
-            <a:r>
-              <a:rPr lang="ko-KR" altLang="en-US" sz="1200" dirty="0" smtClean="0"/>
-              <a:t>계좌 </a:t>
-            </a:r>
-            <a:r>
-              <a:rPr lang="ko-KR" altLang="en-US" sz="1200" dirty="0" err="1" smtClean="0"/>
-              <a:t>입급</a:t>
-            </a:r>
-            <a:r>
-              <a:rPr lang="ko-KR" altLang="en-US" sz="1200" dirty="0" smtClean="0"/>
-              <a:t> 알림 </a:t>
-            </a:r>
-            <a:r>
-              <a:rPr lang="en-US" altLang="ko-KR" sz="1200" dirty="0" smtClean="0"/>
-              <a:t>&gt; </a:t>
-            </a:r>
-            <a:r>
-              <a:rPr lang="ko-KR" altLang="en-US" sz="1200" dirty="0" smtClean="0"/>
-              <a:t>입금확인 </a:t>
-            </a:r>
-            <a:r>
-              <a:rPr lang="en-US" altLang="ko-KR" sz="1200" dirty="0" smtClean="0"/>
-              <a:t>&gt; </a:t>
-            </a:r>
-            <a:r>
-              <a:rPr lang="ko-KR" altLang="en-US" sz="1200" dirty="0" err="1" smtClean="0"/>
-              <a:t>배포계속</a:t>
-            </a:r>
-            <a:r>
-              <a:rPr lang="ko-KR" altLang="en-US" sz="1200" dirty="0" smtClean="0"/>
-              <a:t> </a:t>
-            </a:r>
-            <a:endParaRPr lang="ko-KR" altLang="en-US" sz="1200" dirty="0"/>
-          </a:p>
-        </p:txBody>
-      </p:sp>
-      <p:sp>
-        <p:nvSpPr>
-          <p:cNvPr id="5" name="직사각형 4"/>
-          <p:cNvSpPr/>
-          <p:nvPr/>
-        </p:nvSpPr>
-        <p:spPr>
-          <a:xfrm>
-            <a:off x="-1548680" y="3573016"/>
-            <a:ext cx="3672408" cy="576064"/>
-          </a:xfrm>
-          <a:prstGeom prst="rect">
-            <a:avLst/>
-          </a:prstGeom>
-        </p:spPr>
-        <p:style>
-          <a:lnRef idx="2">
-            <a:schemeClr val="accent1">
-              <a:shade val="50000"/>
-            </a:schemeClr>
-          </a:lnRef>
-          <a:fillRef idx="1">
-            <a:schemeClr val="accent1"/>
-          </a:fillRef>
-          <a:effectRef idx="0">
-            <a:schemeClr val="accent1"/>
-          </a:effectRef>
-          <a:fontRef idx="minor">
-            <a:schemeClr val="lt1"/>
-          </a:fontRef>
-        </p:style>
-        <p:txBody>
-          <a:bodyPr rtlCol="0" anchor="ctr"/>
-          <a:lstStyle/>
-          <a:p>
-            <a:pPr algn="ctr"/>
-            <a:r>
-              <a:rPr lang="ko-KR" altLang="en-US" dirty="0" smtClean="0"/>
-              <a:t>루트</a:t>
-            </a:r>
-            <a:r>
-              <a:rPr lang="en-US" altLang="ko-KR" dirty="0" smtClean="0"/>
-              <a:t>2: </a:t>
-            </a:r>
-            <a:r>
-              <a:rPr lang="ko-KR" altLang="en-US" dirty="0" err="1" smtClean="0"/>
-              <a:t>개발요청</a:t>
-            </a:r>
-            <a:endParaRPr lang="en-US" altLang="ko-KR" dirty="0" smtClean="0"/>
-          </a:p>
-          <a:p>
-            <a:pPr algn="ctr"/>
-            <a:endParaRPr lang="ko-KR" altLang="en-US" dirty="0"/>
-          </a:p>
-        </p:txBody>
-      </p:sp>
-      <p:sp>
-        <p:nvSpPr>
-          <p:cNvPr id="6" name="직사각형 5"/>
-          <p:cNvSpPr/>
-          <p:nvPr/>
-        </p:nvSpPr>
-        <p:spPr>
-          <a:xfrm>
-            <a:off x="2339752" y="3284984"/>
-            <a:ext cx="6192688" cy="1512168"/>
-          </a:xfrm>
-          <a:prstGeom prst="rect">
-            <a:avLst/>
-          </a:prstGeom>
-        </p:spPr>
-        <p:style>
-          <a:lnRef idx="2">
-            <a:schemeClr val="accent1">
-              <a:shade val="50000"/>
-            </a:schemeClr>
-          </a:lnRef>
-          <a:fillRef idx="1">
-            <a:schemeClr val="accent1"/>
-          </a:fillRef>
-          <a:effectRef idx="0">
-            <a:schemeClr val="accent1"/>
-          </a:effectRef>
-          <a:fontRef idx="minor">
-            <a:schemeClr val="lt1"/>
-          </a:fontRef>
-        </p:style>
-        <p:txBody>
-          <a:bodyPr rtlCol="0" anchor="ctr"/>
-          <a:lstStyle/>
-          <a:p>
-            <a:pPr algn="ctr"/>
-            <a:r>
-              <a:rPr lang="ko-KR" altLang="en-US" sz="1200" dirty="0" smtClean="0"/>
-              <a:t>사이트 제작 요청 </a:t>
-            </a:r>
-            <a:r>
-              <a:rPr lang="en-US" altLang="ko-KR" sz="1200" dirty="0" smtClean="0"/>
-              <a:t>&gt; </a:t>
-            </a:r>
-            <a:r>
-              <a:rPr lang="ko-KR" altLang="en-US" sz="1200" dirty="0" err="1" smtClean="0"/>
-              <a:t>선금지불</a:t>
-            </a:r>
-            <a:r>
-              <a:rPr lang="ko-KR" altLang="en-US" sz="1200" dirty="0" smtClean="0"/>
-              <a:t> </a:t>
-            </a:r>
-            <a:r>
-              <a:rPr lang="en-US" altLang="ko-KR" sz="1200" dirty="0" smtClean="0"/>
-              <a:t>&gt; </a:t>
-            </a:r>
-            <a:r>
-              <a:rPr lang="ko-KR" altLang="en-US" sz="1200" dirty="0" smtClean="0"/>
-              <a:t>본사 검토 </a:t>
-            </a:r>
-            <a:r>
-              <a:rPr lang="en-US" altLang="ko-KR" sz="1200" dirty="0" smtClean="0"/>
-              <a:t>, </a:t>
-            </a:r>
-            <a:r>
-              <a:rPr lang="ko-KR" altLang="en-US" sz="1200" dirty="0" smtClean="0"/>
-              <a:t>개발 </a:t>
-            </a:r>
-            <a:r>
-              <a:rPr lang="en-US" altLang="ko-KR" sz="1200" dirty="0" smtClean="0"/>
-              <a:t>&gt; </a:t>
-            </a:r>
-            <a:r>
-              <a:rPr lang="ko-KR" altLang="en-US" sz="1200" dirty="0" err="1" smtClean="0"/>
-              <a:t>잔금요청</a:t>
-            </a:r>
-            <a:r>
-              <a:rPr lang="ko-KR" altLang="en-US" sz="1200" dirty="0" smtClean="0"/>
-              <a:t> </a:t>
-            </a:r>
-            <a:r>
-              <a:rPr lang="en-US" altLang="ko-KR" sz="1200" dirty="0" smtClean="0"/>
-              <a:t>&gt; </a:t>
-            </a:r>
-            <a:r>
-              <a:rPr lang="ko-KR" altLang="en-US" sz="1200" dirty="0" smtClean="0"/>
-              <a:t>구독 </a:t>
-            </a:r>
-            <a:r>
-              <a:rPr lang="ko-KR" altLang="en-US" sz="1200" dirty="0"/>
-              <a:t>결제수단 선택</a:t>
-            </a:r>
-            <a:r>
-              <a:rPr lang="en-US" altLang="ko-KR" sz="1200" dirty="0"/>
-              <a:t>(</a:t>
-            </a:r>
-            <a:r>
-              <a:rPr lang="ko-KR" altLang="en-US" sz="1200" dirty="0"/>
-              <a:t>카드</a:t>
-            </a:r>
-            <a:r>
-              <a:rPr lang="en-US" altLang="ko-KR" sz="1200" dirty="0"/>
-              <a:t> or</a:t>
-            </a:r>
-            <a:r>
-              <a:rPr lang="ko-KR" altLang="en-US" sz="1200" dirty="0"/>
-              <a:t> 이체 선택</a:t>
-            </a:r>
-            <a:r>
-              <a:rPr lang="en-US" altLang="ko-KR" sz="1200" dirty="0"/>
-              <a:t>) &gt; </a:t>
-            </a:r>
-            <a:r>
-              <a:rPr lang="ko-KR" altLang="en-US" sz="1200" dirty="0"/>
-              <a:t>배포</a:t>
-            </a:r>
-            <a:r>
-              <a:rPr lang="en-US" altLang="ko-KR" sz="1200" dirty="0"/>
-              <a:t>(14</a:t>
-            </a:r>
-            <a:r>
-              <a:rPr lang="ko-KR" altLang="en-US" sz="1200" dirty="0"/>
-              <a:t>일 </a:t>
-            </a:r>
-            <a:r>
-              <a:rPr lang="en-US" altLang="ko-KR" sz="1200" dirty="0"/>
-              <a:t>trial) &gt; 14</a:t>
-            </a:r>
-            <a:r>
-              <a:rPr lang="ko-KR" altLang="en-US" sz="1200" dirty="0"/>
-              <a:t>일이후 자동결제</a:t>
-            </a:r>
-            <a:r>
-              <a:rPr lang="en-US" altLang="ko-KR" sz="1200" dirty="0"/>
-              <a:t>, </a:t>
-            </a:r>
-            <a:r>
-              <a:rPr lang="ko-KR" altLang="en-US" sz="1200" dirty="0"/>
-              <a:t>계좌 </a:t>
-            </a:r>
-            <a:r>
-              <a:rPr lang="ko-KR" altLang="en-US" sz="1200" dirty="0" err="1"/>
-              <a:t>입급</a:t>
-            </a:r>
-            <a:r>
-              <a:rPr lang="ko-KR" altLang="en-US" sz="1200" dirty="0"/>
-              <a:t> 알림 </a:t>
-            </a:r>
-            <a:r>
-              <a:rPr lang="en-US" altLang="ko-KR" sz="1200" dirty="0"/>
-              <a:t>&gt; </a:t>
-            </a:r>
-            <a:r>
-              <a:rPr lang="ko-KR" altLang="en-US" sz="1200" dirty="0"/>
-              <a:t>입금확인 </a:t>
-            </a:r>
-            <a:r>
-              <a:rPr lang="en-US" altLang="ko-KR" sz="1200" dirty="0"/>
-              <a:t>&gt; </a:t>
-            </a:r>
-            <a:r>
-              <a:rPr lang="ko-KR" altLang="en-US" sz="1200" dirty="0" err="1"/>
-              <a:t>배포계속</a:t>
-            </a:r>
-            <a:endParaRPr lang="ko-KR" altLang="en-US" sz="1200" dirty="0"/>
+          <p:cNvPr id="2" name="TextBox 1"/>
+          <p:cNvSpPr txBox="1"/>
+          <p:nvPr/>
+        </p:nvSpPr>
+        <p:spPr>
+          <a:xfrm>
+            <a:off x="467544" y="476672"/>
+            <a:ext cx="3600400" cy="523220"/>
+          </a:xfrm>
+          <a:prstGeom prst="rect">
+            <a:avLst/>
+          </a:prstGeom>
+          <a:noFill/>
+        </p:spPr>
+        <p:txBody>
+          <a:bodyPr wrap="square" rtlCol="0">
+            <a:spAutoFit/>
+          </a:bodyPr>
+          <a:lstStyle/>
+          <a:p>
+            <a:r>
+              <a:rPr lang="ko-KR" altLang="en-US" sz="1400" dirty="0" smtClean="0"/>
+              <a:t>계좌이체고객</a:t>
+            </a:r>
+            <a:r>
+              <a:rPr lang="en-US" altLang="ko-KR" sz="1400" dirty="0" smtClean="0"/>
+              <a:t>case : </a:t>
+            </a:r>
+            <a:r>
+              <a:rPr lang="ko-KR" altLang="en-US" sz="1400" dirty="0" smtClean="0"/>
+              <a:t>고객이 잔금을 이체한다</a:t>
+            </a:r>
+            <a:r>
+              <a:rPr lang="en-US" altLang="ko-KR" sz="1400" dirty="0" smtClean="0"/>
+              <a:t>. &gt; </a:t>
+            </a:r>
+            <a:r>
+              <a:rPr lang="ko-KR" altLang="en-US" sz="1400" dirty="0" smtClean="0"/>
+              <a:t>어떻게</a:t>
+            </a:r>
+            <a:r>
+              <a:rPr lang="en-US" altLang="ko-KR" sz="1400" dirty="0" smtClean="0"/>
+              <a:t>?  &gt; </a:t>
+            </a:r>
+            <a:endParaRPr lang="ko-KR" altLang="en-US" sz="1400" dirty="0"/>
           </a:p>
         </p:txBody>
       </p:sp>
     </p:spTree>
     <p:extLst>
       <p:ext uri="{BB962C8B-B14F-4D97-AF65-F5344CB8AC3E}">
-        <p14:creationId xmlns:p14="http://schemas.microsoft.com/office/powerpoint/2010/main" val="20474371"/>
+        <p14:creationId xmlns:p14="http://schemas.microsoft.com/office/powerpoint/2010/main" val="2975310196"/>
       </p:ext>
     </p:extLst>
   </p:cSld>
@@ -5363,72 +5130,10 @@
           <a:chExt cx="0" cy="0"/>
         </a:xfrm>
       </p:grpSpPr>
-      <p:sp>
-        <p:nvSpPr>
-          <p:cNvPr id="2" name="TextBox 1"/>
-          <p:cNvSpPr txBox="1"/>
-          <p:nvPr/>
-        </p:nvSpPr>
-        <p:spPr>
-          <a:xfrm>
-            <a:off x="611560" y="548680"/>
-            <a:ext cx="3456384" cy="369332"/>
-          </a:xfrm>
-          <a:prstGeom prst="rect">
-            <a:avLst/>
-          </a:prstGeom>
-          <a:noFill/>
-        </p:spPr>
-        <p:txBody>
-          <a:bodyPr wrap="square" rtlCol="0">
-            <a:spAutoFit/>
-          </a:bodyPr>
-          <a:lstStyle/>
-          <a:p>
-            <a:r>
-              <a:rPr lang="ko-KR" altLang="en-US" dirty="0" smtClean="0"/>
-              <a:t>플랫폼 좌측 </a:t>
-            </a:r>
-            <a:r>
-              <a:rPr lang="ko-KR" altLang="en-US" dirty="0" err="1" smtClean="0"/>
-              <a:t>메뉴바로</a:t>
-            </a:r>
-            <a:r>
-              <a:rPr lang="ko-KR" altLang="en-US" dirty="0" smtClean="0"/>
-              <a:t> 변경</a:t>
-            </a:r>
-            <a:endParaRPr lang="ko-KR" altLang="en-US" dirty="0"/>
-          </a:p>
-        </p:txBody>
-      </p:sp>
-      <p:pic>
-        <p:nvPicPr>
-          <p:cNvPr id="3" name="그림 2"/>
-          <p:cNvPicPr>
-            <a:picLocks noChangeAspect="1"/>
-          </p:cNvPicPr>
-          <p:nvPr/>
-        </p:nvPicPr>
-        <p:blipFill>
-          <a:blip r:embed="rId3"/>
-          <a:stretch>
-            <a:fillRect/>
-          </a:stretch>
-        </p:blipFill>
-        <p:spPr>
-          <a:xfrm>
-            <a:off x="395536" y="1052736"/>
-            <a:ext cx="8120600" cy="5143204"/>
-          </a:xfrm>
-          <a:prstGeom prst="rect">
-            <a:avLst/>
-          </a:prstGeom>
-        </p:spPr>
-      </p:pic>
     </p:spTree>
     <p:extLst>
       <p:ext uri="{BB962C8B-B14F-4D97-AF65-F5344CB8AC3E}">
-        <p14:creationId xmlns:p14="http://schemas.microsoft.com/office/powerpoint/2010/main" val="2433387010"/>
+        <p14:creationId xmlns:p14="http://schemas.microsoft.com/office/powerpoint/2010/main" val="1862719168"/>
       </p:ext>
     </p:extLst>
   </p:cSld>
@@ -5457,143 +5162,165 @@
       </p:grpSpPr>
       <p:sp>
         <p:nvSpPr>
-          <p:cNvPr id="2" name="직사각형 1"/>
-          <p:cNvSpPr/>
-          <p:nvPr/>
-        </p:nvSpPr>
-        <p:spPr>
-          <a:xfrm>
-            <a:off x="683568" y="620688"/>
-            <a:ext cx="2160240" cy="1008112"/>
-          </a:xfrm>
-          <a:prstGeom prst="rect">
-            <a:avLst/>
-          </a:prstGeom>
-        </p:spPr>
-        <p:style>
-          <a:lnRef idx="2">
-            <a:schemeClr val="accent1">
-              <a:shade val="50000"/>
-            </a:schemeClr>
-          </a:lnRef>
-          <a:fillRef idx="1">
-            <a:schemeClr val="accent1"/>
-          </a:fillRef>
-          <a:effectRef idx="0">
-            <a:schemeClr val="accent1"/>
-          </a:effectRef>
-          <a:fontRef idx="minor">
-            <a:schemeClr val="lt1"/>
-          </a:fontRef>
-        </p:style>
-        <p:txBody>
-          <a:bodyPr rtlCol="0" anchor="ctr"/>
-          <a:lstStyle/>
-          <a:p>
-            <a:pPr algn="ctr"/>
+          <p:cNvPr id="2" name="TextBox 1"/>
+          <p:cNvSpPr txBox="1"/>
+          <p:nvPr/>
+        </p:nvSpPr>
+        <p:spPr>
+          <a:xfrm>
+            <a:off x="395536" y="476672"/>
+            <a:ext cx="3600400" cy="369332"/>
+          </a:xfrm>
+          <a:prstGeom prst="rect">
+            <a:avLst/>
+          </a:prstGeom>
+          <a:noFill/>
+        </p:spPr>
+        <p:txBody>
+          <a:bodyPr wrap="square" rtlCol="0">
+            <a:spAutoFit/>
+          </a:bodyPr>
+          <a:lstStyle/>
+          <a:p>
+            <a:r>
+              <a:rPr lang="en-US" altLang="ko-KR" dirty="0" smtClean="0"/>
+              <a:t>20260901 flow</a:t>
+            </a:r>
+            <a:r>
+              <a:rPr lang="ko-KR" altLang="en-US" dirty="0" smtClean="0"/>
+              <a:t>점검</a:t>
+            </a:r>
+            <a:endParaRPr lang="ko-KR" altLang="en-US" dirty="0"/>
+          </a:p>
+        </p:txBody>
+      </p:sp>
+      <p:pic>
+        <p:nvPicPr>
+          <p:cNvPr id="3" name="그림 2"/>
+          <p:cNvPicPr>
+            <a:picLocks noChangeAspect="1"/>
+          </p:cNvPicPr>
+          <p:nvPr/>
+        </p:nvPicPr>
+        <p:blipFill>
+          <a:blip r:embed="rId2"/>
+          <a:stretch>
+            <a:fillRect/>
+          </a:stretch>
+        </p:blipFill>
+        <p:spPr>
+          <a:xfrm>
+            <a:off x="467544" y="1124744"/>
+            <a:ext cx="8298973" cy="572887"/>
+          </a:xfrm>
+          <a:prstGeom prst="rect">
+            <a:avLst/>
+          </a:prstGeom>
+        </p:spPr>
+      </p:pic>
+      <p:sp>
+        <p:nvSpPr>
+          <p:cNvPr id="4" name="TextBox 3"/>
+          <p:cNvSpPr txBox="1"/>
+          <p:nvPr/>
+        </p:nvSpPr>
+        <p:spPr>
+          <a:xfrm>
+            <a:off x="446221" y="2195622"/>
+            <a:ext cx="3744416" cy="923330"/>
+          </a:xfrm>
+          <a:prstGeom prst="rect">
+            <a:avLst/>
+          </a:prstGeom>
+          <a:noFill/>
+        </p:spPr>
+        <p:txBody>
+          <a:bodyPr wrap="square" rtlCol="0">
+            <a:spAutoFit/>
+          </a:bodyPr>
+          <a:lstStyle/>
+          <a:p>
+            <a:r>
+              <a:rPr lang="ko-KR" altLang="en-US" dirty="0" smtClean="0"/>
+              <a:t>배포되고있음</a:t>
+            </a:r>
+            <a:r>
+              <a:rPr lang="en-US" altLang="ko-KR" dirty="0" smtClean="0"/>
+              <a:t>. </a:t>
+            </a:r>
             <a:r>
               <a:rPr lang="ko-KR" altLang="en-US" dirty="0" err="1" smtClean="0"/>
-              <a:t>고객포털</a:t>
+              <a:t>돈냈나</a:t>
+            </a:r>
+            <a:r>
+              <a:rPr lang="en-US" altLang="ko-KR" dirty="0" smtClean="0"/>
+              <a:t>? </a:t>
+            </a:r>
+          </a:p>
+          <a:p>
+            <a:r>
+              <a:rPr lang="ko-KR" altLang="en-US" dirty="0" err="1" smtClean="0"/>
+              <a:t>운영중</a:t>
             </a:r>
             <a:endParaRPr lang="en-US" altLang="ko-KR" dirty="0" smtClean="0"/>
           </a:p>
-        </p:txBody>
-      </p:sp>
-      <p:sp>
-        <p:nvSpPr>
-          <p:cNvPr id="3" name="직사각형 2"/>
-          <p:cNvSpPr/>
-          <p:nvPr/>
-        </p:nvSpPr>
-        <p:spPr>
-          <a:xfrm>
-            <a:off x="899592" y="2348880"/>
-            <a:ext cx="2304256" cy="2016224"/>
-          </a:xfrm>
-          <a:prstGeom prst="rect">
-            <a:avLst/>
-          </a:prstGeom>
-        </p:spPr>
-        <p:style>
-          <a:lnRef idx="2">
-            <a:schemeClr val="accent1">
-              <a:shade val="50000"/>
-            </a:schemeClr>
-          </a:lnRef>
-          <a:fillRef idx="1">
-            <a:schemeClr val="accent1"/>
-          </a:fillRef>
-          <a:effectRef idx="0">
-            <a:schemeClr val="accent1"/>
-          </a:effectRef>
-          <a:fontRef idx="minor">
-            <a:schemeClr val="lt1"/>
-          </a:fontRef>
-        </p:style>
-        <p:txBody>
-          <a:bodyPr rtlCol="0" anchor="ctr"/>
-          <a:lstStyle/>
-          <a:p>
-            <a:pPr algn="ctr"/>
-            <a:r>
-              <a:rPr lang="ko-KR" altLang="en-US" dirty="0" err="1" smtClean="0"/>
-              <a:t>내사이트</a:t>
-            </a:r>
-            <a:endParaRPr lang="en-US" altLang="ko-KR" dirty="0" smtClean="0"/>
-          </a:p>
-          <a:p>
-            <a:pPr marL="285750" indent="-285750" algn="ctr">
-              <a:buFontTx/>
-              <a:buChar char="-"/>
-            </a:pPr>
-            <a:r>
-              <a:rPr lang="ko-KR" altLang="en-US" dirty="0" smtClean="0"/>
-              <a:t>관리자</a:t>
-            </a:r>
-            <a:endParaRPr lang="en-US" altLang="ko-KR" dirty="0" smtClean="0"/>
-          </a:p>
-          <a:p>
-            <a:pPr marL="285750" indent="-285750" algn="ctr">
-              <a:buFontTx/>
-              <a:buChar char="-"/>
-            </a:pPr>
-            <a:r>
-              <a:rPr lang="ko-KR" altLang="en-US" dirty="0" smtClean="0"/>
-              <a:t>디자인</a:t>
-            </a:r>
-            <a:endParaRPr lang="en-US" altLang="ko-KR" dirty="0" smtClean="0"/>
-          </a:p>
-          <a:p>
-            <a:pPr marL="285750" indent="-285750" algn="ctr">
-              <a:buFontTx/>
-              <a:buChar char="-"/>
-            </a:pPr>
-            <a:r>
-              <a:rPr lang="ko-KR" altLang="en-US" dirty="0" smtClean="0"/>
-              <a:t>운영</a:t>
-            </a:r>
-            <a:endParaRPr lang="en-US" altLang="ko-KR" dirty="0" smtClean="0"/>
-          </a:p>
-          <a:p>
-            <a:pPr marL="285750" indent="-285750" algn="ctr">
-              <a:buFontTx/>
-              <a:buChar char="-"/>
-            </a:pPr>
-            <a:endParaRPr lang="en-US" altLang="ko-KR" dirty="0" smtClean="0"/>
-          </a:p>
-          <a:p>
-            <a:pPr marL="285750" indent="-285750" algn="ctr">
-              <a:buFontTx/>
-              <a:buChar char="-"/>
-            </a:pPr>
+          <a:p>
             <a:endParaRPr lang="ko-KR" altLang="en-US" dirty="0"/>
           </a:p>
         </p:txBody>
       </p:sp>
+      <p:pic>
+        <p:nvPicPr>
+          <p:cNvPr id="5" name="그림 4"/>
+          <p:cNvPicPr>
+            <a:picLocks noChangeAspect="1"/>
+          </p:cNvPicPr>
+          <p:nvPr/>
+        </p:nvPicPr>
+        <p:blipFill>
+          <a:blip r:embed="rId3"/>
+          <a:stretch>
+            <a:fillRect/>
+          </a:stretch>
+        </p:blipFill>
+        <p:spPr>
+          <a:xfrm>
+            <a:off x="395536" y="3138807"/>
+            <a:ext cx="4877511" cy="1897879"/>
+          </a:xfrm>
+          <a:prstGeom prst="rect">
+            <a:avLst/>
+          </a:prstGeom>
+        </p:spPr>
+      </p:pic>
+      <p:pic>
+        <p:nvPicPr>
+          <p:cNvPr id="6" name="그림 5"/>
+          <p:cNvPicPr>
+            <a:picLocks noChangeAspect="1"/>
+          </p:cNvPicPr>
+          <p:nvPr/>
+        </p:nvPicPr>
+        <p:blipFill>
+          <a:blip r:embed="rId4"/>
+          <a:stretch>
+            <a:fillRect/>
+          </a:stretch>
+        </p:blipFill>
+        <p:spPr>
+          <a:xfrm>
+            <a:off x="2123728" y="2636912"/>
+            <a:ext cx="5544616" cy="3517552"/>
+          </a:xfrm>
+          <a:prstGeom prst="rect">
+            <a:avLst/>
+          </a:prstGeom>
+        </p:spPr>
+      </p:pic>
     </p:spTree>
     <p:extLst>
       <p:ext uri="{BB962C8B-B14F-4D97-AF65-F5344CB8AC3E}">
-        <p14:creationId xmlns:p14="http://schemas.microsoft.com/office/powerpoint/2010/main" val="4030948496"/>
+        <p14:creationId xmlns:p14="http://schemas.microsoft.com/office/powerpoint/2010/main" val="1988109650"/>
       </p:ext>
     </p:extLst>
   </p:cSld>
@@ -5620,6 +5347,705 @@
           <a:chExt cx="0" cy="0"/>
         </a:xfrm>
       </p:grpSpPr>
+      <p:sp>
+        <p:nvSpPr>
+          <p:cNvPr id="2" name="직사각형 1"/>
+          <p:cNvSpPr/>
+          <p:nvPr/>
+        </p:nvSpPr>
+        <p:spPr>
+          <a:xfrm>
+            <a:off x="-1548680" y="1196752"/>
+            <a:ext cx="3672408" cy="576064"/>
+          </a:xfrm>
+          <a:prstGeom prst="rect">
+            <a:avLst/>
+          </a:prstGeom>
+        </p:spPr>
+        <p:style>
+          <a:lnRef idx="2">
+            <a:schemeClr val="accent1">
+              <a:shade val="50000"/>
+            </a:schemeClr>
+          </a:lnRef>
+          <a:fillRef idx="1">
+            <a:schemeClr val="accent1"/>
+          </a:fillRef>
+          <a:effectRef idx="0">
+            <a:schemeClr val="accent1"/>
+          </a:effectRef>
+          <a:fontRef idx="minor">
+            <a:schemeClr val="lt1"/>
+          </a:fontRef>
+        </p:style>
+        <p:txBody>
+          <a:bodyPr rtlCol="0" anchor="ctr"/>
+          <a:lstStyle/>
+          <a:p>
+            <a:pPr algn="ctr"/>
+            <a:r>
+              <a:rPr lang="ko-KR" altLang="en-US" dirty="0" smtClean="0"/>
+              <a:t>루트</a:t>
+            </a:r>
+            <a:r>
+              <a:rPr lang="en-US" altLang="ko-KR" dirty="0" smtClean="0"/>
+              <a:t>1: </a:t>
+            </a:r>
+            <a:r>
+              <a:rPr lang="ko-KR" altLang="en-US" dirty="0" err="1" smtClean="0"/>
+              <a:t>직접개발</a:t>
+            </a:r>
+            <a:r>
+              <a:rPr lang="ko-KR" altLang="en-US" dirty="0" smtClean="0"/>
+              <a:t> 배포</a:t>
+            </a:r>
+            <a:endParaRPr lang="en-US" altLang="ko-KR" dirty="0" smtClean="0"/>
+          </a:p>
+          <a:p>
+            <a:pPr algn="ctr"/>
+            <a:endParaRPr lang="ko-KR" altLang="en-US" dirty="0"/>
+          </a:p>
+        </p:txBody>
+      </p:sp>
+      <p:sp>
+        <p:nvSpPr>
+          <p:cNvPr id="3" name="직사각형 2"/>
+          <p:cNvSpPr/>
+          <p:nvPr/>
+        </p:nvSpPr>
+        <p:spPr>
+          <a:xfrm>
+            <a:off x="2339752" y="620688"/>
+            <a:ext cx="6192688" cy="1512168"/>
+          </a:xfrm>
+          <a:prstGeom prst="rect">
+            <a:avLst/>
+          </a:prstGeom>
+        </p:spPr>
+        <p:style>
+          <a:lnRef idx="2">
+            <a:schemeClr val="accent1">
+              <a:shade val="50000"/>
+            </a:schemeClr>
+          </a:lnRef>
+          <a:fillRef idx="1">
+            <a:schemeClr val="accent1"/>
+          </a:fillRef>
+          <a:effectRef idx="0">
+            <a:schemeClr val="accent1"/>
+          </a:effectRef>
+          <a:fontRef idx="minor">
+            <a:schemeClr val="lt1"/>
+          </a:fontRef>
+        </p:style>
+        <p:txBody>
+          <a:bodyPr rtlCol="0" anchor="ctr"/>
+          <a:lstStyle/>
+          <a:p>
+            <a:pPr algn="ctr"/>
+            <a:r>
+              <a:rPr lang="ko-KR" altLang="en-US" sz="1200" dirty="0" smtClean="0"/>
+              <a:t>사이트 제작</a:t>
+            </a:r>
+            <a:r>
+              <a:rPr lang="en-US" altLang="ko-KR" sz="1200" dirty="0" smtClean="0"/>
+              <a:t>&gt; </a:t>
+            </a:r>
+            <a:r>
+              <a:rPr lang="ko-KR" altLang="en-US" sz="1200" dirty="0" smtClean="0"/>
+              <a:t>구독 결제수단 선택</a:t>
+            </a:r>
+            <a:r>
+              <a:rPr lang="en-US" altLang="ko-KR" sz="1200" dirty="0" smtClean="0"/>
+              <a:t>(</a:t>
+            </a:r>
+            <a:r>
+              <a:rPr lang="ko-KR" altLang="en-US" sz="1200" dirty="0" smtClean="0"/>
+              <a:t>카드</a:t>
+            </a:r>
+            <a:r>
+              <a:rPr lang="en-US" altLang="ko-KR" sz="1200" dirty="0" smtClean="0"/>
+              <a:t> or</a:t>
+            </a:r>
+            <a:r>
+              <a:rPr lang="ko-KR" altLang="en-US" sz="1200" dirty="0" smtClean="0"/>
+              <a:t> 이체 선택</a:t>
+            </a:r>
+            <a:r>
+              <a:rPr lang="en-US" altLang="ko-KR" sz="1200" dirty="0" smtClean="0"/>
+              <a:t>) &gt; </a:t>
+            </a:r>
+            <a:r>
+              <a:rPr lang="ko-KR" altLang="en-US" sz="1200" dirty="0" smtClean="0"/>
+              <a:t>배포</a:t>
+            </a:r>
+            <a:r>
+              <a:rPr lang="en-US" altLang="ko-KR" sz="1200" dirty="0" smtClean="0"/>
+              <a:t>(14</a:t>
+            </a:r>
+            <a:r>
+              <a:rPr lang="ko-KR" altLang="en-US" sz="1200" dirty="0" smtClean="0"/>
+              <a:t>일 </a:t>
+            </a:r>
+            <a:r>
+              <a:rPr lang="en-US" altLang="ko-KR" sz="1200" dirty="0" smtClean="0"/>
+              <a:t>trial) &gt; 14</a:t>
+            </a:r>
+            <a:r>
+              <a:rPr lang="ko-KR" altLang="en-US" sz="1200" dirty="0" smtClean="0"/>
+              <a:t>일이후 자동결제</a:t>
+            </a:r>
+            <a:r>
+              <a:rPr lang="en-US" altLang="ko-KR" sz="1200" dirty="0" smtClean="0"/>
+              <a:t>, </a:t>
+            </a:r>
+            <a:r>
+              <a:rPr lang="ko-KR" altLang="en-US" sz="1200" dirty="0" smtClean="0"/>
+              <a:t>계좌 </a:t>
+            </a:r>
+            <a:r>
+              <a:rPr lang="ko-KR" altLang="en-US" sz="1200" dirty="0" err="1" smtClean="0"/>
+              <a:t>입급</a:t>
+            </a:r>
+            <a:r>
+              <a:rPr lang="ko-KR" altLang="en-US" sz="1200" dirty="0" smtClean="0"/>
+              <a:t> 알림 </a:t>
+            </a:r>
+            <a:r>
+              <a:rPr lang="en-US" altLang="ko-KR" sz="1200" dirty="0" smtClean="0"/>
+              <a:t>&gt; </a:t>
+            </a:r>
+            <a:r>
+              <a:rPr lang="ko-KR" altLang="en-US" sz="1200" dirty="0" smtClean="0"/>
+              <a:t>입금확인 </a:t>
+            </a:r>
+            <a:r>
+              <a:rPr lang="en-US" altLang="ko-KR" sz="1200" dirty="0" smtClean="0"/>
+              <a:t>&gt; </a:t>
+            </a:r>
+            <a:r>
+              <a:rPr lang="ko-KR" altLang="en-US" sz="1200" dirty="0" err="1" smtClean="0"/>
+              <a:t>배포계속</a:t>
+            </a:r>
+            <a:r>
+              <a:rPr lang="ko-KR" altLang="en-US" sz="1200" dirty="0" smtClean="0"/>
+              <a:t> </a:t>
+            </a:r>
+            <a:endParaRPr lang="ko-KR" altLang="en-US" sz="1200" dirty="0"/>
+          </a:p>
+        </p:txBody>
+      </p:sp>
+      <p:sp>
+        <p:nvSpPr>
+          <p:cNvPr id="5" name="직사각형 4"/>
+          <p:cNvSpPr/>
+          <p:nvPr/>
+        </p:nvSpPr>
+        <p:spPr>
+          <a:xfrm>
+            <a:off x="-1548680" y="3573016"/>
+            <a:ext cx="3672408" cy="576064"/>
+          </a:xfrm>
+          <a:prstGeom prst="rect">
+            <a:avLst/>
+          </a:prstGeom>
+        </p:spPr>
+        <p:style>
+          <a:lnRef idx="2">
+            <a:schemeClr val="accent1">
+              <a:shade val="50000"/>
+            </a:schemeClr>
+          </a:lnRef>
+          <a:fillRef idx="1">
+            <a:schemeClr val="accent1"/>
+          </a:fillRef>
+          <a:effectRef idx="0">
+            <a:schemeClr val="accent1"/>
+          </a:effectRef>
+          <a:fontRef idx="minor">
+            <a:schemeClr val="lt1"/>
+          </a:fontRef>
+        </p:style>
+        <p:txBody>
+          <a:bodyPr rtlCol="0" anchor="ctr"/>
+          <a:lstStyle/>
+          <a:p>
+            <a:pPr algn="ctr"/>
+            <a:r>
+              <a:rPr lang="ko-KR" altLang="en-US" dirty="0" smtClean="0"/>
+              <a:t>루트</a:t>
+            </a:r>
+            <a:r>
+              <a:rPr lang="en-US" altLang="ko-KR" dirty="0" smtClean="0"/>
+              <a:t>2: </a:t>
+            </a:r>
+            <a:r>
+              <a:rPr lang="ko-KR" altLang="en-US" dirty="0" err="1" smtClean="0"/>
+              <a:t>개발요청</a:t>
+            </a:r>
+            <a:endParaRPr lang="en-US" altLang="ko-KR" dirty="0" smtClean="0"/>
+          </a:p>
+          <a:p>
+            <a:pPr algn="ctr"/>
+            <a:endParaRPr lang="ko-KR" altLang="en-US" dirty="0"/>
+          </a:p>
+        </p:txBody>
+      </p:sp>
+      <p:sp>
+        <p:nvSpPr>
+          <p:cNvPr id="6" name="직사각형 5"/>
+          <p:cNvSpPr/>
+          <p:nvPr/>
+        </p:nvSpPr>
+        <p:spPr>
+          <a:xfrm>
+            <a:off x="2339752" y="3284984"/>
+            <a:ext cx="6192688" cy="1512168"/>
+          </a:xfrm>
+          <a:prstGeom prst="rect">
+            <a:avLst/>
+          </a:prstGeom>
+        </p:spPr>
+        <p:style>
+          <a:lnRef idx="2">
+            <a:schemeClr val="accent1">
+              <a:shade val="50000"/>
+            </a:schemeClr>
+          </a:lnRef>
+          <a:fillRef idx="1">
+            <a:schemeClr val="accent1"/>
+          </a:fillRef>
+          <a:effectRef idx="0">
+            <a:schemeClr val="accent1"/>
+          </a:effectRef>
+          <a:fontRef idx="minor">
+            <a:schemeClr val="lt1"/>
+          </a:fontRef>
+        </p:style>
+        <p:txBody>
+          <a:bodyPr rtlCol="0" anchor="ctr"/>
+          <a:lstStyle/>
+          <a:p>
+            <a:pPr algn="ctr"/>
+            <a:r>
+              <a:rPr lang="ko-KR" altLang="en-US" sz="1200" dirty="0" smtClean="0"/>
+              <a:t>사이트 제작 요청 </a:t>
+            </a:r>
+            <a:r>
+              <a:rPr lang="en-US" altLang="ko-KR" sz="1200" dirty="0" smtClean="0"/>
+              <a:t>&gt; </a:t>
+            </a:r>
+            <a:r>
+              <a:rPr lang="ko-KR" altLang="en-US" sz="1200" dirty="0" err="1" smtClean="0"/>
+              <a:t>선금지불</a:t>
+            </a:r>
+            <a:r>
+              <a:rPr lang="ko-KR" altLang="en-US" sz="1200" dirty="0" smtClean="0"/>
+              <a:t> </a:t>
+            </a:r>
+            <a:r>
+              <a:rPr lang="en-US" altLang="ko-KR" sz="1200" dirty="0" smtClean="0"/>
+              <a:t>&gt; </a:t>
+            </a:r>
+            <a:r>
+              <a:rPr lang="ko-KR" altLang="en-US" sz="1200" dirty="0" smtClean="0"/>
+              <a:t>본사 검토 </a:t>
+            </a:r>
+            <a:r>
+              <a:rPr lang="en-US" altLang="ko-KR" sz="1200" dirty="0" smtClean="0"/>
+              <a:t>, </a:t>
+            </a:r>
+            <a:r>
+              <a:rPr lang="ko-KR" altLang="en-US" sz="1200" dirty="0" smtClean="0"/>
+              <a:t>개발 </a:t>
+            </a:r>
+            <a:r>
+              <a:rPr lang="en-US" altLang="ko-KR" sz="1200" dirty="0" smtClean="0"/>
+              <a:t>&gt; </a:t>
+            </a:r>
+            <a:r>
+              <a:rPr lang="ko-KR" altLang="en-US" sz="1200" dirty="0" err="1" smtClean="0"/>
+              <a:t>잔금요청</a:t>
+            </a:r>
+            <a:r>
+              <a:rPr lang="ko-KR" altLang="en-US" sz="1200" dirty="0" smtClean="0"/>
+              <a:t> </a:t>
+            </a:r>
+            <a:r>
+              <a:rPr lang="en-US" altLang="ko-KR" sz="1200" dirty="0" smtClean="0"/>
+              <a:t>&gt; </a:t>
+            </a:r>
+            <a:r>
+              <a:rPr lang="ko-KR" altLang="en-US" sz="1200" dirty="0" smtClean="0"/>
+              <a:t>구독 </a:t>
+            </a:r>
+            <a:r>
+              <a:rPr lang="ko-KR" altLang="en-US" sz="1200" dirty="0"/>
+              <a:t>결제수단 선택</a:t>
+            </a:r>
+            <a:r>
+              <a:rPr lang="en-US" altLang="ko-KR" sz="1200" dirty="0"/>
+              <a:t>(</a:t>
+            </a:r>
+            <a:r>
+              <a:rPr lang="ko-KR" altLang="en-US" sz="1200" dirty="0"/>
+              <a:t>카드</a:t>
+            </a:r>
+            <a:r>
+              <a:rPr lang="en-US" altLang="ko-KR" sz="1200" dirty="0"/>
+              <a:t> or</a:t>
+            </a:r>
+            <a:r>
+              <a:rPr lang="ko-KR" altLang="en-US" sz="1200" dirty="0"/>
+              <a:t> 이체 선택</a:t>
+            </a:r>
+            <a:r>
+              <a:rPr lang="en-US" altLang="ko-KR" sz="1200" dirty="0"/>
+              <a:t>) &gt; </a:t>
+            </a:r>
+            <a:r>
+              <a:rPr lang="ko-KR" altLang="en-US" sz="1200" dirty="0"/>
+              <a:t>배포</a:t>
+            </a:r>
+            <a:r>
+              <a:rPr lang="en-US" altLang="ko-KR" sz="1200" dirty="0"/>
+              <a:t>(14</a:t>
+            </a:r>
+            <a:r>
+              <a:rPr lang="ko-KR" altLang="en-US" sz="1200" dirty="0"/>
+              <a:t>일 </a:t>
+            </a:r>
+            <a:r>
+              <a:rPr lang="en-US" altLang="ko-KR" sz="1200" dirty="0"/>
+              <a:t>trial) &gt; 14</a:t>
+            </a:r>
+            <a:r>
+              <a:rPr lang="ko-KR" altLang="en-US" sz="1200" dirty="0"/>
+              <a:t>일이후 자동결제</a:t>
+            </a:r>
+            <a:r>
+              <a:rPr lang="en-US" altLang="ko-KR" sz="1200" dirty="0"/>
+              <a:t>, </a:t>
+            </a:r>
+            <a:r>
+              <a:rPr lang="ko-KR" altLang="en-US" sz="1200" dirty="0"/>
+              <a:t>계좌 </a:t>
+            </a:r>
+            <a:r>
+              <a:rPr lang="ko-KR" altLang="en-US" sz="1200" dirty="0" err="1"/>
+              <a:t>입급</a:t>
+            </a:r>
+            <a:r>
+              <a:rPr lang="ko-KR" altLang="en-US" sz="1200" dirty="0"/>
+              <a:t> 알림 </a:t>
+            </a:r>
+            <a:r>
+              <a:rPr lang="en-US" altLang="ko-KR" sz="1200" dirty="0"/>
+              <a:t>&gt; </a:t>
+            </a:r>
+            <a:r>
+              <a:rPr lang="ko-KR" altLang="en-US" sz="1200" dirty="0"/>
+              <a:t>입금확인 </a:t>
+            </a:r>
+            <a:r>
+              <a:rPr lang="en-US" altLang="ko-KR" sz="1200" dirty="0"/>
+              <a:t>&gt; </a:t>
+            </a:r>
+            <a:r>
+              <a:rPr lang="ko-KR" altLang="en-US" sz="1200" dirty="0" err="1"/>
+              <a:t>배포계속</a:t>
+            </a:r>
+            <a:endParaRPr lang="ko-KR" altLang="en-US" sz="1200" dirty="0"/>
+          </a:p>
+        </p:txBody>
+      </p:sp>
+    </p:spTree>
+    <p:extLst>
+      <p:ext uri="{BB962C8B-B14F-4D97-AF65-F5344CB8AC3E}">
+        <p14:creationId xmlns:p14="http://schemas.microsoft.com/office/powerpoint/2010/main" val="20474371"/>
+      </p:ext>
+    </p:extLst>
+  </p:cSld>
+  <p:clrMapOvr>
+    <a:masterClrMapping/>
+  </p:clrMapOvr>
+</p:sld>
+</file>
+
+<file path=ppt/slides/slide23.xml><?xml version="1.0" encoding="utf-8"?>
+<p:sld xmlns:a="http://schemas.openxmlformats.org/drawingml/2006/main" xmlns:r="http://schemas.openxmlformats.org/officeDocument/2006/relationships" xmlns:p="http://schemas.openxmlformats.org/presentationml/2006/main">
+  <p:cSld>
+    <p:spTree>
+      <p:nvGrpSpPr>
+        <p:cNvPr id="1" name=""/>
+        <p:cNvGrpSpPr/>
+        <p:nvPr/>
+      </p:nvGrpSpPr>
+      <p:grpSpPr>
+        <a:xfrm>
+          <a:off x="0" y="0"/>
+          <a:ext cx="0" cy="0"/>
+          <a:chOff x="0" y="0"/>
+          <a:chExt cx="0" cy="0"/>
+        </a:xfrm>
+      </p:grpSpPr>
+      <p:sp>
+        <p:nvSpPr>
+          <p:cNvPr id="2" name="TextBox 1"/>
+          <p:cNvSpPr txBox="1"/>
+          <p:nvPr/>
+        </p:nvSpPr>
+        <p:spPr>
+          <a:xfrm>
+            <a:off x="611560" y="548680"/>
+            <a:ext cx="3456384" cy="369332"/>
+          </a:xfrm>
+          <a:prstGeom prst="rect">
+            <a:avLst/>
+          </a:prstGeom>
+          <a:noFill/>
+        </p:spPr>
+        <p:txBody>
+          <a:bodyPr wrap="square" rtlCol="0">
+            <a:spAutoFit/>
+          </a:bodyPr>
+          <a:lstStyle/>
+          <a:p>
+            <a:r>
+              <a:rPr lang="ko-KR" altLang="en-US" dirty="0" smtClean="0"/>
+              <a:t>플랫폼 좌측 </a:t>
+            </a:r>
+            <a:r>
+              <a:rPr lang="ko-KR" altLang="en-US" dirty="0" err="1" smtClean="0"/>
+              <a:t>메뉴바로</a:t>
+            </a:r>
+            <a:r>
+              <a:rPr lang="ko-KR" altLang="en-US" dirty="0" smtClean="0"/>
+              <a:t> 변경</a:t>
+            </a:r>
+            <a:endParaRPr lang="ko-KR" altLang="en-US" dirty="0"/>
+          </a:p>
+        </p:txBody>
+      </p:sp>
+      <p:pic>
+        <p:nvPicPr>
+          <p:cNvPr id="3" name="그림 2"/>
+          <p:cNvPicPr>
+            <a:picLocks noChangeAspect="1"/>
+          </p:cNvPicPr>
+          <p:nvPr/>
+        </p:nvPicPr>
+        <p:blipFill>
+          <a:blip r:embed="rId3"/>
+          <a:stretch>
+            <a:fillRect/>
+          </a:stretch>
+        </p:blipFill>
+        <p:spPr>
+          <a:xfrm>
+            <a:off x="395536" y="1052736"/>
+            <a:ext cx="8120600" cy="5143204"/>
+          </a:xfrm>
+          <a:prstGeom prst="rect">
+            <a:avLst/>
+          </a:prstGeom>
+        </p:spPr>
+      </p:pic>
+    </p:spTree>
+    <p:extLst>
+      <p:ext uri="{BB962C8B-B14F-4D97-AF65-F5344CB8AC3E}">
+        <p14:creationId xmlns:p14="http://schemas.microsoft.com/office/powerpoint/2010/main" val="2433387010"/>
+      </p:ext>
+    </p:extLst>
+  </p:cSld>
+  <p:clrMapOvr>
+    <a:masterClrMapping/>
+  </p:clrMapOvr>
+</p:sld>
+</file>
+
+<file path=ppt/slides/slide24.xml><?xml version="1.0" encoding="utf-8"?>
+<p:sld xmlns:a="http://schemas.openxmlformats.org/drawingml/2006/main" xmlns:r="http://schemas.openxmlformats.org/officeDocument/2006/relationships" xmlns:p="http://schemas.openxmlformats.org/presentationml/2006/main">
+  <p:cSld>
+    <p:spTree>
+      <p:nvGrpSpPr>
+        <p:cNvPr id="1" name=""/>
+        <p:cNvGrpSpPr/>
+        <p:nvPr/>
+      </p:nvGrpSpPr>
+      <p:grpSpPr>
+        <a:xfrm>
+          <a:off x="0" y="0"/>
+          <a:ext cx="0" cy="0"/>
+          <a:chOff x="0" y="0"/>
+          <a:chExt cx="0" cy="0"/>
+        </a:xfrm>
+      </p:grpSpPr>
+      <p:sp>
+        <p:nvSpPr>
+          <p:cNvPr id="2" name="직사각형 1"/>
+          <p:cNvSpPr/>
+          <p:nvPr/>
+        </p:nvSpPr>
+        <p:spPr>
+          <a:xfrm>
+            <a:off x="683568" y="620688"/>
+            <a:ext cx="2160240" cy="1008112"/>
+          </a:xfrm>
+          <a:prstGeom prst="rect">
+            <a:avLst/>
+          </a:prstGeom>
+        </p:spPr>
+        <p:style>
+          <a:lnRef idx="2">
+            <a:schemeClr val="accent1">
+              <a:shade val="50000"/>
+            </a:schemeClr>
+          </a:lnRef>
+          <a:fillRef idx="1">
+            <a:schemeClr val="accent1"/>
+          </a:fillRef>
+          <a:effectRef idx="0">
+            <a:schemeClr val="accent1"/>
+          </a:effectRef>
+          <a:fontRef idx="minor">
+            <a:schemeClr val="lt1"/>
+          </a:fontRef>
+        </p:style>
+        <p:txBody>
+          <a:bodyPr rtlCol="0" anchor="ctr"/>
+          <a:lstStyle/>
+          <a:p>
+            <a:pPr algn="ctr"/>
+            <a:r>
+              <a:rPr lang="ko-KR" altLang="en-US" dirty="0" err="1" smtClean="0"/>
+              <a:t>고객포털</a:t>
+            </a:r>
+            <a:endParaRPr lang="en-US" altLang="ko-KR" dirty="0" smtClean="0"/>
+          </a:p>
+        </p:txBody>
+      </p:sp>
+      <p:sp>
+        <p:nvSpPr>
+          <p:cNvPr id="3" name="직사각형 2"/>
+          <p:cNvSpPr/>
+          <p:nvPr/>
+        </p:nvSpPr>
+        <p:spPr>
+          <a:xfrm>
+            <a:off x="899592" y="2348880"/>
+            <a:ext cx="2304256" cy="2016224"/>
+          </a:xfrm>
+          <a:prstGeom prst="rect">
+            <a:avLst/>
+          </a:prstGeom>
+        </p:spPr>
+        <p:style>
+          <a:lnRef idx="2">
+            <a:schemeClr val="accent1">
+              <a:shade val="50000"/>
+            </a:schemeClr>
+          </a:lnRef>
+          <a:fillRef idx="1">
+            <a:schemeClr val="accent1"/>
+          </a:fillRef>
+          <a:effectRef idx="0">
+            <a:schemeClr val="accent1"/>
+          </a:effectRef>
+          <a:fontRef idx="minor">
+            <a:schemeClr val="lt1"/>
+          </a:fontRef>
+        </p:style>
+        <p:txBody>
+          <a:bodyPr rtlCol="0" anchor="ctr"/>
+          <a:lstStyle/>
+          <a:p>
+            <a:pPr algn="ctr"/>
+            <a:r>
+              <a:rPr lang="ko-KR" altLang="en-US" dirty="0" err="1" smtClean="0"/>
+              <a:t>내사이트</a:t>
+            </a:r>
+            <a:endParaRPr lang="en-US" altLang="ko-KR" dirty="0" smtClean="0"/>
+          </a:p>
+          <a:p>
+            <a:pPr marL="285750" indent="-285750" algn="ctr">
+              <a:buFontTx/>
+              <a:buChar char="-"/>
+            </a:pPr>
+            <a:r>
+              <a:rPr lang="ko-KR" altLang="en-US" dirty="0" smtClean="0"/>
+              <a:t>관리자</a:t>
+            </a:r>
+            <a:endParaRPr lang="en-US" altLang="ko-KR" dirty="0" smtClean="0"/>
+          </a:p>
+          <a:p>
+            <a:pPr marL="285750" indent="-285750" algn="ctr">
+              <a:buFontTx/>
+              <a:buChar char="-"/>
+            </a:pPr>
+            <a:r>
+              <a:rPr lang="ko-KR" altLang="en-US" dirty="0" smtClean="0"/>
+              <a:t>디자인</a:t>
+            </a:r>
+            <a:endParaRPr lang="en-US" altLang="ko-KR" dirty="0" smtClean="0"/>
+          </a:p>
+          <a:p>
+            <a:pPr marL="285750" indent="-285750" algn="ctr">
+              <a:buFontTx/>
+              <a:buChar char="-"/>
+            </a:pPr>
+            <a:r>
+              <a:rPr lang="ko-KR" altLang="en-US" dirty="0" smtClean="0"/>
+              <a:t>운영</a:t>
+            </a:r>
+            <a:endParaRPr lang="en-US" altLang="ko-KR" dirty="0" smtClean="0"/>
+          </a:p>
+          <a:p>
+            <a:pPr marL="285750" indent="-285750" algn="ctr">
+              <a:buFontTx/>
+              <a:buChar char="-"/>
+            </a:pPr>
+            <a:endParaRPr lang="en-US" altLang="ko-KR" dirty="0" smtClean="0"/>
+          </a:p>
+          <a:p>
+            <a:pPr marL="285750" indent="-285750" algn="ctr">
+              <a:buFontTx/>
+              <a:buChar char="-"/>
+            </a:pPr>
+            <a:endParaRPr lang="ko-KR" altLang="en-US" dirty="0"/>
+          </a:p>
+        </p:txBody>
+      </p:sp>
+    </p:spTree>
+    <p:extLst>
+      <p:ext uri="{BB962C8B-B14F-4D97-AF65-F5344CB8AC3E}">
+        <p14:creationId xmlns:p14="http://schemas.microsoft.com/office/powerpoint/2010/main" val="4030948496"/>
+      </p:ext>
+    </p:extLst>
+  </p:cSld>
+  <p:clrMapOvr>
+    <a:masterClrMapping/>
+  </p:clrMapOvr>
+</p:sld>
+</file>
+
+<file path=ppt/slides/slide25.xml><?xml version="1.0" encoding="utf-8"?>
+<p:sld xmlns:a="http://schemas.openxmlformats.org/drawingml/2006/main" xmlns:r="http://schemas.openxmlformats.org/officeDocument/2006/relationships" xmlns:p="http://schemas.openxmlformats.org/presentationml/2006/main">
+  <p:cSld>
+    <p:spTree>
+      <p:nvGrpSpPr>
+        <p:cNvPr id="1" name=""/>
+        <p:cNvGrpSpPr/>
+        <p:nvPr/>
+      </p:nvGrpSpPr>
+      <p:grpSpPr>
+        <a:xfrm>
+          <a:off x="0" y="0"/>
+          <a:ext cx="0" cy="0"/>
+          <a:chOff x="0" y="0"/>
+          <a:chExt cx="0" cy="0"/>
+        </a:xfrm>
+      </p:grpSpPr>
       <p:pic>
         <p:nvPicPr>
           <p:cNvPr id="2" name="그림 1"/>
@@ -5681,7 +6107,7 @@
 </p:sld>
 </file>
 
-<file path=ppt/slides/slide23.xml><?xml version="1.0" encoding="utf-8"?>
+<file path=ppt/slides/slide26.xml><?xml version="1.0" encoding="utf-8"?>
 <p:sld xmlns:a="http://schemas.openxmlformats.org/drawingml/2006/main" xmlns:r="http://schemas.openxmlformats.org/officeDocument/2006/relationships" xmlns:p="http://schemas.openxmlformats.org/presentationml/2006/main">
   <p:cSld>
     <p:spTree>
@@ -5711,7 +6137,7 @@
 </p:sld>
 </file>
 
-<file path=ppt/slides/slide24.xml><?xml version="1.0" encoding="utf-8"?>
+<file path=ppt/slides/slide27.xml><?xml version="1.0" encoding="utf-8"?>
 <p:sld xmlns:a="http://schemas.openxmlformats.org/drawingml/2006/main" xmlns:r="http://schemas.openxmlformats.org/officeDocument/2006/relationships" xmlns:p="http://schemas.openxmlformats.org/presentationml/2006/main">
   <p:cSld>
     <p:spTree>
@@ -5741,481 +6167,6 @@
 </p:sld>
 </file>
 
-<file path=ppt/slides/slide25.xml><?xml version="1.0" encoding="utf-8"?>
-<p:sld xmlns:a="http://schemas.openxmlformats.org/drawingml/2006/main" xmlns:r="http://schemas.openxmlformats.org/officeDocument/2006/relationships" xmlns:p="http://schemas.openxmlformats.org/presentationml/2006/main">
-  <p:cSld>
-    <p:spTree>
-      <p:nvGrpSpPr>
-        <p:cNvPr id="1" name=""/>
-        <p:cNvGrpSpPr/>
-        <p:nvPr/>
-      </p:nvGrpSpPr>
-      <p:grpSpPr>
-        <a:xfrm>
-          <a:off x="0" y="0"/>
-          <a:ext cx="0" cy="0"/>
-          <a:chOff x="0" y="0"/>
-          <a:chExt cx="0" cy="0"/>
-        </a:xfrm>
-      </p:grpSpPr>
-      <p:sp>
-        <p:nvSpPr>
-          <p:cNvPr id="2" name="TextBox 1"/>
-          <p:cNvSpPr txBox="1"/>
-          <p:nvPr/>
-        </p:nvSpPr>
-        <p:spPr>
-          <a:xfrm>
-            <a:off x="251520" y="188640"/>
-            <a:ext cx="3024336" cy="369332"/>
-          </a:xfrm>
-          <a:prstGeom prst="rect">
-            <a:avLst/>
-          </a:prstGeom>
-          <a:noFill/>
-        </p:spPr>
-        <p:txBody>
-          <a:bodyPr wrap="square" rtlCol="0">
-            <a:spAutoFit/>
-          </a:bodyPr>
-          <a:lstStyle/>
-          <a:p>
-            <a:r>
-              <a:rPr lang="en-US" altLang="ko-KR" dirty="0" err="1" smtClean="0"/>
-              <a:t>Supabase</a:t>
-            </a:r>
-            <a:r>
-              <a:rPr lang="en-US" altLang="ko-KR" dirty="0" smtClean="0"/>
-              <a:t> </a:t>
-            </a:r>
-            <a:r>
-              <a:rPr lang="ko-KR" altLang="en-US" dirty="0" smtClean="0"/>
-              <a:t>사용자 관리</a:t>
-            </a:r>
-            <a:endParaRPr lang="ko-KR" altLang="en-US" dirty="0"/>
-          </a:p>
-        </p:txBody>
-      </p:sp>
-      <p:pic>
-        <p:nvPicPr>
-          <p:cNvPr id="3" name="그림 2"/>
-          <p:cNvPicPr>
-            <a:picLocks noChangeAspect="1"/>
-          </p:cNvPicPr>
-          <p:nvPr/>
-        </p:nvPicPr>
-        <p:blipFill>
-          <a:blip r:embed="rId2"/>
-          <a:stretch>
-            <a:fillRect/>
-          </a:stretch>
-        </p:blipFill>
-        <p:spPr>
-          <a:xfrm>
-            <a:off x="467544" y="980728"/>
-            <a:ext cx="7815558" cy="2186202"/>
-          </a:xfrm>
-          <a:prstGeom prst="rect">
-            <a:avLst/>
-          </a:prstGeom>
-        </p:spPr>
-      </p:pic>
-      <p:pic>
-        <p:nvPicPr>
-          <p:cNvPr id="4" name="그림 3"/>
-          <p:cNvPicPr>
-            <a:picLocks noChangeAspect="1"/>
-          </p:cNvPicPr>
-          <p:nvPr/>
-        </p:nvPicPr>
-        <p:blipFill>
-          <a:blip r:embed="rId3"/>
-          <a:stretch>
-            <a:fillRect/>
-          </a:stretch>
-        </p:blipFill>
-        <p:spPr>
-          <a:xfrm>
-            <a:off x="539552" y="4509120"/>
-            <a:ext cx="2213319" cy="2024558"/>
-          </a:xfrm>
-          <a:prstGeom prst="rect">
-            <a:avLst/>
-          </a:prstGeom>
-        </p:spPr>
-      </p:pic>
-      <p:sp>
-        <p:nvSpPr>
-          <p:cNvPr id="5" name="TextBox 4"/>
-          <p:cNvSpPr txBox="1"/>
-          <p:nvPr/>
-        </p:nvSpPr>
-        <p:spPr>
-          <a:xfrm>
-            <a:off x="3275856" y="5085184"/>
-            <a:ext cx="2880320" cy="923330"/>
-          </a:xfrm>
-          <a:prstGeom prst="rect">
-            <a:avLst/>
-          </a:prstGeom>
-          <a:noFill/>
-        </p:spPr>
-        <p:txBody>
-          <a:bodyPr wrap="square" rtlCol="0">
-            <a:spAutoFit/>
-          </a:bodyPr>
-          <a:lstStyle/>
-          <a:p>
-            <a:r>
-              <a:rPr lang="ko-KR" altLang="en-US" dirty="0" smtClean="0"/>
-              <a:t>관리자 </a:t>
-            </a:r>
-            <a:r>
-              <a:rPr lang="en-US" altLang="ko-KR" dirty="0" smtClean="0"/>
-              <a:t>: </a:t>
-            </a:r>
-            <a:r>
-              <a:rPr lang="en-US" altLang="ko-KR" dirty="0" smtClean="0">
-                <a:hlinkClick r:id="rId4"/>
-              </a:rPr>
-              <a:t>admin@myplatform.com</a:t>
-            </a:r>
-            <a:r>
-              <a:rPr lang="en-US" altLang="ko-KR" dirty="0" smtClean="0"/>
-              <a:t> / admin1234</a:t>
-            </a:r>
-            <a:endParaRPr lang="ko-KR" altLang="en-US" dirty="0"/>
-          </a:p>
-        </p:txBody>
-      </p:sp>
-    </p:spTree>
-    <p:extLst>
-      <p:ext uri="{BB962C8B-B14F-4D97-AF65-F5344CB8AC3E}">
-        <p14:creationId xmlns:p14="http://schemas.microsoft.com/office/powerpoint/2010/main" val="3838851202"/>
-      </p:ext>
-    </p:extLst>
-  </p:cSld>
-  <p:clrMapOvr>
-    <a:masterClrMapping/>
-  </p:clrMapOvr>
-</p:sld>
-</file>
-
-<file path=ppt/slides/slide26.xml><?xml version="1.0" encoding="utf-8"?>
-<p:sld xmlns:a="http://schemas.openxmlformats.org/drawingml/2006/main" xmlns:r="http://schemas.openxmlformats.org/officeDocument/2006/relationships" xmlns:p="http://schemas.openxmlformats.org/presentationml/2006/main">
-  <p:cSld>
-    <p:spTree>
-      <p:nvGrpSpPr>
-        <p:cNvPr id="1" name=""/>
-        <p:cNvGrpSpPr/>
-        <p:nvPr/>
-      </p:nvGrpSpPr>
-      <p:grpSpPr>
-        <a:xfrm>
-          <a:off x="0" y="0"/>
-          <a:ext cx="0" cy="0"/>
-          <a:chOff x="0" y="0"/>
-          <a:chExt cx="0" cy="0"/>
-        </a:xfrm>
-      </p:grpSpPr>
-      <p:sp>
-        <p:nvSpPr>
-          <p:cNvPr id="2" name="TextBox 1"/>
-          <p:cNvSpPr txBox="1"/>
-          <p:nvPr/>
-        </p:nvSpPr>
-        <p:spPr>
-          <a:xfrm>
-            <a:off x="179512" y="548680"/>
-            <a:ext cx="7632848" cy="646331"/>
-          </a:xfrm>
-          <a:prstGeom prst="rect">
-            <a:avLst/>
-          </a:prstGeom>
-          <a:noFill/>
-        </p:spPr>
-        <p:txBody>
-          <a:bodyPr wrap="square" rtlCol="0">
-            <a:spAutoFit/>
-          </a:bodyPr>
-          <a:lstStyle/>
-          <a:p>
-            <a:r>
-              <a:rPr lang="en-US" altLang="ko-KR" sz="1200" dirty="0" smtClean="0"/>
-              <a:t>TO – DO</a:t>
-            </a:r>
-          </a:p>
-          <a:p>
-            <a:r>
-              <a:rPr lang="en-US" altLang="ko-KR" sz="1200" dirty="0" smtClean="0"/>
-              <a:t>// 20260826 </a:t>
-            </a:r>
-            <a:r>
-              <a:rPr lang="ko-KR" altLang="en-US" sz="1200" dirty="0" smtClean="0"/>
-              <a:t>중간점검</a:t>
-            </a:r>
-            <a:endParaRPr lang="en-US" altLang="ko-KR" sz="1200" dirty="0" smtClean="0"/>
-          </a:p>
-          <a:p>
-            <a:endParaRPr lang="ko-KR" altLang="en-US" sz="1200" dirty="0"/>
-          </a:p>
-        </p:txBody>
-      </p:sp>
-    </p:spTree>
-    <p:extLst>
-      <p:ext uri="{BB962C8B-B14F-4D97-AF65-F5344CB8AC3E}">
-        <p14:creationId xmlns:p14="http://schemas.microsoft.com/office/powerpoint/2010/main" val="1765845176"/>
-      </p:ext>
-    </p:extLst>
-  </p:cSld>
-  <p:clrMapOvr>
-    <a:masterClrMapping/>
-  </p:clrMapOvr>
-</p:sld>
-</file>
-
-<file path=ppt/slides/slide27.xml><?xml version="1.0" encoding="utf-8"?>
-<p:sld xmlns:a="http://schemas.openxmlformats.org/drawingml/2006/main" xmlns:r="http://schemas.openxmlformats.org/officeDocument/2006/relationships" xmlns:p="http://schemas.openxmlformats.org/presentationml/2006/main">
-  <p:cSld>
-    <p:spTree>
-      <p:nvGrpSpPr>
-        <p:cNvPr id="1" name=""/>
-        <p:cNvGrpSpPr/>
-        <p:nvPr/>
-      </p:nvGrpSpPr>
-      <p:grpSpPr>
-        <a:xfrm>
-          <a:off x="0" y="0"/>
-          <a:ext cx="0" cy="0"/>
-          <a:chOff x="0" y="0"/>
-          <a:chExt cx="0" cy="0"/>
-        </a:xfrm>
-      </p:grpSpPr>
-      <p:sp>
-        <p:nvSpPr>
-          <p:cNvPr id="2" name="직사각형 1"/>
-          <p:cNvSpPr/>
-          <p:nvPr/>
-        </p:nvSpPr>
-        <p:spPr>
-          <a:xfrm>
-            <a:off x="971600" y="1844824"/>
-            <a:ext cx="2592288" cy="1584176"/>
-          </a:xfrm>
-          <a:prstGeom prst="rect">
-            <a:avLst/>
-          </a:prstGeom>
-        </p:spPr>
-        <p:style>
-          <a:lnRef idx="2">
-            <a:schemeClr val="accent1">
-              <a:shade val="50000"/>
-            </a:schemeClr>
-          </a:lnRef>
-          <a:fillRef idx="1">
-            <a:schemeClr val="accent1"/>
-          </a:fillRef>
-          <a:effectRef idx="0">
-            <a:schemeClr val="accent1"/>
-          </a:effectRef>
-          <a:fontRef idx="minor">
-            <a:schemeClr val="lt1"/>
-          </a:fontRef>
-        </p:style>
-        <p:txBody>
-          <a:bodyPr rtlCol="0" anchor="ctr"/>
-          <a:lstStyle/>
-          <a:p>
-            <a:pPr algn="ctr"/>
-            <a:r>
-              <a:rPr lang="en-US" altLang="ko-KR" dirty="0" smtClean="0"/>
-              <a:t>chat GPT</a:t>
-            </a:r>
-          </a:p>
-          <a:p>
-            <a:pPr algn="ctr"/>
-            <a:r>
-              <a:rPr lang="ko-KR" altLang="en-US" dirty="0" smtClean="0"/>
-              <a:t>기획</a:t>
-            </a:r>
-            <a:r>
-              <a:rPr lang="en-US" altLang="ko-KR" dirty="0" smtClean="0"/>
-              <a:t>/</a:t>
-            </a:r>
-            <a:r>
-              <a:rPr lang="ko-KR" altLang="en-US" dirty="0" smtClean="0"/>
-              <a:t>분석</a:t>
-            </a:r>
-            <a:r>
-              <a:rPr lang="en-US" altLang="ko-KR" dirty="0" smtClean="0"/>
-              <a:t>/</a:t>
-            </a:r>
-            <a:r>
-              <a:rPr lang="ko-KR" altLang="en-US" dirty="0" smtClean="0"/>
-              <a:t>개발</a:t>
-            </a:r>
-            <a:r>
-              <a:rPr lang="en-US" altLang="ko-KR" dirty="0" smtClean="0"/>
-              <a:t>prompt </a:t>
-            </a:r>
-            <a:endParaRPr lang="ko-KR" altLang="en-US" dirty="0"/>
-          </a:p>
-        </p:txBody>
-      </p:sp>
-      <p:sp>
-        <p:nvSpPr>
-          <p:cNvPr id="3" name="직사각형 2"/>
-          <p:cNvSpPr/>
-          <p:nvPr/>
-        </p:nvSpPr>
-        <p:spPr>
-          <a:xfrm>
-            <a:off x="971600" y="4941168"/>
-            <a:ext cx="2592288" cy="1584176"/>
-          </a:xfrm>
-          <a:prstGeom prst="rect">
-            <a:avLst/>
-          </a:prstGeom>
-        </p:spPr>
-        <p:style>
-          <a:lnRef idx="2">
-            <a:schemeClr val="accent1">
-              <a:shade val="50000"/>
-            </a:schemeClr>
-          </a:lnRef>
-          <a:fillRef idx="1">
-            <a:schemeClr val="accent1"/>
-          </a:fillRef>
-          <a:effectRef idx="0">
-            <a:schemeClr val="accent1"/>
-          </a:effectRef>
-          <a:fontRef idx="minor">
-            <a:schemeClr val="lt1"/>
-          </a:fontRef>
-        </p:style>
-        <p:txBody>
-          <a:bodyPr rtlCol="0" anchor="ctr"/>
-          <a:lstStyle/>
-          <a:p>
-            <a:pPr algn="ctr"/>
-            <a:r>
-              <a:rPr lang="en-US" altLang="ko-KR" dirty="0" smtClean="0"/>
-              <a:t>Cursor</a:t>
-            </a:r>
-          </a:p>
-          <a:p>
-            <a:pPr algn="ctr"/>
-            <a:r>
-              <a:rPr lang="ko-KR" altLang="en-US" dirty="0" smtClean="0"/>
-              <a:t>개발</a:t>
-            </a:r>
-            <a:endParaRPr lang="en-US" altLang="ko-KR" dirty="0" smtClean="0"/>
-          </a:p>
-        </p:txBody>
-      </p:sp>
-      <p:sp>
-        <p:nvSpPr>
-          <p:cNvPr id="4" name="TextBox 3"/>
-          <p:cNvSpPr txBox="1"/>
-          <p:nvPr/>
-        </p:nvSpPr>
-        <p:spPr>
-          <a:xfrm>
-            <a:off x="179512" y="332656"/>
-            <a:ext cx="2880320" cy="369332"/>
-          </a:xfrm>
-          <a:prstGeom prst="rect">
-            <a:avLst/>
-          </a:prstGeom>
-          <a:noFill/>
-        </p:spPr>
-        <p:txBody>
-          <a:bodyPr wrap="square" rtlCol="0">
-            <a:spAutoFit/>
-          </a:bodyPr>
-          <a:lstStyle/>
-          <a:p>
-            <a:r>
-              <a:rPr lang="ko-KR" altLang="en-US" dirty="0" smtClean="0"/>
-              <a:t>개발방법</a:t>
-            </a:r>
-            <a:endParaRPr lang="ko-KR" altLang="en-US" dirty="0"/>
-          </a:p>
-        </p:txBody>
-      </p:sp>
-      <p:sp>
-        <p:nvSpPr>
-          <p:cNvPr id="6" name="TextBox 5"/>
-          <p:cNvSpPr txBox="1"/>
-          <p:nvPr/>
-        </p:nvSpPr>
-        <p:spPr>
-          <a:xfrm>
-            <a:off x="971600" y="4509120"/>
-            <a:ext cx="2088232" cy="369332"/>
-          </a:xfrm>
-          <a:prstGeom prst="rect">
-            <a:avLst/>
-          </a:prstGeom>
-          <a:noFill/>
-        </p:spPr>
-        <p:txBody>
-          <a:bodyPr wrap="square" rtlCol="0">
-            <a:spAutoFit/>
-          </a:bodyPr>
-          <a:lstStyle/>
-          <a:p>
-            <a:r>
-              <a:rPr lang="en-US" altLang="ko-KR" dirty="0" err="1" smtClean="0"/>
-              <a:t>aidesctop</a:t>
-            </a:r>
-            <a:endParaRPr lang="ko-KR" altLang="en-US" dirty="0"/>
-          </a:p>
-        </p:txBody>
-      </p:sp>
-      <p:sp>
-        <p:nvSpPr>
-          <p:cNvPr id="7" name="TextBox 6"/>
-          <p:cNvSpPr txBox="1"/>
-          <p:nvPr/>
-        </p:nvSpPr>
-        <p:spPr>
-          <a:xfrm>
-            <a:off x="971600" y="1475492"/>
-            <a:ext cx="2088232" cy="369332"/>
-          </a:xfrm>
-          <a:prstGeom prst="rect">
-            <a:avLst/>
-          </a:prstGeom>
-          <a:noFill/>
-        </p:spPr>
-        <p:txBody>
-          <a:bodyPr wrap="square" rtlCol="0">
-            <a:spAutoFit/>
-          </a:bodyPr>
-          <a:lstStyle/>
-          <a:p>
-            <a:r>
-              <a:rPr lang="en-US" altLang="ko-KR" dirty="0" smtClean="0"/>
-              <a:t>gram</a:t>
-            </a:r>
-            <a:endParaRPr lang="ko-KR" altLang="en-US" dirty="0"/>
-          </a:p>
-        </p:txBody>
-      </p:sp>
-    </p:spTree>
-    <p:extLst>
-      <p:ext uri="{BB962C8B-B14F-4D97-AF65-F5344CB8AC3E}">
-        <p14:creationId xmlns:p14="http://schemas.microsoft.com/office/powerpoint/2010/main" val="2951588667"/>
-      </p:ext>
-    </p:extLst>
-  </p:cSld>
-  <p:clrMapOvr>
-    <a:masterClrMapping/>
-  </p:clrMapOvr>
-</p:sld>
-</file>
-
 <file path=ppt/slides/slide28.xml><?xml version="1.0" encoding="utf-8"?>
 <p:sld xmlns:a="http://schemas.openxmlformats.org/drawingml/2006/main" xmlns:r="http://schemas.openxmlformats.org/officeDocument/2006/relationships" xmlns:p="http://schemas.openxmlformats.org/presentationml/2006/main">
   <p:cSld>
@@ -6235,24 +6186,19 @@
       </p:grpSpPr>
       <p:sp>
         <p:nvSpPr>
-          <p:cNvPr id="5" name="TextBox 4"/>
+          <p:cNvPr id="2" name="TextBox 1"/>
           <p:cNvSpPr txBox="1"/>
           <p:nvPr/>
         </p:nvSpPr>
         <p:spPr>
           <a:xfrm>
-            <a:off x="4427984" y="476672"/>
-            <a:ext cx="3096344" cy="4801314"/>
+            <a:off x="251520" y="188640"/>
+            <a:ext cx="3024336" cy="369332"/>
           </a:xfrm>
           <a:prstGeom prst="rect">
             <a:avLst/>
           </a:prstGeom>
           <a:noFill/>
-          <a:ln>
-            <a:solidFill>
-              <a:schemeClr val="tx1"/>
-            </a:solidFill>
-          </a:ln>
         </p:spPr>
         <p:txBody>
           <a:bodyPr wrap="square" rtlCol="0">
@@ -6261,231 +6207,79 @@
           <a:lstStyle/>
           <a:p>
             <a:r>
+              <a:rPr lang="en-US" altLang="ko-KR" dirty="0" err="1" smtClean="0"/>
+              <a:t>Supabase</a:t>
+            </a:r>
+            <a:r>
+              <a:rPr lang="en-US" altLang="ko-KR" dirty="0" smtClean="0"/>
+              <a:t> </a:t>
+            </a:r>
+            <a:r>
               <a:rPr lang="ko-KR" altLang="en-US" dirty="0" smtClean="0"/>
-              <a:t>고객</a:t>
-            </a:r>
-            <a:endParaRPr lang="en-US" altLang="ko-KR" dirty="0" smtClean="0"/>
-          </a:p>
-          <a:p>
-            <a:endParaRPr lang="en-US" altLang="ko-KR" dirty="0"/>
-          </a:p>
-          <a:p>
-            <a:endParaRPr lang="en-US" altLang="ko-KR" dirty="0" smtClean="0"/>
-          </a:p>
-          <a:p>
-            <a:endParaRPr lang="en-US" altLang="ko-KR" dirty="0"/>
-          </a:p>
-          <a:p>
-            <a:endParaRPr lang="en-US" altLang="ko-KR" dirty="0" smtClean="0"/>
-          </a:p>
-          <a:p>
-            <a:endParaRPr lang="en-US" altLang="ko-KR" dirty="0"/>
-          </a:p>
-          <a:p>
-            <a:endParaRPr lang="en-US" altLang="ko-KR" dirty="0" smtClean="0"/>
-          </a:p>
-          <a:p>
-            <a:endParaRPr lang="en-US" altLang="ko-KR" dirty="0"/>
-          </a:p>
-          <a:p>
-            <a:endParaRPr lang="en-US" altLang="ko-KR" dirty="0" smtClean="0"/>
-          </a:p>
-          <a:p>
-            <a:endParaRPr lang="en-US" altLang="ko-KR" dirty="0"/>
-          </a:p>
-          <a:p>
-            <a:endParaRPr lang="en-US" altLang="ko-KR" dirty="0" smtClean="0"/>
-          </a:p>
-          <a:p>
-            <a:endParaRPr lang="en-US" altLang="ko-KR" dirty="0"/>
-          </a:p>
-          <a:p>
-            <a:endParaRPr lang="en-US" altLang="ko-KR" dirty="0" smtClean="0"/>
-          </a:p>
-          <a:p>
-            <a:endParaRPr lang="en-US" altLang="ko-KR" dirty="0"/>
-          </a:p>
-          <a:p>
-            <a:endParaRPr lang="en-US" altLang="ko-KR" dirty="0" smtClean="0"/>
-          </a:p>
-          <a:p>
-            <a:endParaRPr lang="en-US" altLang="ko-KR" dirty="0"/>
-          </a:p>
-          <a:p>
+              <a:t>사용자 관리</a:t>
+            </a:r>
             <a:endParaRPr lang="ko-KR" altLang="en-US" dirty="0"/>
           </a:p>
         </p:txBody>
       </p:sp>
-      <p:sp>
-        <p:nvSpPr>
-          <p:cNvPr id="2" name="직사각형 1"/>
-          <p:cNvSpPr/>
-          <p:nvPr/>
-        </p:nvSpPr>
-        <p:spPr>
-          <a:xfrm>
-            <a:off x="539552" y="1421642"/>
-            <a:ext cx="1800200" cy="1008112"/>
-          </a:xfrm>
-          <a:prstGeom prst="rect">
-            <a:avLst/>
-          </a:prstGeom>
-        </p:spPr>
-        <p:style>
-          <a:lnRef idx="2">
-            <a:schemeClr val="accent1">
-              <a:shade val="50000"/>
-            </a:schemeClr>
-          </a:lnRef>
-          <a:fillRef idx="1">
-            <a:schemeClr val="accent1"/>
-          </a:fillRef>
-          <a:effectRef idx="0">
-            <a:schemeClr val="accent1"/>
-          </a:effectRef>
-          <a:fontRef idx="minor">
-            <a:schemeClr val="lt1"/>
-          </a:fontRef>
-        </p:style>
-        <p:txBody>
-          <a:bodyPr rtlCol="0" anchor="ctr"/>
-          <a:lstStyle/>
-          <a:p>
-            <a:pPr algn="ctr"/>
-            <a:r>
-              <a:rPr lang="en-US" altLang="ko-KR" dirty="0" err="1" smtClean="0"/>
-              <a:t>Aifront</a:t>
-            </a:r>
-            <a:endParaRPr lang="en-US" altLang="ko-KR" dirty="0" smtClean="0"/>
-          </a:p>
-          <a:p>
-            <a:pPr algn="ctr"/>
-            <a:r>
-              <a:rPr lang="ko-KR" altLang="en-US" dirty="0" smtClean="0"/>
-              <a:t>플랫폼</a:t>
-            </a:r>
-            <a:endParaRPr lang="ko-KR" altLang="en-US" dirty="0"/>
-          </a:p>
-        </p:txBody>
-      </p:sp>
-      <p:sp>
-        <p:nvSpPr>
-          <p:cNvPr id="3" name="직사각형 2"/>
-          <p:cNvSpPr/>
-          <p:nvPr/>
-        </p:nvSpPr>
-        <p:spPr>
-          <a:xfrm>
-            <a:off x="4836062" y="1340768"/>
-            <a:ext cx="1872208" cy="1080120"/>
-          </a:xfrm>
-          <a:prstGeom prst="rect">
-            <a:avLst/>
-          </a:prstGeom>
-        </p:spPr>
-        <p:style>
-          <a:lnRef idx="2">
-            <a:schemeClr val="accent1">
-              <a:shade val="50000"/>
-            </a:schemeClr>
-          </a:lnRef>
-          <a:fillRef idx="1">
-            <a:schemeClr val="accent1"/>
-          </a:fillRef>
-          <a:effectRef idx="0">
-            <a:schemeClr val="accent1"/>
-          </a:effectRef>
-          <a:fontRef idx="minor">
-            <a:schemeClr val="lt1"/>
-          </a:fontRef>
-        </p:style>
-        <p:txBody>
-          <a:bodyPr rtlCol="0" anchor="ctr"/>
-          <a:lstStyle/>
-          <a:p>
-            <a:pPr algn="ctr"/>
-            <a:r>
-              <a:rPr lang="en-US" altLang="ko-KR" dirty="0" smtClean="0"/>
-              <a:t>K</a:t>
-            </a:r>
-            <a:r>
-              <a:rPr lang="ko-KR" altLang="en-US" dirty="0" err="1" smtClean="0"/>
-              <a:t>직구쇼핑몰</a:t>
-            </a:r>
-            <a:endParaRPr lang="en-US" altLang="ko-KR" dirty="0" smtClean="0"/>
-          </a:p>
-          <a:p>
-            <a:pPr algn="ctr"/>
-            <a:r>
-              <a:rPr lang="en-US" altLang="ko-KR" dirty="0" smtClean="0"/>
-              <a:t>(</a:t>
-            </a:r>
-            <a:r>
-              <a:rPr lang="ko-KR" altLang="en-US" dirty="0" smtClean="0"/>
-              <a:t>말레이시아</a:t>
-            </a:r>
-            <a:r>
-              <a:rPr lang="en-US" altLang="ko-KR" dirty="0" smtClean="0"/>
-              <a:t>)</a:t>
-            </a:r>
-            <a:endParaRPr lang="ko-KR" altLang="en-US" dirty="0"/>
-          </a:p>
-        </p:txBody>
-      </p:sp>
-      <p:sp>
-        <p:nvSpPr>
-          <p:cNvPr id="4" name="직사각형 3"/>
-          <p:cNvSpPr/>
-          <p:nvPr/>
-        </p:nvSpPr>
-        <p:spPr>
-          <a:xfrm>
-            <a:off x="4860032" y="3068960"/>
-            <a:ext cx="1872208" cy="1080120"/>
-          </a:xfrm>
-          <a:prstGeom prst="rect">
-            <a:avLst/>
-          </a:prstGeom>
-        </p:spPr>
-        <p:style>
-          <a:lnRef idx="2">
-            <a:schemeClr val="accent1">
-              <a:shade val="50000"/>
-            </a:schemeClr>
-          </a:lnRef>
-          <a:fillRef idx="1">
-            <a:schemeClr val="accent1"/>
-          </a:fillRef>
-          <a:effectRef idx="0">
-            <a:schemeClr val="accent1"/>
-          </a:effectRef>
-          <a:fontRef idx="minor">
-            <a:schemeClr val="lt1"/>
-          </a:fontRef>
-        </p:style>
-        <p:txBody>
-          <a:bodyPr rtlCol="0" anchor="ctr"/>
-          <a:lstStyle/>
-          <a:p>
-            <a:pPr algn="ctr"/>
-            <a:r>
-              <a:rPr lang="ko-KR" altLang="en-US" dirty="0" smtClean="0"/>
-              <a:t>자영업사이트</a:t>
-            </a:r>
-            <a:endParaRPr lang="ko-KR" altLang="en-US" dirty="0"/>
-          </a:p>
-        </p:txBody>
-      </p:sp>
-      <p:sp>
-        <p:nvSpPr>
-          <p:cNvPr id="6" name="TextBox 5"/>
+      <p:pic>
+        <p:nvPicPr>
+          <p:cNvPr id="3" name="그림 2"/>
+          <p:cNvPicPr>
+            <a:picLocks noChangeAspect="1"/>
+          </p:cNvPicPr>
+          <p:nvPr/>
+        </p:nvPicPr>
+        <p:blipFill>
+          <a:blip r:embed="rId2"/>
+          <a:stretch>
+            <a:fillRect/>
+          </a:stretch>
+        </p:blipFill>
+        <p:spPr>
+          <a:xfrm>
+            <a:off x="467544" y="980728"/>
+            <a:ext cx="7815558" cy="2186202"/>
+          </a:xfrm>
+          <a:prstGeom prst="rect">
+            <a:avLst/>
+          </a:prstGeom>
+        </p:spPr>
+      </p:pic>
+      <p:pic>
+        <p:nvPicPr>
+          <p:cNvPr id="4" name="그림 3"/>
+          <p:cNvPicPr>
+            <a:picLocks noChangeAspect="1"/>
+          </p:cNvPicPr>
+          <p:nvPr/>
+        </p:nvPicPr>
+        <p:blipFill>
+          <a:blip r:embed="rId3"/>
+          <a:stretch>
+            <a:fillRect/>
+          </a:stretch>
+        </p:blipFill>
+        <p:spPr>
+          <a:xfrm>
+            <a:off x="539552" y="4509120"/>
+            <a:ext cx="2213319" cy="2024558"/>
+          </a:xfrm>
+          <a:prstGeom prst="rect">
+            <a:avLst/>
+          </a:prstGeom>
+        </p:spPr>
+      </p:pic>
+      <p:sp>
+        <p:nvSpPr>
+          <p:cNvPr id="5" name="TextBox 4"/>
           <p:cNvSpPr txBox="1"/>
           <p:nvPr/>
         </p:nvSpPr>
         <p:spPr>
           <a:xfrm>
-            <a:off x="467544" y="332656"/>
-            <a:ext cx="2016224" cy="369332"/>
+            <a:off x="3275856" y="5085184"/>
+            <a:ext cx="2880320" cy="923330"/>
           </a:xfrm>
           <a:prstGeom prst="rect">
             <a:avLst/>
@@ -6500,7 +6294,21 @@
           <a:p>
             <a:r>
               <a:rPr lang="ko-KR" altLang="en-US" dirty="0" smtClean="0"/>
-              <a:t>비즈니스 구성도</a:t>
+              <a:t>관리자 </a:t>
+            </a:r>
+            <a:r>
+              <a:rPr lang="en-US" altLang="ko-KR" dirty="0" smtClean="0"/>
+              <a:t>: </a:t>
+            </a:r>
+            <a:r>
+              <a:rPr lang="en-US" altLang="ko-KR" dirty="0" smtClean="0">
+                <a:hlinkClick r:id="rId4"/>
+              </a:rPr>
+              <a:t>admin@myplatform.com</a:t>
+            </a:r>
+            <a:r>
+              <a:rPr lang="en-US" altLang="ko-KR" dirty="0" smtClean="0"/>
+              <a:t> / admin1234</a:t>
             </a:r>
             <a:endParaRPr lang="ko-KR" altLang="en-US" dirty="0"/>
           </a:p>
@@ -6509,7 +6317,7 @@
     </p:spTree>
     <p:extLst>
       <p:ext uri="{BB962C8B-B14F-4D97-AF65-F5344CB8AC3E}">
-        <p14:creationId xmlns:p14="http://schemas.microsoft.com/office/powerpoint/2010/main" val="486792675"/>
+        <p14:creationId xmlns:p14="http://schemas.microsoft.com/office/powerpoint/2010/main" val="3838851202"/>
       </p:ext>
     </p:extLst>
   </p:cSld>
@@ -6538,293 +6346,39 @@
       </p:grpSpPr>
       <p:sp>
         <p:nvSpPr>
-          <p:cNvPr id="2" name="직사각형 1"/>
-          <p:cNvSpPr/>
-          <p:nvPr/>
-        </p:nvSpPr>
-        <p:spPr>
-          <a:xfrm>
-            <a:off x="323528" y="404664"/>
-            <a:ext cx="6048672" cy="646331"/>
-          </a:xfrm>
-          <a:prstGeom prst="rect">
-            <a:avLst/>
-          </a:prstGeom>
-        </p:spPr>
-        <p:txBody>
-          <a:bodyPr wrap="square">
+          <p:cNvPr id="2" name="TextBox 1"/>
+          <p:cNvSpPr txBox="1"/>
+          <p:nvPr/>
+        </p:nvSpPr>
+        <p:spPr>
+          <a:xfrm>
+            <a:off x="179512" y="548680"/>
+            <a:ext cx="7632848" cy="646331"/>
+          </a:xfrm>
+          <a:prstGeom prst="rect">
+            <a:avLst/>
+          </a:prstGeom>
+          <a:noFill/>
+        </p:spPr>
+        <p:txBody>
+          <a:bodyPr wrap="square" rtlCol="0">
             <a:spAutoFit/>
           </a:bodyPr>
           <a:lstStyle/>
           <a:p>
             <a:r>
-              <a:rPr lang="en-US" altLang="ko-KR" dirty="0" smtClean="0"/>
-              <a:t>// </a:t>
-            </a:r>
-            <a:r>
-              <a:rPr lang="en-US" altLang="ko-KR" dirty="0" err="1" smtClean="0"/>
-              <a:t>aifront</a:t>
-            </a:r>
-            <a:endParaRPr lang="en-US" altLang="ko-KR" dirty="0" smtClean="0"/>
-          </a:p>
-          <a:p>
-            <a:r>
-              <a:rPr lang="ko-KR" altLang="en-US" dirty="0" smtClean="0"/>
-              <a:t>https</a:t>
-            </a:r>
-            <a:r>
-              <a:rPr lang="ko-KR" altLang="en-US" dirty="0"/>
-              <a:t>://github.com/oksusoo1/homepageDev.git</a:t>
-            </a:r>
-          </a:p>
-        </p:txBody>
-      </p:sp>
-      <p:sp>
-        <p:nvSpPr>
-          <p:cNvPr id="3" name="직사각형 2"/>
-          <p:cNvSpPr/>
-          <p:nvPr/>
-        </p:nvSpPr>
-        <p:spPr>
-          <a:xfrm>
-            <a:off x="950020" y="1988840"/>
-            <a:ext cx="1656184" cy="648072"/>
-          </a:xfrm>
-          <a:prstGeom prst="rect">
-            <a:avLst/>
-          </a:prstGeom>
-        </p:spPr>
-        <p:style>
-          <a:lnRef idx="2">
-            <a:schemeClr val="accent1">
-              <a:shade val="50000"/>
-            </a:schemeClr>
-          </a:lnRef>
-          <a:fillRef idx="1">
-            <a:schemeClr val="accent1"/>
-          </a:fillRef>
-          <a:effectRef idx="0">
-            <a:schemeClr val="accent1"/>
-          </a:effectRef>
-          <a:fontRef idx="minor">
-            <a:schemeClr val="lt1"/>
-          </a:fontRef>
-        </p:style>
-        <p:txBody>
-          <a:bodyPr rtlCol="0" anchor="ctr"/>
-          <a:lstStyle/>
-          <a:p>
-            <a:pPr algn="ctr"/>
-            <a:r>
-              <a:rPr lang="ko-KR" altLang="en-US" dirty="0" smtClean="0"/>
-              <a:t>고객</a:t>
-            </a:r>
-            <a:endParaRPr lang="ko-KR" altLang="en-US" dirty="0"/>
-          </a:p>
-        </p:txBody>
-      </p:sp>
-      <p:sp>
-        <p:nvSpPr>
-          <p:cNvPr id="6" name="직사각형 5"/>
-          <p:cNvSpPr/>
-          <p:nvPr/>
-        </p:nvSpPr>
-        <p:spPr>
-          <a:xfrm>
-            <a:off x="6588224" y="2060848"/>
-            <a:ext cx="1440160" cy="504056"/>
-          </a:xfrm>
-          <a:prstGeom prst="rect">
-            <a:avLst/>
-          </a:prstGeom>
-        </p:spPr>
-        <p:style>
-          <a:lnRef idx="2">
-            <a:schemeClr val="accent1">
-              <a:shade val="50000"/>
-            </a:schemeClr>
-          </a:lnRef>
-          <a:fillRef idx="1">
-            <a:schemeClr val="accent1"/>
-          </a:fillRef>
-          <a:effectRef idx="0">
-            <a:schemeClr val="accent1"/>
-          </a:effectRef>
-          <a:fontRef idx="minor">
-            <a:schemeClr val="lt1"/>
-          </a:fontRef>
-        </p:style>
-        <p:txBody>
-          <a:bodyPr rtlCol="0" anchor="ctr"/>
-          <a:lstStyle/>
-          <a:p>
-            <a:pPr algn="ctr"/>
-            <a:r>
-              <a:rPr lang="ko-KR" altLang="en-US" dirty="0" smtClean="0"/>
-              <a:t>플랫폼</a:t>
-            </a:r>
-            <a:endParaRPr lang="ko-KR" altLang="en-US" dirty="0"/>
-          </a:p>
-        </p:txBody>
-      </p:sp>
-      <p:sp>
-        <p:nvSpPr>
-          <p:cNvPr id="16" name="직사각형 15"/>
-          <p:cNvSpPr/>
-          <p:nvPr/>
-        </p:nvSpPr>
-        <p:spPr>
-          <a:xfrm>
-            <a:off x="251520" y="2780928"/>
-            <a:ext cx="3216522" cy="1569660"/>
-          </a:xfrm>
-          <a:prstGeom prst="rect">
-            <a:avLst/>
-          </a:prstGeom>
-        </p:spPr>
-        <p:txBody>
-          <a:bodyPr wrap="none">
-            <a:spAutoFit/>
-          </a:bodyPr>
-          <a:lstStyle/>
-          <a:p>
-            <a:r>
               <a:rPr lang="en-US" altLang="ko-KR" sz="1200" dirty="0" smtClean="0"/>
-              <a:t>// </a:t>
+              <a:t>TO – DO</a:t>
+            </a:r>
+          </a:p>
+          <a:p>
+            <a:r>
+              <a:rPr lang="en-US" altLang="ko-KR" sz="1200" dirty="0" smtClean="0"/>
+              <a:t>// 20260826 </a:t>
             </a:r>
             <a:r>
               <a:rPr lang="ko-KR" altLang="en-US" sz="1200" dirty="0" smtClean="0"/>
-              <a:t>포탈</a:t>
-            </a:r>
-            <a:endParaRPr lang="en-US" altLang="ko-KR" sz="1200" dirty="0" smtClean="0"/>
-          </a:p>
-          <a:p>
-            <a:r>
-              <a:rPr lang="ko-KR" altLang="en-US" sz="1200" dirty="0" smtClean="0">
-                <a:hlinkClick r:id="rId2"/>
-              </a:rPr>
-              <a:t>http</a:t>
-            </a:r>
-            <a:r>
-              <a:rPr lang="ko-KR" altLang="en-US" sz="1200" dirty="0">
-                <a:hlinkClick r:id="rId2"/>
-              </a:rPr>
-              <a:t>://spboxwin.iptime.org:3000</a:t>
-            </a:r>
-            <a:r>
-              <a:rPr lang="ko-KR" altLang="en-US" sz="1200" dirty="0" smtClean="0">
-                <a:hlinkClick r:id="rId2"/>
-              </a:rPr>
-              <a:t>/</a:t>
-            </a:r>
-            <a:endParaRPr lang="en-US" altLang="ko-KR" sz="1200" dirty="0" smtClean="0"/>
-          </a:p>
-          <a:p>
-            <a:endParaRPr lang="en-US" altLang="ko-KR" sz="1200" dirty="0"/>
-          </a:p>
-          <a:p>
-            <a:r>
-              <a:rPr lang="en-US" altLang="ko-KR" sz="1200" dirty="0" smtClean="0"/>
-              <a:t>// </a:t>
-            </a:r>
-            <a:r>
-              <a:rPr lang="ko-KR" altLang="en-US" sz="1200" dirty="0" smtClean="0"/>
-              <a:t>고객 사이트 관리 </a:t>
-            </a:r>
-            <a:r>
-              <a:rPr lang="en-US" altLang="ko-KR" sz="1200" dirty="0" smtClean="0"/>
-              <a:t>(</a:t>
-            </a:r>
-            <a:r>
-              <a:rPr lang="ko-KR" altLang="en-US" sz="1200" dirty="0" smtClean="0"/>
-              <a:t>수정</a:t>
-            </a:r>
-            <a:r>
-              <a:rPr lang="en-US" altLang="ko-KR" sz="1200" dirty="0" smtClean="0"/>
-              <a:t>/</a:t>
-            </a:r>
-            <a:r>
-              <a:rPr lang="ko-KR" altLang="en-US" sz="1200" dirty="0" err="1" smtClean="0"/>
-              <a:t>데이타</a:t>
-            </a:r>
-            <a:r>
-              <a:rPr lang="en-US" altLang="ko-KR" sz="1200" dirty="0" smtClean="0"/>
-              <a:t>)</a:t>
-            </a:r>
-          </a:p>
-          <a:p>
-            <a:r>
-              <a:rPr lang="en-US" altLang="ko-KR" sz="1200" dirty="0">
-                <a:hlinkClick r:id="rId3"/>
-              </a:rPr>
-              <a:t>http://</a:t>
-            </a:r>
-            <a:r>
-              <a:rPr lang="en-US" altLang="ko-KR" sz="1200" dirty="0" smtClean="0">
-                <a:hlinkClick r:id="rId3"/>
-              </a:rPr>
-              <a:t>spboxwin.iptime.org:3000/my/magok</a:t>
-            </a:r>
-            <a:endParaRPr lang="en-US" altLang="ko-KR" sz="1200" dirty="0" smtClean="0"/>
-          </a:p>
-          <a:p>
-            <a:endParaRPr lang="en-US" altLang="ko-KR" sz="1200" dirty="0" smtClean="0"/>
-          </a:p>
-          <a:p>
-            <a:r>
-              <a:rPr lang="en-US" altLang="ko-KR" sz="1200" dirty="0" smtClean="0"/>
-              <a:t>// </a:t>
-            </a:r>
-            <a:endParaRPr lang="en-US" altLang="ko-KR" sz="1200" dirty="0"/>
-          </a:p>
-          <a:p>
-            <a:endParaRPr lang="ko-KR" altLang="en-US" sz="1200" dirty="0"/>
-          </a:p>
-        </p:txBody>
-      </p:sp>
-      <p:sp>
-        <p:nvSpPr>
-          <p:cNvPr id="17" name="직사각형 16"/>
-          <p:cNvSpPr/>
-          <p:nvPr/>
-        </p:nvSpPr>
-        <p:spPr>
-          <a:xfrm>
-            <a:off x="5940152" y="2564904"/>
-            <a:ext cx="3060710" cy="646331"/>
-          </a:xfrm>
-          <a:prstGeom prst="rect">
-            <a:avLst/>
-          </a:prstGeom>
-        </p:spPr>
-        <p:txBody>
-          <a:bodyPr wrap="none">
-            <a:spAutoFit/>
-          </a:bodyPr>
-          <a:lstStyle/>
-          <a:p>
-            <a:r>
-              <a:rPr lang="en-US" altLang="ko-KR" sz="1200" dirty="0" smtClean="0"/>
-              <a:t>// </a:t>
-            </a:r>
-            <a:r>
-              <a:rPr lang="ko-KR" altLang="en-US" sz="1200" dirty="0" smtClean="0"/>
-              <a:t>플랫폼 </a:t>
-            </a:r>
-            <a:endParaRPr lang="en-US" altLang="ko-KR" sz="1200" dirty="0" smtClean="0"/>
-          </a:p>
-          <a:p>
-            <a:r>
-              <a:rPr lang="ko-KR" altLang="en-US" sz="1200" dirty="0">
-                <a:hlinkClick r:id="rId4"/>
-              </a:rPr>
-              <a:t>http://spboxwin.iptime.org</a:t>
-            </a:r>
-            <a:r>
-              <a:rPr lang="en-US" altLang="ko-KR" sz="1200" dirty="0" smtClean="0">
-                <a:hlinkClick r:id="rId4"/>
-              </a:rPr>
-              <a:t>:3000/platform</a:t>
+              <a:t>중간점검</a:t>
             </a:r>
             <a:endParaRPr lang="en-US" altLang="ko-KR" sz="1200" dirty="0" smtClean="0"/>
           </a:p>
@@ -6836,7 +6390,7 @@
     </p:spTree>
     <p:extLst>
       <p:ext uri="{BB962C8B-B14F-4D97-AF65-F5344CB8AC3E}">
-        <p14:creationId xmlns:p14="http://schemas.microsoft.com/office/powerpoint/2010/main" val="3655532856"/>
+        <p14:creationId xmlns:p14="http://schemas.microsoft.com/office/powerpoint/2010/main" val="1765845176"/>
       </p:ext>
     </p:extLst>
   </p:cSld>
@@ -6863,6 +6417,672 @@
           <a:chExt cx="0" cy="0"/>
         </a:xfrm>
       </p:grpSpPr>
+      <p:sp>
+        <p:nvSpPr>
+          <p:cNvPr id="2" name="TextBox 1"/>
+          <p:cNvSpPr txBox="1"/>
+          <p:nvPr/>
+        </p:nvSpPr>
+        <p:spPr>
+          <a:xfrm>
+            <a:off x="251520" y="260648"/>
+            <a:ext cx="3240360" cy="369332"/>
+          </a:xfrm>
+          <a:prstGeom prst="rect">
+            <a:avLst/>
+          </a:prstGeom>
+          <a:noFill/>
+        </p:spPr>
+        <p:txBody>
+          <a:bodyPr wrap="square" rtlCol="0">
+            <a:spAutoFit/>
+          </a:bodyPr>
+          <a:lstStyle/>
+          <a:p>
+            <a:r>
+              <a:rPr lang="en-US" altLang="ko-KR" dirty="0" smtClean="0"/>
+              <a:t>2026-09-11 </a:t>
+            </a:r>
+            <a:r>
+              <a:rPr lang="ko-KR" altLang="en-US" dirty="0" smtClean="0"/>
+              <a:t>프로세스 점검</a:t>
+            </a:r>
+            <a:endParaRPr lang="ko-KR" altLang="en-US" dirty="0"/>
+          </a:p>
+        </p:txBody>
+      </p:sp>
+      <p:sp>
+        <p:nvSpPr>
+          <p:cNvPr id="3" name="TextBox 2"/>
+          <p:cNvSpPr txBox="1"/>
+          <p:nvPr/>
+        </p:nvSpPr>
+        <p:spPr>
+          <a:xfrm>
+            <a:off x="323528" y="1196752"/>
+            <a:ext cx="3960440" cy="738664"/>
+          </a:xfrm>
+          <a:prstGeom prst="rect">
+            <a:avLst/>
+          </a:prstGeom>
+          <a:noFill/>
+        </p:spPr>
+        <p:txBody>
+          <a:bodyPr wrap="square" rtlCol="0">
+            <a:spAutoFit/>
+          </a:bodyPr>
+          <a:lstStyle/>
+          <a:p>
+            <a:r>
+              <a:rPr lang="en-US" altLang="ko-KR" sz="1400" dirty="0" smtClean="0">
+                <a:hlinkClick r:id="rId2"/>
+              </a:rPr>
+              <a:t>test2@test.com/test123</a:t>
+            </a:r>
+            <a:r>
+              <a:rPr lang="en-US" altLang="ko-KR" sz="1400" dirty="0"/>
+              <a:t> </a:t>
+            </a:r>
+            <a:r>
+              <a:rPr lang="ko-KR" altLang="en-US" sz="1400" dirty="0" smtClean="0"/>
+              <a:t>계정으로 </a:t>
+            </a:r>
+            <a:r>
+              <a:rPr lang="ko-KR" altLang="en-US" sz="1400" dirty="0" err="1" smtClean="0"/>
+              <a:t>사이트개설</a:t>
+            </a:r>
+            <a:r>
+              <a:rPr lang="ko-KR" altLang="en-US" sz="1400" dirty="0" smtClean="0"/>
+              <a:t> </a:t>
+            </a:r>
+            <a:endParaRPr lang="en-US" altLang="ko-KR" sz="1400" dirty="0" smtClean="0"/>
+          </a:p>
+          <a:p>
+            <a:pPr marL="342900" indent="-342900">
+              <a:buAutoNum type="arabicPeriod"/>
+            </a:pPr>
+            <a:r>
+              <a:rPr lang="ko-KR" altLang="en-US" sz="1400" dirty="0" smtClean="0"/>
+              <a:t>직접</a:t>
+            </a:r>
+            <a:endParaRPr lang="en-US" altLang="ko-KR" sz="1400" dirty="0" smtClean="0"/>
+          </a:p>
+          <a:p>
+            <a:pPr marL="342900" indent="-342900">
+              <a:buAutoNum type="arabicPeriod"/>
+            </a:pPr>
+            <a:r>
+              <a:rPr lang="ko-KR" altLang="en-US" sz="1400" dirty="0" smtClean="0"/>
+              <a:t>대리 </a:t>
+            </a:r>
+            <a:endParaRPr lang="ko-KR" altLang="en-US" sz="1400" dirty="0"/>
+          </a:p>
+        </p:txBody>
+      </p:sp>
+      <p:sp>
+        <p:nvSpPr>
+          <p:cNvPr id="4" name="직사각형 3"/>
+          <p:cNvSpPr/>
+          <p:nvPr/>
+        </p:nvSpPr>
+        <p:spPr>
+          <a:xfrm>
+            <a:off x="1331640" y="2479958"/>
+            <a:ext cx="2880320" cy="576064"/>
+          </a:xfrm>
+          <a:prstGeom prst="rect">
+            <a:avLst/>
+          </a:prstGeom>
+        </p:spPr>
+        <p:style>
+          <a:lnRef idx="2">
+            <a:schemeClr val="accent1">
+              <a:shade val="50000"/>
+            </a:schemeClr>
+          </a:lnRef>
+          <a:fillRef idx="1">
+            <a:schemeClr val="accent1"/>
+          </a:fillRef>
+          <a:effectRef idx="0">
+            <a:schemeClr val="accent1"/>
+          </a:effectRef>
+          <a:fontRef idx="minor">
+            <a:schemeClr val="lt1"/>
+          </a:fontRef>
+        </p:style>
+        <p:txBody>
+          <a:bodyPr rtlCol="0" anchor="ctr"/>
+          <a:lstStyle/>
+          <a:p>
+            <a:pPr algn="ctr"/>
+            <a:r>
+              <a:rPr lang="ko-KR" altLang="en-US" sz="1200" dirty="0" smtClean="0"/>
+              <a:t>템플릿 선택</a:t>
+            </a:r>
+            <a:r>
+              <a:rPr lang="en-US" altLang="ko-KR" sz="1200" dirty="0" smtClean="0"/>
+              <a:t>&gt;</a:t>
+            </a:r>
+            <a:r>
+              <a:rPr lang="ko-KR" altLang="en-US" sz="1200" dirty="0" smtClean="0"/>
+              <a:t>사이트 배포</a:t>
+            </a:r>
+            <a:r>
+              <a:rPr lang="en-US" altLang="ko-KR" sz="1200" dirty="0" smtClean="0"/>
+              <a:t>(</a:t>
+            </a:r>
+            <a:r>
+              <a:rPr lang="ko-KR" altLang="en-US" sz="1200" dirty="0" err="1" smtClean="0"/>
+              <a:t>카드등록</a:t>
+            </a:r>
+            <a:r>
+              <a:rPr lang="en-US" altLang="ko-KR" sz="1200" dirty="0" smtClean="0"/>
+              <a:t>)</a:t>
+            </a:r>
+            <a:endParaRPr lang="ko-KR" altLang="en-US" sz="1200" dirty="0"/>
+          </a:p>
+        </p:txBody>
+      </p:sp>
+      <p:sp>
+        <p:nvSpPr>
+          <p:cNvPr id="5" name="직사각형 4"/>
+          <p:cNvSpPr/>
+          <p:nvPr/>
+        </p:nvSpPr>
+        <p:spPr>
+          <a:xfrm>
+            <a:off x="1331640" y="3288924"/>
+            <a:ext cx="2880320" cy="576064"/>
+          </a:xfrm>
+          <a:prstGeom prst="rect">
+            <a:avLst/>
+          </a:prstGeom>
+        </p:spPr>
+        <p:style>
+          <a:lnRef idx="2">
+            <a:schemeClr val="accent1">
+              <a:shade val="50000"/>
+            </a:schemeClr>
+          </a:lnRef>
+          <a:fillRef idx="1">
+            <a:schemeClr val="accent1"/>
+          </a:fillRef>
+          <a:effectRef idx="0">
+            <a:schemeClr val="accent1"/>
+          </a:effectRef>
+          <a:fontRef idx="minor">
+            <a:schemeClr val="lt1"/>
+          </a:fontRef>
+        </p:style>
+        <p:txBody>
+          <a:bodyPr rtlCol="0" anchor="ctr"/>
+          <a:lstStyle/>
+          <a:p>
+            <a:pPr algn="ctr"/>
+            <a:r>
+              <a:rPr lang="ko-KR" altLang="en-US" sz="1200" dirty="0" smtClean="0"/>
+              <a:t>템플릿 선택</a:t>
+            </a:r>
+            <a:r>
+              <a:rPr lang="en-US" altLang="ko-KR" sz="1200" dirty="0" smtClean="0"/>
+              <a:t>&gt;</a:t>
+            </a:r>
+            <a:r>
+              <a:rPr lang="ko-KR" altLang="en-US" sz="1200" dirty="0" smtClean="0"/>
+              <a:t>사이트 배포</a:t>
+            </a:r>
+            <a:r>
+              <a:rPr lang="en-US" altLang="ko-KR" sz="1200" dirty="0" smtClean="0"/>
+              <a:t>(</a:t>
+            </a:r>
+            <a:r>
+              <a:rPr lang="ko-KR" altLang="en-US" sz="1200" dirty="0" smtClean="0"/>
+              <a:t>계좌이체</a:t>
+            </a:r>
+            <a:r>
+              <a:rPr lang="en-US" altLang="ko-KR" sz="1200" dirty="0" smtClean="0"/>
+              <a:t>)</a:t>
+            </a:r>
+            <a:endParaRPr lang="ko-KR" altLang="en-US" sz="1200" dirty="0"/>
+          </a:p>
+        </p:txBody>
+      </p:sp>
+      <p:sp>
+        <p:nvSpPr>
+          <p:cNvPr id="6" name="직사각형 5"/>
+          <p:cNvSpPr/>
+          <p:nvPr/>
+        </p:nvSpPr>
+        <p:spPr>
+          <a:xfrm>
+            <a:off x="4499992" y="2852936"/>
+            <a:ext cx="2016224" cy="504056"/>
+          </a:xfrm>
+          <a:prstGeom prst="rect">
+            <a:avLst/>
+          </a:prstGeom>
+        </p:spPr>
+        <p:style>
+          <a:lnRef idx="2">
+            <a:schemeClr val="accent1">
+              <a:shade val="50000"/>
+            </a:schemeClr>
+          </a:lnRef>
+          <a:fillRef idx="1">
+            <a:schemeClr val="accent1"/>
+          </a:fillRef>
+          <a:effectRef idx="0">
+            <a:schemeClr val="accent1"/>
+          </a:effectRef>
+          <a:fontRef idx="minor">
+            <a:schemeClr val="lt1"/>
+          </a:fontRef>
+        </p:style>
+        <p:txBody>
+          <a:bodyPr rtlCol="0" anchor="ctr"/>
+          <a:lstStyle/>
+          <a:p>
+            <a:pPr algn="ctr"/>
+            <a:r>
+              <a:rPr lang="en-US" altLang="ko-KR" sz="1400" dirty="0" smtClean="0"/>
+              <a:t>trial14</a:t>
+            </a:r>
+            <a:r>
+              <a:rPr lang="ko-KR" altLang="en-US" sz="1400" dirty="0" smtClean="0"/>
+              <a:t>일</a:t>
+            </a:r>
+            <a:endParaRPr lang="ko-KR" altLang="en-US" sz="1400" dirty="0"/>
+          </a:p>
+        </p:txBody>
+      </p:sp>
+      <p:sp>
+        <p:nvSpPr>
+          <p:cNvPr id="7" name="직사각형 6"/>
+          <p:cNvSpPr/>
+          <p:nvPr/>
+        </p:nvSpPr>
+        <p:spPr>
+          <a:xfrm>
+            <a:off x="395536" y="2708920"/>
+            <a:ext cx="648072" cy="288032"/>
+          </a:xfrm>
+          <a:prstGeom prst="rect">
+            <a:avLst/>
+          </a:prstGeom>
+        </p:spPr>
+        <p:style>
+          <a:lnRef idx="2">
+            <a:schemeClr val="accent1">
+              <a:shade val="50000"/>
+            </a:schemeClr>
+          </a:lnRef>
+          <a:fillRef idx="1">
+            <a:schemeClr val="accent1"/>
+          </a:fillRef>
+          <a:effectRef idx="0">
+            <a:schemeClr val="accent1"/>
+          </a:effectRef>
+          <a:fontRef idx="minor">
+            <a:schemeClr val="lt1"/>
+          </a:fontRef>
+        </p:style>
+        <p:txBody>
+          <a:bodyPr rtlCol="0" anchor="ctr"/>
+          <a:lstStyle/>
+          <a:p>
+            <a:pPr algn="ctr"/>
+            <a:r>
+              <a:rPr lang="ko-KR" altLang="en-US" sz="1200" dirty="0" smtClean="0"/>
+              <a:t>직접</a:t>
+            </a:r>
+            <a:endParaRPr lang="ko-KR" altLang="en-US" sz="1200" dirty="0"/>
+          </a:p>
+        </p:txBody>
+      </p:sp>
+      <p:sp>
+        <p:nvSpPr>
+          <p:cNvPr id="8" name="직사각형 7"/>
+          <p:cNvSpPr/>
+          <p:nvPr/>
+        </p:nvSpPr>
+        <p:spPr>
+          <a:xfrm>
+            <a:off x="395536" y="6100312"/>
+            <a:ext cx="648072" cy="288032"/>
+          </a:xfrm>
+          <a:prstGeom prst="rect">
+            <a:avLst/>
+          </a:prstGeom>
+        </p:spPr>
+        <p:style>
+          <a:lnRef idx="2">
+            <a:schemeClr val="accent1">
+              <a:shade val="50000"/>
+            </a:schemeClr>
+          </a:lnRef>
+          <a:fillRef idx="1">
+            <a:schemeClr val="accent1"/>
+          </a:fillRef>
+          <a:effectRef idx="0">
+            <a:schemeClr val="accent1"/>
+          </a:effectRef>
+          <a:fontRef idx="minor">
+            <a:schemeClr val="lt1"/>
+          </a:fontRef>
+        </p:style>
+        <p:txBody>
+          <a:bodyPr rtlCol="0" anchor="ctr"/>
+          <a:lstStyle/>
+          <a:p>
+            <a:pPr algn="ctr"/>
+            <a:r>
+              <a:rPr lang="ko-KR" altLang="en-US" sz="1200" dirty="0" smtClean="0"/>
+              <a:t>대리</a:t>
+            </a:r>
+            <a:endParaRPr lang="ko-KR" altLang="en-US" sz="1200" dirty="0"/>
+          </a:p>
+        </p:txBody>
+      </p:sp>
+      <p:sp>
+        <p:nvSpPr>
+          <p:cNvPr id="9" name="직사각형 8"/>
+          <p:cNvSpPr/>
+          <p:nvPr/>
+        </p:nvSpPr>
+        <p:spPr>
+          <a:xfrm>
+            <a:off x="6732240" y="2780928"/>
+            <a:ext cx="936104" cy="576064"/>
+          </a:xfrm>
+          <a:prstGeom prst="rect">
+            <a:avLst/>
+          </a:prstGeom>
+        </p:spPr>
+        <p:style>
+          <a:lnRef idx="2">
+            <a:schemeClr val="accent1">
+              <a:shade val="50000"/>
+            </a:schemeClr>
+          </a:lnRef>
+          <a:fillRef idx="1">
+            <a:schemeClr val="accent1"/>
+          </a:fillRef>
+          <a:effectRef idx="0">
+            <a:schemeClr val="accent1"/>
+          </a:effectRef>
+          <a:fontRef idx="minor">
+            <a:schemeClr val="lt1"/>
+          </a:fontRef>
+        </p:style>
+        <p:txBody>
+          <a:bodyPr rtlCol="0" anchor="ctr"/>
+          <a:lstStyle/>
+          <a:p>
+            <a:pPr algn="ctr"/>
+            <a:r>
+              <a:rPr lang="ko-KR" altLang="en-US" sz="1200" dirty="0" err="1" smtClean="0"/>
+              <a:t>구독시작</a:t>
+            </a:r>
+            <a:r>
+              <a:rPr lang="en-US" altLang="ko-KR" sz="1200" dirty="0" smtClean="0"/>
+              <a:t>(</a:t>
+            </a:r>
+            <a:r>
+              <a:rPr lang="ko-KR" altLang="en-US" sz="1200" dirty="0" smtClean="0"/>
+              <a:t>카드결제</a:t>
+            </a:r>
+            <a:r>
+              <a:rPr lang="en-US" altLang="ko-KR" sz="1200" dirty="0" smtClean="0"/>
+              <a:t>)</a:t>
+            </a:r>
+            <a:endParaRPr lang="ko-KR" altLang="en-US" sz="1200" dirty="0"/>
+          </a:p>
+        </p:txBody>
+      </p:sp>
+      <p:sp>
+        <p:nvSpPr>
+          <p:cNvPr id="10" name="직사각형 9"/>
+          <p:cNvSpPr/>
+          <p:nvPr/>
+        </p:nvSpPr>
+        <p:spPr>
+          <a:xfrm>
+            <a:off x="5508104" y="3429000"/>
+            <a:ext cx="1008112" cy="435988"/>
+          </a:xfrm>
+          <a:prstGeom prst="rect">
+            <a:avLst/>
+          </a:prstGeom>
+        </p:spPr>
+        <p:style>
+          <a:lnRef idx="2">
+            <a:schemeClr val="accent1">
+              <a:shade val="50000"/>
+            </a:schemeClr>
+          </a:lnRef>
+          <a:fillRef idx="1">
+            <a:schemeClr val="accent1"/>
+          </a:fillRef>
+          <a:effectRef idx="0">
+            <a:schemeClr val="accent1"/>
+          </a:effectRef>
+          <a:fontRef idx="minor">
+            <a:schemeClr val="lt1"/>
+          </a:fontRef>
+        </p:style>
+        <p:txBody>
+          <a:bodyPr rtlCol="0" anchor="ctr"/>
+          <a:lstStyle/>
+          <a:p>
+            <a:pPr algn="ctr"/>
+            <a:r>
+              <a:rPr lang="ko-KR" altLang="en-US" sz="1200" dirty="0" smtClean="0"/>
+              <a:t>계좌이체</a:t>
+            </a:r>
+            <a:endParaRPr lang="en-US" altLang="ko-KR" sz="1200" dirty="0" smtClean="0"/>
+          </a:p>
+          <a:p>
+            <a:pPr algn="ctr"/>
+            <a:r>
+              <a:rPr lang="ko-KR" altLang="en-US" sz="1200" dirty="0" err="1" smtClean="0"/>
+              <a:t>알림톡</a:t>
+            </a:r>
+            <a:endParaRPr lang="ko-KR" altLang="en-US" sz="1200" dirty="0"/>
+          </a:p>
+        </p:txBody>
+      </p:sp>
+      <p:sp>
+        <p:nvSpPr>
+          <p:cNvPr id="11" name="직사각형 10"/>
+          <p:cNvSpPr/>
+          <p:nvPr/>
+        </p:nvSpPr>
+        <p:spPr>
+          <a:xfrm>
+            <a:off x="6732240" y="3419412"/>
+            <a:ext cx="936104" cy="435988"/>
+          </a:xfrm>
+          <a:prstGeom prst="rect">
+            <a:avLst/>
+          </a:prstGeom>
+        </p:spPr>
+        <p:style>
+          <a:lnRef idx="2">
+            <a:schemeClr val="accent1">
+              <a:shade val="50000"/>
+            </a:schemeClr>
+          </a:lnRef>
+          <a:fillRef idx="1">
+            <a:schemeClr val="accent1"/>
+          </a:fillRef>
+          <a:effectRef idx="0">
+            <a:schemeClr val="accent1"/>
+          </a:effectRef>
+          <a:fontRef idx="minor">
+            <a:schemeClr val="lt1"/>
+          </a:fontRef>
+        </p:style>
+        <p:txBody>
+          <a:bodyPr rtlCol="0" anchor="ctr"/>
+          <a:lstStyle/>
+          <a:p>
+            <a:pPr algn="ctr"/>
+            <a:r>
+              <a:rPr lang="ko-KR" altLang="en-US" sz="1100" dirty="0" smtClean="0"/>
+              <a:t>고객</a:t>
+            </a:r>
+            <a:r>
+              <a:rPr lang="en-US" altLang="ko-KR" sz="1100" dirty="0" smtClean="0"/>
+              <a:t>:</a:t>
+            </a:r>
+            <a:r>
+              <a:rPr lang="ko-KR" altLang="en-US" sz="1100" dirty="0" smtClean="0"/>
+              <a:t>계좌이체</a:t>
+            </a:r>
+            <a:endParaRPr lang="ko-KR" altLang="en-US" sz="1100" dirty="0"/>
+          </a:p>
+        </p:txBody>
+      </p:sp>
+      <p:sp>
+        <p:nvSpPr>
+          <p:cNvPr id="12" name="직사각형 11"/>
+          <p:cNvSpPr/>
+          <p:nvPr/>
+        </p:nvSpPr>
+        <p:spPr>
+          <a:xfrm>
+            <a:off x="8028384" y="4388230"/>
+            <a:ext cx="864096" cy="733018"/>
+          </a:xfrm>
+          <a:prstGeom prst="rect">
+            <a:avLst/>
+          </a:prstGeom>
+        </p:spPr>
+        <p:style>
+          <a:lnRef idx="2">
+            <a:schemeClr val="accent1">
+              <a:shade val="50000"/>
+            </a:schemeClr>
+          </a:lnRef>
+          <a:fillRef idx="1">
+            <a:schemeClr val="accent1"/>
+          </a:fillRef>
+          <a:effectRef idx="0">
+            <a:schemeClr val="accent1"/>
+          </a:effectRef>
+          <a:fontRef idx="minor">
+            <a:schemeClr val="lt1"/>
+          </a:fontRef>
+        </p:style>
+        <p:txBody>
+          <a:bodyPr rtlCol="0" anchor="ctr"/>
+          <a:lstStyle/>
+          <a:p>
+            <a:pPr algn="ctr"/>
+            <a:r>
+              <a:rPr lang="ko-KR" altLang="en-US" sz="1100" dirty="0" err="1" smtClean="0"/>
+              <a:t>계좌이체함</a:t>
+            </a:r>
+            <a:r>
+              <a:rPr lang="en-US" altLang="ko-KR" sz="1100" dirty="0" smtClean="0"/>
+              <a:t>/</a:t>
+            </a:r>
+            <a:r>
+              <a:rPr lang="ko-KR" altLang="en-US" sz="1100" dirty="0" err="1" smtClean="0"/>
+              <a:t>카드구독</a:t>
+            </a:r>
+            <a:endParaRPr lang="ko-KR" altLang="en-US" sz="1100" dirty="0"/>
+          </a:p>
+        </p:txBody>
+      </p:sp>
+      <p:sp>
+        <p:nvSpPr>
+          <p:cNvPr id="13" name="직사각형 12"/>
+          <p:cNvSpPr/>
+          <p:nvPr/>
+        </p:nvSpPr>
+        <p:spPr>
+          <a:xfrm>
+            <a:off x="6884640" y="5474930"/>
+            <a:ext cx="864096" cy="648072"/>
+          </a:xfrm>
+          <a:prstGeom prst="rect">
+            <a:avLst/>
+          </a:prstGeom>
+        </p:spPr>
+        <p:style>
+          <a:lnRef idx="2">
+            <a:schemeClr val="accent1">
+              <a:shade val="50000"/>
+            </a:schemeClr>
+          </a:lnRef>
+          <a:fillRef idx="1">
+            <a:schemeClr val="accent1"/>
+          </a:fillRef>
+          <a:effectRef idx="0">
+            <a:schemeClr val="accent1"/>
+          </a:effectRef>
+          <a:fontRef idx="minor">
+            <a:schemeClr val="lt1"/>
+          </a:fontRef>
+        </p:style>
+        <p:txBody>
+          <a:bodyPr rtlCol="0" anchor="ctr"/>
+          <a:lstStyle/>
+          <a:p>
+            <a:pPr algn="ctr"/>
+            <a:r>
+              <a:rPr lang="ko-KR" altLang="en-US" sz="1050" dirty="0" err="1" smtClean="0"/>
+              <a:t>사이트정지</a:t>
+            </a:r>
+            <a:endParaRPr lang="ko-KR" altLang="en-US" sz="1050" dirty="0"/>
+          </a:p>
+        </p:txBody>
+      </p:sp>
+      <p:sp>
+        <p:nvSpPr>
+          <p:cNvPr id="15" name="직사각형 14"/>
+          <p:cNvSpPr/>
+          <p:nvPr/>
+        </p:nvSpPr>
+        <p:spPr>
+          <a:xfrm>
+            <a:off x="6884640" y="4373488"/>
+            <a:ext cx="864096" cy="733018"/>
+          </a:xfrm>
+          <a:prstGeom prst="rect">
+            <a:avLst/>
+          </a:prstGeom>
+        </p:spPr>
+        <p:style>
+          <a:lnRef idx="2">
+            <a:schemeClr val="accent1">
+              <a:shade val="50000"/>
+            </a:schemeClr>
+          </a:lnRef>
+          <a:fillRef idx="1">
+            <a:schemeClr val="accent1"/>
+          </a:fillRef>
+          <a:effectRef idx="0">
+            <a:schemeClr val="accent1"/>
+          </a:effectRef>
+          <a:fontRef idx="minor">
+            <a:schemeClr val="lt1"/>
+          </a:fontRef>
+        </p:style>
+        <p:txBody>
+          <a:bodyPr rtlCol="0" anchor="ctr"/>
+          <a:lstStyle/>
+          <a:p>
+            <a:pPr algn="ctr"/>
+            <a:r>
+              <a:rPr lang="ko-KR" altLang="en-US" sz="1100" dirty="0" smtClean="0"/>
+              <a:t>계좌이체안함</a:t>
+            </a:r>
+            <a:endParaRPr lang="ko-KR" altLang="en-US" sz="1100" dirty="0"/>
+          </a:p>
+        </p:txBody>
+      </p:sp>
     </p:spTree>
     <p:extLst>
       <p:ext uri="{BB962C8B-B14F-4D97-AF65-F5344CB8AC3E}">
@@ -6901,8 +7121,8 @@
         </p:nvSpPr>
         <p:spPr>
           <a:xfrm>
-            <a:off x="3059832" y="2996952"/>
-            <a:ext cx="2736304" cy="864096"/>
+            <a:off x="971600" y="1844824"/>
+            <a:ext cx="2592288" cy="1584176"/>
           </a:xfrm>
           <a:prstGeom prst="rect">
             <a:avLst/>
@@ -6910,15 +7130,15 @@
         </p:spPr>
         <p:style>
           <a:lnRef idx="2">
-            <a:schemeClr val="accent6">
+            <a:schemeClr val="accent1">
               <a:shade val="50000"/>
             </a:schemeClr>
           </a:lnRef>
           <a:fillRef idx="1">
-            <a:schemeClr val="accent6"/>
+            <a:schemeClr val="accent1"/>
           </a:fillRef>
           <a:effectRef idx="0">
-            <a:schemeClr val="accent6"/>
+            <a:schemeClr val="accent1"/>
           </a:effectRef>
           <a:fontRef idx="minor">
             <a:schemeClr val="lt1"/>
@@ -6930,8 +7150,176 @@
           <a:p>
             <a:pPr algn="ctr"/>
             <a:r>
+              <a:rPr lang="en-US" altLang="ko-KR" dirty="0" smtClean="0"/>
+              <a:t>chat GPT</a:t>
+            </a:r>
+          </a:p>
+          <a:p>
+            <a:pPr algn="ctr"/>
+            <a:r>
               <a:rPr lang="ko-KR" altLang="en-US" dirty="0" smtClean="0"/>
-              <a:t>고객접근사이트</a:t>
+              <a:t>기획</a:t>
+            </a:r>
+            <a:r>
+              <a:rPr lang="en-US" altLang="ko-KR" dirty="0" smtClean="0"/>
+              <a:t>/</a:t>
+            </a:r>
+            <a:r>
+              <a:rPr lang="ko-KR" altLang="en-US" dirty="0" smtClean="0"/>
+              <a:t>분석</a:t>
+            </a:r>
+            <a:r>
+              <a:rPr lang="en-US" altLang="ko-KR" dirty="0" smtClean="0"/>
+              <a:t>/</a:t>
+            </a:r>
+            <a:r>
+              <a:rPr lang="ko-KR" altLang="en-US" dirty="0" smtClean="0"/>
+              <a:t>개발</a:t>
+            </a:r>
+            <a:r>
+              <a:rPr lang="en-US" altLang="ko-KR" dirty="0" smtClean="0"/>
+              <a:t>prompt </a:t>
+            </a:r>
+            <a:endParaRPr lang="ko-KR" altLang="en-US" dirty="0"/>
+          </a:p>
+        </p:txBody>
+      </p:sp>
+      <p:sp>
+        <p:nvSpPr>
+          <p:cNvPr id="3" name="직사각형 2"/>
+          <p:cNvSpPr/>
+          <p:nvPr/>
+        </p:nvSpPr>
+        <p:spPr>
+          <a:xfrm>
+            <a:off x="971600" y="4941168"/>
+            <a:ext cx="2592288" cy="1584176"/>
+          </a:xfrm>
+          <a:prstGeom prst="rect">
+            <a:avLst/>
+          </a:prstGeom>
+        </p:spPr>
+        <p:style>
+          <a:lnRef idx="2">
+            <a:schemeClr val="accent1">
+              <a:shade val="50000"/>
+            </a:schemeClr>
+          </a:lnRef>
+          <a:fillRef idx="1">
+            <a:schemeClr val="accent1"/>
+          </a:fillRef>
+          <a:effectRef idx="0">
+            <a:schemeClr val="accent1"/>
+          </a:effectRef>
+          <a:fontRef idx="minor">
+            <a:schemeClr val="lt1"/>
+          </a:fontRef>
+        </p:style>
+        <p:txBody>
+          <a:bodyPr rtlCol="0" anchor="ctr"/>
+          <a:lstStyle/>
+          <a:p>
+            <a:pPr algn="ctr"/>
+            <a:r>
+              <a:rPr lang="en-US" altLang="ko-KR" dirty="0" smtClean="0"/>
+              <a:t>Cursor</a:t>
+            </a:r>
+          </a:p>
+          <a:p>
+            <a:pPr algn="ctr"/>
+            <a:r>
+              <a:rPr lang="ko-KR" altLang="en-US" dirty="0" smtClean="0"/>
+              <a:t>개발</a:t>
+            </a:r>
+            <a:endParaRPr lang="en-US" altLang="ko-KR" dirty="0" smtClean="0"/>
+          </a:p>
+        </p:txBody>
+      </p:sp>
+      <p:sp>
+        <p:nvSpPr>
+          <p:cNvPr id="4" name="TextBox 3"/>
+          <p:cNvSpPr txBox="1"/>
+          <p:nvPr/>
+        </p:nvSpPr>
+        <p:spPr>
+          <a:xfrm>
+            <a:off x="179512" y="332656"/>
+            <a:ext cx="2880320" cy="369332"/>
+          </a:xfrm>
+          <a:prstGeom prst="rect">
+            <a:avLst/>
+          </a:prstGeom>
+          <a:noFill/>
+        </p:spPr>
+        <p:txBody>
+          <a:bodyPr wrap="square" rtlCol="0">
+            <a:spAutoFit/>
+          </a:bodyPr>
+          <a:lstStyle/>
+          <a:p>
+            <a:r>
+              <a:rPr lang="ko-KR" altLang="en-US" dirty="0" smtClean="0"/>
+              <a:t>개발방법</a:t>
+            </a:r>
+            <a:endParaRPr lang="ko-KR" altLang="en-US" dirty="0"/>
+          </a:p>
+        </p:txBody>
+      </p:sp>
+      <p:sp>
+        <p:nvSpPr>
+          <p:cNvPr id="6" name="TextBox 5"/>
+          <p:cNvSpPr txBox="1"/>
+          <p:nvPr/>
+        </p:nvSpPr>
+        <p:spPr>
+          <a:xfrm>
+            <a:off x="971600" y="4509120"/>
+            <a:ext cx="2088232" cy="369332"/>
+          </a:xfrm>
+          <a:prstGeom prst="rect">
+            <a:avLst/>
+          </a:prstGeom>
+          <a:noFill/>
+        </p:spPr>
+        <p:txBody>
+          <a:bodyPr wrap="square" rtlCol="0">
+            <a:spAutoFit/>
+          </a:bodyPr>
+          <a:lstStyle/>
+          <a:p>
+            <a:r>
+              <a:rPr lang="en-US" altLang="ko-KR" dirty="0" err="1" smtClean="0"/>
+              <a:t>aidesctop</a:t>
+            </a:r>
+            <a:endParaRPr lang="ko-KR" altLang="en-US" dirty="0"/>
+          </a:p>
+        </p:txBody>
+      </p:sp>
+      <p:sp>
+        <p:nvSpPr>
+          <p:cNvPr id="7" name="TextBox 6"/>
+          <p:cNvSpPr txBox="1"/>
+          <p:nvPr/>
+        </p:nvSpPr>
+        <p:spPr>
+          <a:xfrm>
+            <a:off x="971600" y="1475492"/>
+            <a:ext cx="2088232" cy="369332"/>
+          </a:xfrm>
+          <a:prstGeom prst="rect">
+            <a:avLst/>
+          </a:prstGeom>
+          <a:noFill/>
+        </p:spPr>
+        <p:txBody>
+          <a:bodyPr wrap="square" rtlCol="0">
+            <a:spAutoFit/>
+          </a:bodyPr>
+          <a:lstStyle/>
+          <a:p>
+            <a:r>
+              <a:rPr lang="en-US" altLang="ko-KR" dirty="0" smtClean="0"/>
+              <a:t>gram</a:t>
             </a:r>
             <a:endParaRPr lang="ko-KR" altLang="en-US" dirty="0"/>
           </a:p>
@@ -6940,7 +7328,7 @@
     </p:spTree>
     <p:extLst>
       <p:ext uri="{BB962C8B-B14F-4D97-AF65-F5344CB8AC3E}">
-        <p14:creationId xmlns:p14="http://schemas.microsoft.com/office/powerpoint/2010/main" val="4092258523"/>
+        <p14:creationId xmlns:p14="http://schemas.microsoft.com/office/powerpoint/2010/main" val="2951588667"/>
       </p:ext>
     </p:extLst>
   </p:cSld>
@@ -6969,19 +7357,24 @@
       </p:grpSpPr>
       <p:sp>
         <p:nvSpPr>
-          <p:cNvPr id="2" name="TextBox 1"/>
+          <p:cNvPr id="5" name="TextBox 4"/>
           <p:cNvSpPr txBox="1"/>
           <p:nvPr/>
         </p:nvSpPr>
         <p:spPr>
           <a:xfrm>
-            <a:off x="323528" y="476672"/>
-            <a:ext cx="3240360" cy="1015663"/>
+            <a:off x="4427984" y="476672"/>
+            <a:ext cx="3096344" cy="4801314"/>
           </a:xfrm>
           <a:prstGeom prst="rect">
             <a:avLst/>
           </a:prstGeom>
           <a:noFill/>
+          <a:ln>
+            <a:solidFill>
+              <a:schemeClr val="tx1"/>
+            </a:solidFill>
+          </a:ln>
         </p:spPr>
         <p:txBody>
           <a:bodyPr wrap="square" rtlCol="0">
@@ -6990,120 +7383,71 @@
           <a:lstStyle/>
           <a:p>
             <a:r>
-              <a:rPr lang="ko-KR" altLang="en-US" sz="1200" dirty="0"/>
-              <a:t>계정 </a:t>
-            </a:r>
-            <a:r>
-              <a:rPr lang="ko-KR" altLang="en-US" sz="1200" dirty="0" smtClean="0"/>
-              <a:t> </a:t>
-            </a:r>
-            <a:endParaRPr lang="en-US" altLang="ko-KR" sz="1200" dirty="0" smtClean="0"/>
-          </a:p>
-          <a:p>
-            <a:r>
-              <a:rPr lang="ko-KR" altLang="en-US" sz="1200" dirty="0" smtClean="0"/>
-              <a:t>테스트</a:t>
-            </a:r>
-            <a:r>
-              <a:rPr lang="en-US" altLang="ko-KR" sz="1200" dirty="0" smtClean="0"/>
-              <a:t>2 : </a:t>
-            </a:r>
-            <a:r>
-              <a:rPr lang="en-US" altLang="ko-KR" sz="1200" dirty="0" smtClean="0">
-                <a:hlinkClick r:id="rId2"/>
-              </a:rPr>
-              <a:t>test2@test.com</a:t>
-            </a:r>
-            <a:r>
-              <a:rPr lang="en-US" altLang="ko-KR" sz="1200" dirty="0" smtClean="0"/>
-              <a:t> , test123</a:t>
-            </a:r>
-          </a:p>
-          <a:p>
-            <a:r>
               <a:rPr lang="ko-KR" altLang="en-US" dirty="0" smtClean="0"/>
-              <a:t>테스트</a:t>
-            </a:r>
-            <a:r>
-              <a:rPr lang="en-US" altLang="ko-KR" dirty="0" smtClean="0"/>
-              <a:t>1 : </a:t>
-            </a:r>
-            <a:r>
-              <a:rPr lang="en-US" altLang="ko-KR" dirty="0" smtClean="0">
-                <a:hlinkClick r:id="rId3"/>
-              </a:rPr>
-              <a:t>test@test.com</a:t>
-            </a:r>
-            <a:r>
-              <a:rPr lang="en-US" altLang="ko-KR" dirty="0" smtClean="0"/>
-              <a:t>,test123</a:t>
-            </a:r>
-            <a:endParaRPr lang="ko-KR" altLang="en-US" sz="1200" dirty="0"/>
-          </a:p>
-        </p:txBody>
-      </p:sp>
-      <p:sp>
-        <p:nvSpPr>
-          <p:cNvPr id="3" name="직사각형 2"/>
+              <a:t>고객</a:t>
+            </a:r>
+            <a:endParaRPr lang="en-US" altLang="ko-KR" dirty="0" smtClean="0"/>
+          </a:p>
+          <a:p>
+            <a:endParaRPr lang="en-US" altLang="ko-KR" dirty="0"/>
+          </a:p>
+          <a:p>
+            <a:endParaRPr lang="en-US" altLang="ko-KR" dirty="0" smtClean="0"/>
+          </a:p>
+          <a:p>
+            <a:endParaRPr lang="en-US" altLang="ko-KR" dirty="0"/>
+          </a:p>
+          <a:p>
+            <a:endParaRPr lang="en-US" altLang="ko-KR" dirty="0" smtClean="0"/>
+          </a:p>
+          <a:p>
+            <a:endParaRPr lang="en-US" altLang="ko-KR" dirty="0"/>
+          </a:p>
+          <a:p>
+            <a:endParaRPr lang="en-US" altLang="ko-KR" dirty="0" smtClean="0"/>
+          </a:p>
+          <a:p>
+            <a:endParaRPr lang="en-US" altLang="ko-KR" dirty="0"/>
+          </a:p>
+          <a:p>
+            <a:endParaRPr lang="en-US" altLang="ko-KR" dirty="0" smtClean="0"/>
+          </a:p>
+          <a:p>
+            <a:endParaRPr lang="en-US" altLang="ko-KR" dirty="0"/>
+          </a:p>
+          <a:p>
+            <a:endParaRPr lang="en-US" altLang="ko-KR" dirty="0" smtClean="0"/>
+          </a:p>
+          <a:p>
+            <a:endParaRPr lang="en-US" altLang="ko-KR" dirty="0"/>
+          </a:p>
+          <a:p>
+            <a:endParaRPr lang="en-US" altLang="ko-KR" dirty="0" smtClean="0"/>
+          </a:p>
+          <a:p>
+            <a:endParaRPr lang="en-US" altLang="ko-KR" dirty="0"/>
+          </a:p>
+          <a:p>
+            <a:endParaRPr lang="en-US" altLang="ko-KR" dirty="0" smtClean="0"/>
+          </a:p>
+          <a:p>
+            <a:endParaRPr lang="en-US" altLang="ko-KR" dirty="0"/>
+          </a:p>
+          <a:p>
+            <a:endParaRPr lang="ko-KR" altLang="en-US" dirty="0"/>
+          </a:p>
+        </p:txBody>
+      </p:sp>
+      <p:sp>
+        <p:nvSpPr>
+          <p:cNvPr id="2" name="직사각형 1"/>
           <p:cNvSpPr/>
           <p:nvPr/>
         </p:nvSpPr>
         <p:spPr>
           <a:xfrm>
-            <a:off x="481828" y="2174963"/>
-            <a:ext cx="2089033" cy="246221"/>
-          </a:xfrm>
-          <a:prstGeom prst="rect">
-            <a:avLst/>
-          </a:prstGeom>
-        </p:spPr>
-        <p:txBody>
-          <a:bodyPr wrap="none">
-            <a:spAutoFit/>
-          </a:bodyPr>
-          <a:lstStyle/>
-          <a:p>
-            <a:r>
-              <a:rPr lang="ko-KR" altLang="en-US" sz="1000" dirty="0"/>
-              <a:t>http://spboxwin.iptime.org:3000/</a:t>
-            </a:r>
-          </a:p>
-        </p:txBody>
-      </p:sp>
-      <p:pic>
-        <p:nvPicPr>
-          <p:cNvPr id="4" name="그림 3"/>
-          <p:cNvPicPr>
-            <a:picLocks noChangeAspect="1"/>
-          </p:cNvPicPr>
-          <p:nvPr/>
-        </p:nvPicPr>
-        <p:blipFill>
-          <a:blip r:embed="rId4"/>
-          <a:stretch>
-            <a:fillRect/>
-          </a:stretch>
-        </p:blipFill>
-        <p:spPr>
-          <a:xfrm>
-            <a:off x="337812" y="2420888"/>
-            <a:ext cx="2693147" cy="1296144"/>
-          </a:xfrm>
-          <a:prstGeom prst="rect">
-            <a:avLst/>
-          </a:prstGeom>
-        </p:spPr>
-      </p:pic>
-      <p:sp>
-        <p:nvSpPr>
-          <p:cNvPr id="5" name="직사각형 4"/>
-          <p:cNvSpPr/>
-          <p:nvPr/>
-        </p:nvSpPr>
-        <p:spPr>
-          <a:xfrm>
-            <a:off x="481828" y="3921377"/>
-            <a:ext cx="1296144" cy="576064"/>
+            <a:off x="539552" y="1421642"/>
+            <a:ext cx="1800200" cy="1008112"/>
           </a:xfrm>
           <a:prstGeom prst="rect">
             <a:avLst/>
@@ -7131,8 +7475,16 @@
           <a:p>
             <a:pPr algn="ctr"/>
             <a:r>
+              <a:rPr lang="en-US" altLang="ko-KR" dirty="0" err="1" smtClean="0"/>
+              <a:t>Aifront</a:t>
+            </a:r>
+            <a:endParaRPr lang="en-US" altLang="ko-KR" dirty="0" smtClean="0"/>
+          </a:p>
+          <a:p>
+            <a:pPr algn="ctr"/>
+            <a:r>
               <a:rPr lang="ko-KR" altLang="en-US" dirty="0" smtClean="0"/>
-              <a:t>가입</a:t>
+              <a:t>플랫폼</a:t>
             </a:r>
             <a:endParaRPr lang="ko-KR" altLang="en-US" dirty="0"/>
           </a:p>
@@ -7140,14 +7492,14 @@
       </p:sp>
       <p:sp>
         <p:nvSpPr>
-          <p:cNvPr id="6" name="직사각형 5"/>
+          <p:cNvPr id="3" name="직사각형 2"/>
           <p:cNvSpPr/>
           <p:nvPr/>
         </p:nvSpPr>
         <p:spPr>
           <a:xfrm>
-            <a:off x="1921987" y="3962957"/>
-            <a:ext cx="1108971" cy="534484"/>
+            <a:off x="4836062" y="1340768"/>
+            <a:ext cx="1872208" cy="1080120"/>
           </a:xfrm>
           <a:prstGeom prst="rect">
             <a:avLst/>
@@ -7175,8 +7527,28 @@
           <a:p>
             <a:pPr algn="ctr"/>
             <a:r>
+              <a:rPr lang="en-US" altLang="ko-KR" dirty="0" smtClean="0"/>
+              <a:t>K</a:t>
+            </a:r>
+            <a:r>
               <a:rPr lang="ko-KR" altLang="en-US" dirty="0" err="1" smtClean="0"/>
-              <a:t>셀프제작</a:t>
+              <a:t>직구쇼핑몰</a:t>
+            </a:r>
+            <a:endParaRPr lang="en-US" altLang="ko-KR" dirty="0" smtClean="0"/>
+          </a:p>
+          <a:p>
+            <a:pPr algn="ctr"/>
+            <a:r>
+              <a:rPr lang="en-US" altLang="ko-KR" dirty="0" smtClean="0"/>
+              <a:t>(</a:t>
+            </a:r>
+            <a:r>
+              <a:rPr lang="ko-KR" altLang="en-US" dirty="0" smtClean="0"/>
+              <a:t>말레이시아</a:t>
+            </a:r>
+            <a:r>
+              <a:rPr lang="en-US" altLang="ko-KR" dirty="0" smtClean="0"/>
+              <a:t>)</a:t>
             </a:r>
             <a:endParaRPr lang="ko-KR" altLang="en-US" dirty="0"/>
           </a:p>
@@ -7184,14 +7556,14 @@
       </p:sp>
       <p:sp>
         <p:nvSpPr>
-          <p:cNvPr id="7" name="직사각형 6"/>
+          <p:cNvPr id="4" name="직사각형 3"/>
           <p:cNvSpPr/>
           <p:nvPr/>
         </p:nvSpPr>
         <p:spPr>
           <a:xfrm>
-            <a:off x="3290140" y="3921377"/>
-            <a:ext cx="864096" cy="576064"/>
+            <a:off x="4860032" y="3068960"/>
+            <a:ext cx="1872208" cy="1080120"/>
           </a:xfrm>
           <a:prstGeom prst="rect">
             <a:avLst/>
@@ -7220,7 +7592,7 @@
             <a:pPr algn="ctr"/>
             <a:r>
               <a:rPr lang="ko-KR" altLang="en-US" dirty="0" smtClean="0"/>
-              <a:t>배포</a:t>
+              <a:t>자영업사이트</a:t>
             </a:r>
             <a:endParaRPr lang="ko-KR" altLang="en-US" dirty="0"/>
           </a:p>
@@ -7228,14 +7600,117 @@
       </p:sp>
       <p:sp>
         <p:nvSpPr>
-          <p:cNvPr id="8" name="직사각형 7"/>
+          <p:cNvPr id="6" name="TextBox 5"/>
+          <p:cNvSpPr txBox="1"/>
+          <p:nvPr/>
+        </p:nvSpPr>
+        <p:spPr>
+          <a:xfrm>
+            <a:off x="467544" y="332656"/>
+            <a:ext cx="2016224" cy="369332"/>
+          </a:xfrm>
+          <a:prstGeom prst="rect">
+            <a:avLst/>
+          </a:prstGeom>
+          <a:noFill/>
+        </p:spPr>
+        <p:txBody>
+          <a:bodyPr wrap="square" rtlCol="0">
+            <a:spAutoFit/>
+          </a:bodyPr>
+          <a:lstStyle/>
+          <a:p>
+            <a:r>
+              <a:rPr lang="ko-KR" altLang="en-US" dirty="0" smtClean="0"/>
+              <a:t>비즈니스 구성도</a:t>
+            </a:r>
+            <a:endParaRPr lang="ko-KR" altLang="en-US" dirty="0"/>
+          </a:p>
+        </p:txBody>
+      </p:sp>
+    </p:spTree>
+    <p:extLst>
+      <p:ext uri="{BB962C8B-B14F-4D97-AF65-F5344CB8AC3E}">
+        <p14:creationId xmlns:p14="http://schemas.microsoft.com/office/powerpoint/2010/main" val="486792675"/>
+      </p:ext>
+    </p:extLst>
+  </p:cSld>
+  <p:clrMapOvr>
+    <a:masterClrMapping/>
+  </p:clrMapOvr>
+</p:sld>
+</file>
+
+<file path=ppt/slides/slide32.xml><?xml version="1.0" encoding="utf-8"?>
+<p:sld xmlns:a="http://schemas.openxmlformats.org/drawingml/2006/main" xmlns:r="http://schemas.openxmlformats.org/officeDocument/2006/relationships" xmlns:p="http://schemas.openxmlformats.org/presentationml/2006/main">
+  <p:cSld>
+    <p:spTree>
+      <p:nvGrpSpPr>
+        <p:cNvPr id="1" name=""/>
+        <p:cNvGrpSpPr/>
+        <p:nvPr/>
+      </p:nvGrpSpPr>
+      <p:grpSpPr>
+        <a:xfrm>
+          <a:off x="0" y="0"/>
+          <a:ext cx="0" cy="0"/>
+          <a:chOff x="0" y="0"/>
+          <a:chExt cx="0" cy="0"/>
+        </a:xfrm>
+      </p:grpSpPr>
+      <p:sp>
+        <p:nvSpPr>
+          <p:cNvPr id="2" name="직사각형 1"/>
           <p:cNvSpPr/>
           <p:nvPr/>
         </p:nvSpPr>
         <p:spPr>
           <a:xfrm>
-            <a:off x="1921988" y="4641457"/>
-            <a:ext cx="1108970" cy="576064"/>
+            <a:off x="323528" y="404664"/>
+            <a:ext cx="6048672" cy="646331"/>
+          </a:xfrm>
+          <a:prstGeom prst="rect">
+            <a:avLst/>
+          </a:prstGeom>
+        </p:spPr>
+        <p:txBody>
+          <a:bodyPr wrap="square">
+            <a:spAutoFit/>
+          </a:bodyPr>
+          <a:lstStyle/>
+          <a:p>
+            <a:r>
+              <a:rPr lang="en-US" altLang="ko-KR" dirty="0" smtClean="0"/>
+              <a:t>// </a:t>
+            </a:r>
+            <a:r>
+              <a:rPr lang="en-US" altLang="ko-KR" dirty="0" err="1" smtClean="0"/>
+              <a:t>aifront</a:t>
+            </a:r>
+            <a:endParaRPr lang="en-US" altLang="ko-KR" dirty="0" smtClean="0"/>
+          </a:p>
+          <a:p>
+            <a:r>
+              <a:rPr lang="ko-KR" altLang="en-US" dirty="0" smtClean="0"/>
+              <a:t>https</a:t>
+            </a:r>
+            <a:r>
+              <a:rPr lang="ko-KR" altLang="en-US" dirty="0"/>
+              <a:t>://github.com/oksusoo1/homepageDev.git</a:t>
+            </a:r>
+          </a:p>
+        </p:txBody>
+      </p:sp>
+      <p:sp>
+        <p:nvSpPr>
+          <p:cNvPr id="3" name="직사각형 2"/>
+          <p:cNvSpPr/>
+          <p:nvPr/>
+        </p:nvSpPr>
+        <p:spPr>
+          <a:xfrm>
+            <a:off x="950020" y="1988840"/>
+            <a:ext cx="1656184" cy="648072"/>
           </a:xfrm>
           <a:prstGeom prst="rect">
             <a:avLst/>
@@ -7264,7 +7739,7 @@
             <a:pPr algn="ctr"/>
             <a:r>
               <a:rPr lang="ko-KR" altLang="en-US" dirty="0" smtClean="0"/>
-              <a:t>본사제작의뢰</a:t>
+              <a:t>고객</a:t>
             </a:r>
             <a:endParaRPr lang="ko-KR" altLang="en-US" dirty="0"/>
           </a:p>
@@ -7272,14 +7747,14 @@
       </p:sp>
       <p:sp>
         <p:nvSpPr>
-          <p:cNvPr id="9" name="직사각형 8"/>
+          <p:cNvPr id="6" name="직사각형 5"/>
           <p:cNvSpPr/>
           <p:nvPr/>
         </p:nvSpPr>
         <p:spPr>
           <a:xfrm>
-            <a:off x="4413418" y="3942167"/>
-            <a:ext cx="864096" cy="576064"/>
+            <a:off x="6588224" y="2060848"/>
+            <a:ext cx="1440160" cy="504056"/>
           </a:xfrm>
           <a:prstGeom prst="rect">
             <a:avLst/>
@@ -7307,35 +7782,420 @@
           <a:p>
             <a:pPr algn="ctr"/>
             <a:r>
-              <a:rPr lang="ko-KR" altLang="en-US" sz="1400" dirty="0" err="1" smtClean="0"/>
-              <a:t>사이트관리</a:t>
-            </a:r>
-            <a:r>
-              <a:rPr lang="en-US" altLang="ko-KR" sz="1400" dirty="0" smtClean="0"/>
+              <a:rPr lang="ko-KR" altLang="en-US" dirty="0" smtClean="0"/>
+              <a:t>플랫폼</a:t>
+            </a:r>
+            <a:endParaRPr lang="ko-KR" altLang="en-US" dirty="0"/>
+          </a:p>
+        </p:txBody>
+      </p:sp>
+      <p:sp>
+        <p:nvSpPr>
+          <p:cNvPr id="16" name="직사각형 15"/>
+          <p:cNvSpPr/>
+          <p:nvPr/>
+        </p:nvSpPr>
+        <p:spPr>
+          <a:xfrm>
+            <a:off x="251520" y="2780928"/>
+            <a:ext cx="3216522" cy="1569660"/>
+          </a:xfrm>
+          <a:prstGeom prst="rect">
+            <a:avLst/>
+          </a:prstGeom>
+        </p:spPr>
+        <p:txBody>
+          <a:bodyPr wrap="none">
+            <a:spAutoFit/>
+          </a:bodyPr>
+          <a:lstStyle/>
+          <a:p>
+            <a:r>
+              <a:rPr lang="en-US" altLang="ko-KR" sz="1200" dirty="0" smtClean="0"/>
+              <a:t>// </a:t>
+            </a:r>
+            <a:r>
+              <a:rPr lang="ko-KR" altLang="en-US" sz="1200" dirty="0" smtClean="0"/>
+              <a:t>포탈</a:t>
+            </a:r>
+            <a:endParaRPr lang="en-US" altLang="ko-KR" sz="1200" dirty="0" smtClean="0"/>
+          </a:p>
+          <a:p>
+            <a:r>
+              <a:rPr lang="ko-KR" altLang="en-US" sz="1200" dirty="0" smtClean="0">
+                <a:hlinkClick r:id="rId2"/>
+              </a:rPr>
+              <a:t>http</a:t>
+            </a:r>
+            <a:r>
+              <a:rPr lang="ko-KR" altLang="en-US" sz="1200" dirty="0">
+                <a:hlinkClick r:id="rId2"/>
+              </a:rPr>
+              <a:t>://spboxwin.iptime.org:3000</a:t>
+            </a:r>
+            <a:r>
+              <a:rPr lang="ko-KR" altLang="en-US" sz="1200" dirty="0" smtClean="0">
+                <a:hlinkClick r:id="rId2"/>
+              </a:rPr>
+              <a:t>/</a:t>
+            </a:r>
+            <a:endParaRPr lang="en-US" altLang="ko-KR" sz="1200" dirty="0" smtClean="0"/>
+          </a:p>
+          <a:p>
+            <a:endParaRPr lang="en-US" altLang="ko-KR" sz="1200" dirty="0"/>
+          </a:p>
+          <a:p>
+            <a:r>
+              <a:rPr lang="en-US" altLang="ko-KR" sz="1200" dirty="0" smtClean="0"/>
+              <a:t>// </a:t>
+            </a:r>
+            <a:r>
+              <a:rPr lang="ko-KR" altLang="en-US" sz="1200" dirty="0" smtClean="0"/>
+              <a:t>고객 사이트 관리 </a:t>
+            </a:r>
+            <a:r>
+              <a:rPr lang="en-US" altLang="ko-KR" sz="1200" dirty="0" smtClean="0"/>
               <a:t>(</a:t>
             </a:r>
             <a:r>
-              <a:rPr lang="ko-KR" altLang="en-US" sz="1400" dirty="0" smtClean="0"/>
+              <a:rPr lang="ko-KR" altLang="en-US" sz="1200" dirty="0" smtClean="0"/>
               <a:t>수정</a:t>
             </a:r>
             <a:r>
-              <a:rPr lang="en-US" altLang="ko-KR" sz="1400" dirty="0" smtClean="0"/>
+              <a:rPr lang="en-US" altLang="ko-KR" sz="1200" dirty="0" smtClean="0"/>
+              <a:t>/</a:t>
+            </a:r>
+            <a:r>
+              <a:rPr lang="ko-KR" altLang="en-US" sz="1200" dirty="0" err="1" smtClean="0"/>
+              <a:t>데이타</a:t>
+            </a:r>
+            <a:r>
+              <a:rPr lang="en-US" altLang="ko-KR" sz="1200" dirty="0" smtClean="0"/>
               <a:t>)</a:t>
             </a:r>
-            <a:endParaRPr lang="ko-KR" altLang="en-US" sz="1400" dirty="0"/>
-          </a:p>
-        </p:txBody>
-      </p:sp>
-      <p:sp>
-        <p:nvSpPr>
-          <p:cNvPr id="10" name="직사각형 9"/>
+          </a:p>
+          <a:p>
+            <a:r>
+              <a:rPr lang="en-US" altLang="ko-KR" sz="1200" dirty="0">
+                <a:hlinkClick r:id="rId3"/>
+              </a:rPr>
+              <a:t>http://</a:t>
+            </a:r>
+            <a:r>
+              <a:rPr lang="en-US" altLang="ko-KR" sz="1200" dirty="0" smtClean="0">
+                <a:hlinkClick r:id="rId3"/>
+              </a:rPr>
+              <a:t>spboxwin.iptime.org:3000/my/magok</a:t>
+            </a:r>
+            <a:endParaRPr lang="en-US" altLang="ko-KR" sz="1200" dirty="0" smtClean="0"/>
+          </a:p>
+          <a:p>
+            <a:endParaRPr lang="en-US" altLang="ko-KR" sz="1200" dirty="0" smtClean="0"/>
+          </a:p>
+          <a:p>
+            <a:r>
+              <a:rPr lang="en-US" altLang="ko-KR" sz="1200" dirty="0" smtClean="0"/>
+              <a:t>// </a:t>
+            </a:r>
+            <a:endParaRPr lang="en-US" altLang="ko-KR" sz="1200" dirty="0"/>
+          </a:p>
+          <a:p>
+            <a:endParaRPr lang="ko-KR" altLang="en-US" sz="1200" dirty="0"/>
+          </a:p>
+        </p:txBody>
+      </p:sp>
+      <p:sp>
+        <p:nvSpPr>
+          <p:cNvPr id="17" name="직사각형 16"/>
           <p:cNvSpPr/>
           <p:nvPr/>
         </p:nvSpPr>
         <p:spPr>
           <a:xfrm>
-            <a:off x="4431543" y="4713465"/>
-            <a:ext cx="864096" cy="576064"/>
+            <a:off x="5940152" y="2564904"/>
+            <a:ext cx="3060710" cy="646331"/>
+          </a:xfrm>
+          <a:prstGeom prst="rect">
+            <a:avLst/>
+          </a:prstGeom>
+        </p:spPr>
+        <p:txBody>
+          <a:bodyPr wrap="none">
+            <a:spAutoFit/>
+          </a:bodyPr>
+          <a:lstStyle/>
+          <a:p>
+            <a:r>
+              <a:rPr lang="en-US" altLang="ko-KR" sz="1200" dirty="0" smtClean="0"/>
+              <a:t>// </a:t>
+            </a:r>
+            <a:r>
+              <a:rPr lang="ko-KR" altLang="en-US" sz="1200" dirty="0" smtClean="0"/>
+              <a:t>플랫폼 </a:t>
+            </a:r>
+            <a:endParaRPr lang="en-US" altLang="ko-KR" sz="1200" dirty="0" smtClean="0"/>
+          </a:p>
+          <a:p>
+            <a:r>
+              <a:rPr lang="ko-KR" altLang="en-US" sz="1200" dirty="0">
+                <a:hlinkClick r:id="rId4"/>
+              </a:rPr>
+              <a:t>http://spboxwin.iptime.org</a:t>
+            </a:r>
+            <a:r>
+              <a:rPr lang="en-US" altLang="ko-KR" sz="1200" dirty="0" smtClean="0">
+                <a:hlinkClick r:id="rId4"/>
+              </a:rPr>
+              <a:t>:3000/platform</a:t>
+            </a:r>
+            <a:endParaRPr lang="en-US" altLang="ko-KR" sz="1200" dirty="0" smtClean="0"/>
+          </a:p>
+          <a:p>
+            <a:endParaRPr lang="ko-KR" altLang="en-US" sz="1200" dirty="0"/>
+          </a:p>
+        </p:txBody>
+      </p:sp>
+    </p:spTree>
+    <p:extLst>
+      <p:ext uri="{BB962C8B-B14F-4D97-AF65-F5344CB8AC3E}">
+        <p14:creationId xmlns:p14="http://schemas.microsoft.com/office/powerpoint/2010/main" val="3655532856"/>
+      </p:ext>
+    </p:extLst>
+  </p:cSld>
+  <p:clrMapOvr>
+    <a:masterClrMapping/>
+  </p:clrMapOvr>
+</p:sld>
+</file>
+
+<file path=ppt/slides/slide33.xml><?xml version="1.0" encoding="utf-8"?>
+<p:sld xmlns:a="http://schemas.openxmlformats.org/drawingml/2006/main" xmlns:r="http://schemas.openxmlformats.org/officeDocument/2006/relationships" xmlns:p="http://schemas.openxmlformats.org/presentationml/2006/main">
+  <p:cSld>
+    <p:spTree>
+      <p:nvGrpSpPr>
+        <p:cNvPr id="1" name=""/>
+        <p:cNvGrpSpPr/>
+        <p:nvPr/>
+      </p:nvGrpSpPr>
+      <p:grpSpPr>
+        <a:xfrm>
+          <a:off x="0" y="0"/>
+          <a:ext cx="0" cy="0"/>
+          <a:chOff x="0" y="0"/>
+          <a:chExt cx="0" cy="0"/>
+        </a:xfrm>
+      </p:grpSpPr>
+      <p:sp>
+        <p:nvSpPr>
+          <p:cNvPr id="2" name="직사각형 1"/>
+          <p:cNvSpPr/>
+          <p:nvPr/>
+        </p:nvSpPr>
+        <p:spPr>
+          <a:xfrm>
+            <a:off x="3059832" y="2996952"/>
+            <a:ext cx="2736304" cy="864096"/>
+          </a:xfrm>
+          <a:prstGeom prst="rect">
+            <a:avLst/>
+          </a:prstGeom>
+        </p:spPr>
+        <p:style>
+          <a:lnRef idx="2">
+            <a:schemeClr val="accent6">
+              <a:shade val="50000"/>
+            </a:schemeClr>
+          </a:lnRef>
+          <a:fillRef idx="1">
+            <a:schemeClr val="accent6"/>
+          </a:fillRef>
+          <a:effectRef idx="0">
+            <a:schemeClr val="accent6"/>
+          </a:effectRef>
+          <a:fontRef idx="minor">
+            <a:schemeClr val="lt1"/>
+          </a:fontRef>
+        </p:style>
+        <p:txBody>
+          <a:bodyPr rtlCol="0" anchor="ctr"/>
+          <a:lstStyle/>
+          <a:p>
+            <a:pPr algn="ctr"/>
+            <a:r>
+              <a:rPr lang="ko-KR" altLang="en-US" dirty="0" smtClean="0"/>
+              <a:t>고객접근사이트</a:t>
+            </a:r>
+            <a:endParaRPr lang="ko-KR" altLang="en-US" dirty="0"/>
+          </a:p>
+        </p:txBody>
+      </p:sp>
+    </p:spTree>
+    <p:extLst>
+      <p:ext uri="{BB962C8B-B14F-4D97-AF65-F5344CB8AC3E}">
+        <p14:creationId xmlns:p14="http://schemas.microsoft.com/office/powerpoint/2010/main" val="4092258523"/>
+      </p:ext>
+    </p:extLst>
+  </p:cSld>
+  <p:clrMapOvr>
+    <a:masterClrMapping/>
+  </p:clrMapOvr>
+</p:sld>
+</file>
+
+<file path=ppt/slides/slide34.xml><?xml version="1.0" encoding="utf-8"?>
+<p:sld xmlns:a="http://schemas.openxmlformats.org/drawingml/2006/main" xmlns:r="http://schemas.openxmlformats.org/officeDocument/2006/relationships" xmlns:p="http://schemas.openxmlformats.org/presentationml/2006/main">
+  <p:cSld>
+    <p:spTree>
+      <p:nvGrpSpPr>
+        <p:cNvPr id="1" name=""/>
+        <p:cNvGrpSpPr/>
+        <p:nvPr/>
+      </p:nvGrpSpPr>
+      <p:grpSpPr>
+        <a:xfrm>
+          <a:off x="0" y="0"/>
+          <a:ext cx="0" cy="0"/>
+          <a:chOff x="0" y="0"/>
+          <a:chExt cx="0" cy="0"/>
+        </a:xfrm>
+      </p:grpSpPr>
+      <p:sp>
+        <p:nvSpPr>
+          <p:cNvPr id="2" name="TextBox 1"/>
+          <p:cNvSpPr txBox="1"/>
+          <p:nvPr/>
+        </p:nvSpPr>
+        <p:spPr>
+          <a:xfrm>
+            <a:off x="323528" y="476672"/>
+            <a:ext cx="3240360" cy="1015663"/>
+          </a:xfrm>
+          <a:prstGeom prst="rect">
+            <a:avLst/>
+          </a:prstGeom>
+          <a:noFill/>
+        </p:spPr>
+        <p:txBody>
+          <a:bodyPr wrap="square" rtlCol="0">
+            <a:spAutoFit/>
+          </a:bodyPr>
+          <a:lstStyle/>
+          <a:p>
+            <a:r>
+              <a:rPr lang="ko-KR" altLang="en-US" sz="1200" dirty="0"/>
+              <a:t>계정 </a:t>
+            </a:r>
+            <a:r>
+              <a:rPr lang="ko-KR" altLang="en-US" sz="1200" dirty="0" smtClean="0"/>
+              <a:t> </a:t>
+            </a:r>
+            <a:endParaRPr lang="en-US" altLang="ko-KR" sz="1200" dirty="0" smtClean="0"/>
+          </a:p>
+          <a:p>
+            <a:r>
+              <a:rPr lang="ko-KR" altLang="en-US" sz="1200" dirty="0" smtClean="0"/>
+              <a:t>테스트</a:t>
+            </a:r>
+            <a:r>
+              <a:rPr lang="en-US" altLang="ko-KR" sz="1200" dirty="0" smtClean="0"/>
+              <a:t>2 : </a:t>
+            </a:r>
+            <a:r>
+              <a:rPr lang="en-US" altLang="ko-KR" sz="1200" dirty="0" smtClean="0">
+                <a:hlinkClick r:id="rId2"/>
+              </a:rPr>
+              <a:t>test2@test.com</a:t>
+            </a:r>
+            <a:r>
+              <a:rPr lang="en-US" altLang="ko-KR" sz="1200" dirty="0" smtClean="0"/>
+              <a:t> , test123</a:t>
+            </a:r>
+          </a:p>
+          <a:p>
+            <a:r>
+              <a:rPr lang="ko-KR" altLang="en-US" dirty="0" smtClean="0"/>
+              <a:t>테스트</a:t>
+            </a:r>
+            <a:r>
+              <a:rPr lang="en-US" altLang="ko-KR" dirty="0" smtClean="0"/>
+              <a:t>1 : </a:t>
+            </a:r>
+            <a:r>
+              <a:rPr lang="en-US" altLang="ko-KR" dirty="0" smtClean="0">
+                <a:hlinkClick r:id="rId3"/>
+              </a:rPr>
+              <a:t>test@test.com</a:t>
+            </a:r>
+            <a:r>
+              <a:rPr lang="en-US" altLang="ko-KR" dirty="0" smtClean="0"/>
+              <a:t>,test123</a:t>
+            </a:r>
+            <a:endParaRPr lang="ko-KR" altLang="en-US" sz="1200" dirty="0"/>
+          </a:p>
+        </p:txBody>
+      </p:sp>
+      <p:sp>
+        <p:nvSpPr>
+          <p:cNvPr id="3" name="직사각형 2"/>
+          <p:cNvSpPr/>
+          <p:nvPr/>
+        </p:nvSpPr>
+        <p:spPr>
+          <a:xfrm>
+            <a:off x="481828" y="2174963"/>
+            <a:ext cx="2089033" cy="246221"/>
+          </a:xfrm>
+          <a:prstGeom prst="rect">
+            <a:avLst/>
+          </a:prstGeom>
+        </p:spPr>
+        <p:txBody>
+          <a:bodyPr wrap="none">
+            <a:spAutoFit/>
+          </a:bodyPr>
+          <a:lstStyle/>
+          <a:p>
+            <a:r>
+              <a:rPr lang="ko-KR" altLang="en-US" sz="1000" dirty="0"/>
+              <a:t>http://spboxwin.iptime.org:3000/</a:t>
+            </a:r>
+          </a:p>
+        </p:txBody>
+      </p:sp>
+      <p:pic>
+        <p:nvPicPr>
+          <p:cNvPr id="4" name="그림 3"/>
+          <p:cNvPicPr>
+            <a:picLocks noChangeAspect="1"/>
+          </p:cNvPicPr>
+          <p:nvPr/>
+        </p:nvPicPr>
+        <p:blipFill>
+          <a:blip r:embed="rId4"/>
+          <a:stretch>
+            <a:fillRect/>
+          </a:stretch>
+        </p:blipFill>
+        <p:spPr>
+          <a:xfrm>
+            <a:off x="337812" y="2420888"/>
+            <a:ext cx="2693147" cy="1296144"/>
+          </a:xfrm>
+          <a:prstGeom prst="rect">
+            <a:avLst/>
+          </a:prstGeom>
+        </p:spPr>
+      </p:pic>
+      <p:sp>
+        <p:nvSpPr>
+          <p:cNvPr id="5" name="직사각형 4"/>
+          <p:cNvSpPr/>
+          <p:nvPr/>
+        </p:nvSpPr>
+        <p:spPr>
+          <a:xfrm>
+            <a:off x="481828" y="3921377"/>
+            <a:ext cx="1296144" cy="576064"/>
           </a:xfrm>
           <a:prstGeom prst="rect">
             <a:avLst/>
@@ -7363,23 +8223,23 @@
           <a:p>
             <a:pPr algn="ctr"/>
             <a:r>
-              <a:rPr lang="ko-KR" altLang="en-US" sz="1400" dirty="0" smtClean="0"/>
-              <a:t>운영</a:t>
-            </a:r>
-            <a:endParaRPr lang="ko-KR" altLang="en-US" sz="1400" dirty="0"/>
-          </a:p>
-        </p:txBody>
-      </p:sp>
-      <p:sp>
-        <p:nvSpPr>
-          <p:cNvPr id="11" name="직사각형 10"/>
+              <a:rPr lang="ko-KR" altLang="en-US" dirty="0" smtClean="0"/>
+              <a:t>가입</a:t>
+            </a:r>
+            <a:endParaRPr lang="ko-KR" altLang="en-US" dirty="0"/>
+          </a:p>
+        </p:txBody>
+      </p:sp>
+      <p:sp>
+        <p:nvSpPr>
+          <p:cNvPr id="6" name="직사각형 5"/>
           <p:cNvSpPr/>
           <p:nvPr/>
         </p:nvSpPr>
         <p:spPr>
           <a:xfrm>
-            <a:off x="481828" y="1698653"/>
-            <a:ext cx="1267294" cy="504056"/>
+            <a:off x="1921987" y="3962957"/>
+            <a:ext cx="1108971" cy="534484"/>
           </a:xfrm>
           <a:prstGeom prst="rect">
             <a:avLst/>
@@ -7407,23 +8267,23 @@
           <a:p>
             <a:pPr algn="ctr"/>
             <a:r>
-              <a:rPr lang="ko-KR" altLang="en-US" smtClean="0"/>
-              <a:t>포탈</a:t>
-            </a:r>
-            <a:endParaRPr lang="ko-KR" altLang="en-US"/>
-          </a:p>
-        </p:txBody>
-      </p:sp>
-      <p:sp>
-        <p:nvSpPr>
-          <p:cNvPr id="12" name="직사각형 11"/>
+              <a:rPr lang="ko-KR" altLang="en-US" dirty="0" err="1" smtClean="0"/>
+              <a:t>셀프제작</a:t>
+            </a:r>
+            <a:endParaRPr lang="ko-KR" altLang="en-US" dirty="0"/>
+          </a:p>
+        </p:txBody>
+      </p:sp>
+      <p:sp>
+        <p:nvSpPr>
+          <p:cNvPr id="7" name="직사각형 6"/>
           <p:cNvSpPr/>
           <p:nvPr/>
         </p:nvSpPr>
         <p:spPr>
           <a:xfrm>
-            <a:off x="481828" y="4641457"/>
-            <a:ext cx="1296144" cy="576064"/>
+            <a:off x="3290140" y="3921377"/>
+            <a:ext cx="864096" cy="576064"/>
           </a:xfrm>
           <a:prstGeom prst="rect">
             <a:avLst/>
@@ -7452,6 +8312,238 @@
             <a:pPr algn="ctr"/>
             <a:r>
               <a:rPr lang="ko-KR" altLang="en-US" dirty="0" smtClean="0"/>
+              <a:t>배포</a:t>
+            </a:r>
+            <a:endParaRPr lang="ko-KR" altLang="en-US" dirty="0"/>
+          </a:p>
+        </p:txBody>
+      </p:sp>
+      <p:sp>
+        <p:nvSpPr>
+          <p:cNvPr id="8" name="직사각형 7"/>
+          <p:cNvSpPr/>
+          <p:nvPr/>
+        </p:nvSpPr>
+        <p:spPr>
+          <a:xfrm>
+            <a:off x="1921988" y="4641457"/>
+            <a:ext cx="1108970" cy="576064"/>
+          </a:xfrm>
+          <a:prstGeom prst="rect">
+            <a:avLst/>
+          </a:prstGeom>
+        </p:spPr>
+        <p:style>
+          <a:lnRef idx="2">
+            <a:schemeClr val="accent1">
+              <a:shade val="50000"/>
+            </a:schemeClr>
+          </a:lnRef>
+          <a:fillRef idx="1">
+            <a:schemeClr val="accent1"/>
+          </a:fillRef>
+          <a:effectRef idx="0">
+            <a:schemeClr val="accent1"/>
+          </a:effectRef>
+          <a:fontRef idx="minor">
+            <a:schemeClr val="lt1"/>
+          </a:fontRef>
+        </p:style>
+        <p:txBody>
+          <a:bodyPr rtlCol="0" anchor="ctr"/>
+          <a:lstStyle/>
+          <a:p>
+            <a:pPr algn="ctr"/>
+            <a:r>
+              <a:rPr lang="ko-KR" altLang="en-US" dirty="0" smtClean="0"/>
+              <a:t>본사제작의뢰</a:t>
+            </a:r>
+            <a:endParaRPr lang="ko-KR" altLang="en-US" dirty="0"/>
+          </a:p>
+        </p:txBody>
+      </p:sp>
+      <p:sp>
+        <p:nvSpPr>
+          <p:cNvPr id="9" name="직사각형 8"/>
+          <p:cNvSpPr/>
+          <p:nvPr/>
+        </p:nvSpPr>
+        <p:spPr>
+          <a:xfrm>
+            <a:off x="4413418" y="3942167"/>
+            <a:ext cx="864096" cy="576064"/>
+          </a:xfrm>
+          <a:prstGeom prst="rect">
+            <a:avLst/>
+          </a:prstGeom>
+        </p:spPr>
+        <p:style>
+          <a:lnRef idx="2">
+            <a:schemeClr val="accent1">
+              <a:shade val="50000"/>
+            </a:schemeClr>
+          </a:lnRef>
+          <a:fillRef idx="1">
+            <a:schemeClr val="accent1"/>
+          </a:fillRef>
+          <a:effectRef idx="0">
+            <a:schemeClr val="accent1"/>
+          </a:effectRef>
+          <a:fontRef idx="minor">
+            <a:schemeClr val="lt1"/>
+          </a:fontRef>
+        </p:style>
+        <p:txBody>
+          <a:bodyPr rtlCol="0" anchor="ctr"/>
+          <a:lstStyle/>
+          <a:p>
+            <a:pPr algn="ctr"/>
+            <a:r>
+              <a:rPr lang="ko-KR" altLang="en-US" sz="1400" dirty="0" err="1" smtClean="0"/>
+              <a:t>사이트관리</a:t>
+            </a:r>
+            <a:r>
+              <a:rPr lang="en-US" altLang="ko-KR" sz="1400" dirty="0" smtClean="0"/>
+              <a:t>(</a:t>
+            </a:r>
+            <a:r>
+              <a:rPr lang="ko-KR" altLang="en-US" sz="1400" dirty="0" smtClean="0"/>
+              <a:t>수정</a:t>
+            </a:r>
+            <a:r>
+              <a:rPr lang="en-US" altLang="ko-KR" sz="1400" dirty="0" smtClean="0"/>
+              <a:t>)</a:t>
+            </a:r>
+            <a:endParaRPr lang="ko-KR" altLang="en-US" sz="1400" dirty="0"/>
+          </a:p>
+        </p:txBody>
+      </p:sp>
+      <p:sp>
+        <p:nvSpPr>
+          <p:cNvPr id="10" name="직사각형 9"/>
+          <p:cNvSpPr/>
+          <p:nvPr/>
+        </p:nvSpPr>
+        <p:spPr>
+          <a:xfrm>
+            <a:off x="4431543" y="4713465"/>
+            <a:ext cx="864096" cy="576064"/>
+          </a:xfrm>
+          <a:prstGeom prst="rect">
+            <a:avLst/>
+          </a:prstGeom>
+        </p:spPr>
+        <p:style>
+          <a:lnRef idx="2">
+            <a:schemeClr val="accent1">
+              <a:shade val="50000"/>
+            </a:schemeClr>
+          </a:lnRef>
+          <a:fillRef idx="1">
+            <a:schemeClr val="accent1"/>
+          </a:fillRef>
+          <a:effectRef idx="0">
+            <a:schemeClr val="accent1"/>
+          </a:effectRef>
+          <a:fontRef idx="minor">
+            <a:schemeClr val="lt1"/>
+          </a:fontRef>
+        </p:style>
+        <p:txBody>
+          <a:bodyPr rtlCol="0" anchor="ctr"/>
+          <a:lstStyle/>
+          <a:p>
+            <a:pPr algn="ctr"/>
+            <a:r>
+              <a:rPr lang="ko-KR" altLang="en-US" sz="1400" dirty="0" smtClean="0"/>
+              <a:t>운영</a:t>
+            </a:r>
+            <a:endParaRPr lang="ko-KR" altLang="en-US" sz="1400" dirty="0"/>
+          </a:p>
+        </p:txBody>
+      </p:sp>
+      <p:sp>
+        <p:nvSpPr>
+          <p:cNvPr id="11" name="직사각형 10"/>
+          <p:cNvSpPr/>
+          <p:nvPr/>
+        </p:nvSpPr>
+        <p:spPr>
+          <a:xfrm>
+            <a:off x="481828" y="1698653"/>
+            <a:ext cx="1267294" cy="504056"/>
+          </a:xfrm>
+          <a:prstGeom prst="rect">
+            <a:avLst/>
+          </a:prstGeom>
+        </p:spPr>
+        <p:style>
+          <a:lnRef idx="2">
+            <a:schemeClr val="accent1">
+              <a:shade val="50000"/>
+            </a:schemeClr>
+          </a:lnRef>
+          <a:fillRef idx="1">
+            <a:schemeClr val="accent1"/>
+          </a:fillRef>
+          <a:effectRef idx="0">
+            <a:schemeClr val="accent1"/>
+          </a:effectRef>
+          <a:fontRef idx="minor">
+            <a:schemeClr val="lt1"/>
+          </a:fontRef>
+        </p:style>
+        <p:txBody>
+          <a:bodyPr rtlCol="0" anchor="ctr"/>
+          <a:lstStyle/>
+          <a:p>
+            <a:pPr algn="ctr"/>
+            <a:r>
+              <a:rPr lang="ko-KR" altLang="en-US" smtClean="0"/>
+              <a:t>포탈</a:t>
+            </a:r>
+            <a:endParaRPr lang="ko-KR" altLang="en-US"/>
+          </a:p>
+        </p:txBody>
+      </p:sp>
+      <p:sp>
+        <p:nvSpPr>
+          <p:cNvPr id="12" name="직사각형 11"/>
+          <p:cNvSpPr/>
+          <p:nvPr/>
+        </p:nvSpPr>
+        <p:spPr>
+          <a:xfrm>
+            <a:off x="481828" y="4641457"/>
+            <a:ext cx="1296144" cy="576064"/>
+          </a:xfrm>
+          <a:prstGeom prst="rect">
+            <a:avLst/>
+          </a:prstGeom>
+        </p:spPr>
+        <p:style>
+          <a:lnRef idx="2">
+            <a:schemeClr val="accent1">
+              <a:shade val="50000"/>
+            </a:schemeClr>
+          </a:lnRef>
+          <a:fillRef idx="1">
+            <a:schemeClr val="accent1"/>
+          </a:fillRef>
+          <a:effectRef idx="0">
+            <a:schemeClr val="accent1"/>
+          </a:effectRef>
+          <a:fontRef idx="minor">
+            <a:schemeClr val="lt1"/>
+          </a:fontRef>
+        </p:style>
+        <p:txBody>
+          <a:bodyPr rtlCol="0" anchor="ctr"/>
+          <a:lstStyle/>
+          <a:p>
+            <a:pPr algn="ctr"/>
+            <a:r>
+              <a:rPr lang="ko-KR" altLang="en-US" dirty="0" smtClean="0"/>
               <a:t>로그인</a:t>
             </a:r>
             <a:endParaRPr lang="ko-KR" altLang="en-US" dirty="0"/>
@@ -7471,7 +8563,7 @@
 </p:sld>
 </file>
 
-<file path=ppt/slides/slide32.xml><?xml version="1.0" encoding="utf-8"?>
+<file path=ppt/slides/slide35.xml><?xml version="1.0" encoding="utf-8"?>
 <p:sld xmlns:a="http://schemas.openxmlformats.org/drawingml/2006/main" xmlns:r="http://schemas.openxmlformats.org/officeDocument/2006/relationships" xmlns:p="http://schemas.openxmlformats.org/presentationml/2006/main">
   <p:cSld>
     <p:spTree>
@@ -7501,7 +8593,7 @@
 </p:sld>
 </file>
 
-<file path=ppt/slides/slide33.xml><?xml version="1.0" encoding="utf-8"?>
+<file path=ppt/slides/slide36.xml><?xml version="1.0" encoding="utf-8"?>
 <p:sld xmlns:a="http://schemas.openxmlformats.org/drawingml/2006/main" xmlns:r="http://schemas.openxmlformats.org/officeDocument/2006/relationships" xmlns:p="http://schemas.openxmlformats.org/presentationml/2006/main">
   <p:cSld>
     <p:spTree>
@@ -7575,7 +8667,7 @@
 </p:sld>
 </file>
 
-<file path=ppt/slides/slide34.xml><?xml version="1.0" encoding="utf-8"?>
+<file path=ppt/slides/slide37.xml><?xml version="1.0" encoding="utf-8"?>
 <p:sld xmlns:a="http://schemas.openxmlformats.org/drawingml/2006/main" xmlns:r="http://schemas.openxmlformats.org/officeDocument/2006/relationships" xmlns:p="http://schemas.openxmlformats.org/presentationml/2006/main">
   <p:cSld>
     <p:spTree>
@@ -7665,7 +8757,7 @@
 </p:sld>
 </file>
 
-<file path=ppt/slides/slide35.xml><?xml version="1.0" encoding="utf-8"?>
+<file path=ppt/slides/slide38.xml><?xml version="1.0" encoding="utf-8"?>
 <p:sld xmlns:a="http://schemas.openxmlformats.org/drawingml/2006/main" xmlns:r="http://schemas.openxmlformats.org/officeDocument/2006/relationships" xmlns:p="http://schemas.openxmlformats.org/presentationml/2006/main">
   <p:cSld>
     <p:spTree>
@@ -7695,7 +8787,7 @@
 </p:sld>
 </file>
 
-<file path=ppt/slides/slide36.xml><?xml version="1.0" encoding="utf-8"?>
+<file path=ppt/slides/slide39.xml><?xml version="1.0" encoding="utf-8"?>
 <p:sld xmlns:a="http://schemas.openxmlformats.org/drawingml/2006/main" xmlns:r="http://schemas.openxmlformats.org/officeDocument/2006/relationships" xmlns:p="http://schemas.openxmlformats.org/presentationml/2006/main">
   <p:cSld>
     <p:spTree>
@@ -7725,7 +8817,189 @@
 </p:sld>
 </file>
 
-<file path=ppt/slides/slide37.xml><?xml version="1.0" encoding="utf-8"?>
+<file path=ppt/slides/slide4.xml><?xml version="1.0" encoding="utf-8"?>
+<p:sld xmlns:a="http://schemas.openxmlformats.org/drawingml/2006/main" xmlns:r="http://schemas.openxmlformats.org/officeDocument/2006/relationships" xmlns:p="http://schemas.openxmlformats.org/presentationml/2006/main">
+  <p:cSld>
+    <p:spTree>
+      <p:nvGrpSpPr>
+        <p:cNvPr id="1" name=""/>
+        <p:cNvGrpSpPr/>
+        <p:nvPr/>
+      </p:nvGrpSpPr>
+      <p:grpSpPr>
+        <a:xfrm>
+          <a:off x="0" y="0"/>
+          <a:ext cx="0" cy="0"/>
+          <a:chOff x="0" y="0"/>
+          <a:chExt cx="0" cy="0"/>
+        </a:xfrm>
+      </p:grpSpPr>
+      <p:sp>
+        <p:nvSpPr>
+          <p:cNvPr id="2" name="직사각형 1"/>
+          <p:cNvSpPr/>
+          <p:nvPr/>
+        </p:nvSpPr>
+        <p:spPr>
+          <a:xfrm>
+            <a:off x="539552" y="620688"/>
+            <a:ext cx="2808312" cy="1080120"/>
+          </a:xfrm>
+          <a:prstGeom prst="rect">
+            <a:avLst/>
+          </a:prstGeom>
+        </p:spPr>
+        <p:style>
+          <a:lnRef idx="2">
+            <a:schemeClr val="accent1">
+              <a:shade val="50000"/>
+            </a:schemeClr>
+          </a:lnRef>
+          <a:fillRef idx="1">
+            <a:schemeClr val="accent1"/>
+          </a:fillRef>
+          <a:effectRef idx="0">
+            <a:schemeClr val="accent1"/>
+          </a:effectRef>
+          <a:fontRef idx="minor">
+            <a:schemeClr val="lt1"/>
+          </a:fontRef>
+        </p:style>
+        <p:txBody>
+          <a:bodyPr rtlCol="0" anchor="ctr"/>
+          <a:lstStyle/>
+          <a:p>
+            <a:pPr algn="ctr"/>
+            <a:r>
+              <a:rPr lang="ko-KR" altLang="en-US" sz="1200" dirty="0" smtClean="0"/>
+              <a:t>회원가입했음</a:t>
+            </a:r>
+            <a:r>
+              <a:rPr lang="en-US" altLang="ko-KR" sz="1200" dirty="0" smtClean="0"/>
+              <a:t>. </a:t>
+            </a:r>
+            <a:r>
+              <a:rPr lang="ko-KR" altLang="en-US" sz="1200" dirty="0" smtClean="0"/>
+              <a:t>나 사장님</a:t>
+            </a:r>
+            <a:r>
+              <a:rPr lang="en-US" altLang="ko-KR" sz="1200" dirty="0" smtClean="0"/>
+              <a:t>? </a:t>
+            </a:r>
+            <a:r>
+              <a:rPr lang="ko-KR" altLang="en-US" sz="1200" dirty="0" smtClean="0"/>
+              <a:t>어디에 접속</a:t>
+            </a:r>
+            <a:r>
+              <a:rPr lang="en-US" altLang="ko-KR" sz="1200" dirty="0" smtClean="0"/>
+              <a:t>? &lt; </a:t>
+            </a:r>
+            <a:r>
+              <a:rPr lang="ko-KR" altLang="en-US" sz="1200" dirty="0" err="1" smtClean="0"/>
+              <a:t>뭐하려고</a:t>
+            </a:r>
+            <a:r>
+              <a:rPr lang="en-US" altLang="ko-KR" sz="1200" dirty="0" smtClean="0"/>
+              <a:t>? </a:t>
+            </a:r>
+            <a:r>
+              <a:rPr lang="ko-KR" altLang="en-US" sz="1200" dirty="0" smtClean="0"/>
+              <a:t>사이트만들게 </a:t>
+            </a:r>
+            <a:endParaRPr lang="en-US" altLang="ko-KR" sz="1200" dirty="0" smtClean="0"/>
+          </a:p>
+          <a:p>
+            <a:pPr algn="ctr"/>
+            <a:endParaRPr lang="ko-KR" altLang="en-US" sz="1200" dirty="0"/>
+          </a:p>
+        </p:txBody>
+      </p:sp>
+      <p:sp>
+        <p:nvSpPr>
+          <p:cNvPr id="3" name="직사각형 2"/>
+          <p:cNvSpPr/>
+          <p:nvPr/>
+        </p:nvSpPr>
+        <p:spPr>
+          <a:xfrm>
+            <a:off x="3851920" y="548680"/>
+            <a:ext cx="1368152" cy="1152128"/>
+          </a:xfrm>
+          <a:prstGeom prst="rect">
+            <a:avLst/>
+          </a:prstGeom>
+        </p:spPr>
+        <p:style>
+          <a:lnRef idx="2">
+            <a:schemeClr val="accent1">
+              <a:shade val="50000"/>
+            </a:schemeClr>
+          </a:lnRef>
+          <a:fillRef idx="1">
+            <a:schemeClr val="accent1"/>
+          </a:fillRef>
+          <a:effectRef idx="0">
+            <a:schemeClr val="accent1"/>
+          </a:effectRef>
+          <a:fontRef idx="minor">
+            <a:schemeClr val="lt1"/>
+          </a:fontRef>
+        </p:style>
+        <p:txBody>
+          <a:bodyPr rtlCol="0" anchor="ctr"/>
+          <a:lstStyle/>
+          <a:p>
+            <a:pPr algn="ctr"/>
+            <a:r>
+              <a:rPr lang="ko-KR" altLang="en-US" sz="1100" dirty="0" smtClean="0"/>
+              <a:t>인터넷에 노출된 사이트에 접속</a:t>
+            </a:r>
+            <a:endParaRPr lang="ko-KR" altLang="en-US" sz="1100" dirty="0"/>
+          </a:p>
+        </p:txBody>
+      </p:sp>
+      <p:sp>
+        <p:nvSpPr>
+          <p:cNvPr id="4" name="직사각형 3"/>
+          <p:cNvSpPr/>
+          <p:nvPr/>
+        </p:nvSpPr>
+        <p:spPr>
+          <a:xfrm>
+            <a:off x="3376956" y="2132856"/>
+            <a:ext cx="2428870" cy="369332"/>
+          </a:xfrm>
+          <a:prstGeom prst="rect">
+            <a:avLst/>
+          </a:prstGeom>
+        </p:spPr>
+        <p:txBody>
+          <a:bodyPr wrap="none">
+            <a:spAutoFit/>
+          </a:bodyPr>
+          <a:lstStyle/>
+          <a:p>
+            <a:r>
+              <a:rPr lang="ko-KR" altLang="en-US" dirty="0"/>
+              <a:t>http://localhost:3000/</a:t>
+            </a:r>
+          </a:p>
+        </p:txBody>
+      </p:sp>
+    </p:spTree>
+    <p:extLst>
+      <p:ext uri="{BB962C8B-B14F-4D97-AF65-F5344CB8AC3E}">
+        <p14:creationId xmlns:p14="http://schemas.microsoft.com/office/powerpoint/2010/main" val="218804753"/>
+      </p:ext>
+    </p:extLst>
+  </p:cSld>
+  <p:clrMapOvr>
+    <a:masterClrMapping/>
+  </p:clrMapOvr>
+</p:sld>
+</file>
+
+<file path=ppt/slides/slide40.xml><?xml version="1.0" encoding="utf-8"?>
 <p:sld xmlns:a="http://schemas.openxmlformats.org/drawingml/2006/main" xmlns:r="http://schemas.openxmlformats.org/officeDocument/2006/relationships" xmlns:p="http://schemas.openxmlformats.org/presentationml/2006/main">
   <p:cSld>
     <p:spTree>
@@ -7755,7 +9029,67 @@
 </p:sld>
 </file>
 
-<file path=ppt/slides/slide4.xml><?xml version="1.0" encoding="utf-8"?>
+<file path=ppt/slides/slide5.xml><?xml version="1.0" encoding="utf-8"?>
+<p:sld xmlns:a="http://schemas.openxmlformats.org/drawingml/2006/main" xmlns:r="http://schemas.openxmlformats.org/officeDocument/2006/relationships" xmlns:p="http://schemas.openxmlformats.org/presentationml/2006/main">
+  <p:cSld>
+    <p:spTree>
+      <p:nvGrpSpPr>
+        <p:cNvPr id="1" name=""/>
+        <p:cNvGrpSpPr/>
+        <p:nvPr/>
+      </p:nvGrpSpPr>
+      <p:grpSpPr>
+        <a:xfrm>
+          <a:off x="0" y="0"/>
+          <a:ext cx="0" cy="0"/>
+          <a:chOff x="0" y="0"/>
+          <a:chExt cx="0" cy="0"/>
+        </a:xfrm>
+      </p:grpSpPr>
+    </p:spTree>
+    <p:extLst>
+      <p:ext uri="{BB962C8B-B14F-4D97-AF65-F5344CB8AC3E}">
+        <p14:creationId xmlns:p14="http://schemas.microsoft.com/office/powerpoint/2010/main" val="700615628"/>
+      </p:ext>
+    </p:extLst>
+  </p:cSld>
+  <p:clrMapOvr>
+    <a:masterClrMapping/>
+  </p:clrMapOvr>
+</p:sld>
+</file>
+
+<file path=ppt/slides/slide6.xml><?xml version="1.0" encoding="utf-8"?>
+<p:sld xmlns:a="http://schemas.openxmlformats.org/drawingml/2006/main" xmlns:r="http://schemas.openxmlformats.org/officeDocument/2006/relationships" xmlns:p="http://schemas.openxmlformats.org/presentationml/2006/main">
+  <p:cSld>
+    <p:spTree>
+      <p:nvGrpSpPr>
+        <p:cNvPr id="1" name=""/>
+        <p:cNvGrpSpPr/>
+        <p:nvPr/>
+      </p:nvGrpSpPr>
+      <p:grpSpPr>
+        <a:xfrm>
+          <a:off x="0" y="0"/>
+          <a:ext cx="0" cy="0"/>
+          <a:chOff x="0" y="0"/>
+          <a:chExt cx="0" cy="0"/>
+        </a:xfrm>
+      </p:grpSpPr>
+    </p:spTree>
+    <p:extLst>
+      <p:ext uri="{BB962C8B-B14F-4D97-AF65-F5344CB8AC3E}">
+        <p14:creationId xmlns:p14="http://schemas.microsoft.com/office/powerpoint/2010/main" val="4148545201"/>
+      </p:ext>
+    </p:extLst>
+  </p:cSld>
+  <p:clrMapOvr>
+    <a:masterClrMapping/>
+  </p:clrMapOvr>
+</p:sld>
+</file>
+
+<file path=ppt/slides/slide7.xml><?xml version="1.0" encoding="utf-8"?>
 <p:sld xmlns:a="http://schemas.openxmlformats.org/drawingml/2006/main" xmlns:r="http://schemas.openxmlformats.org/officeDocument/2006/relationships" xmlns:p="http://schemas.openxmlformats.org/presentationml/2006/main">
   <p:cSld>
     <p:spTree>
@@ -8293,698 +9627,6 @@
 </p:sld>
 </file>
 
-<file path=ppt/slides/slide5.xml><?xml version="1.0" encoding="utf-8"?>
-<p:sld xmlns:a="http://schemas.openxmlformats.org/drawingml/2006/main" xmlns:r="http://schemas.openxmlformats.org/officeDocument/2006/relationships" xmlns:p="http://schemas.openxmlformats.org/presentationml/2006/main">
-  <p:cSld>
-    <p:spTree>
-      <p:nvGrpSpPr>
-        <p:cNvPr id="1" name=""/>
-        <p:cNvGrpSpPr/>
-        <p:nvPr/>
-      </p:nvGrpSpPr>
-      <p:grpSpPr>
-        <a:xfrm>
-          <a:off x="0" y="0"/>
-          <a:ext cx="0" cy="0"/>
-          <a:chOff x="0" y="0"/>
-          <a:chExt cx="0" cy="0"/>
-        </a:xfrm>
-      </p:grpSpPr>
-      <p:sp>
-        <p:nvSpPr>
-          <p:cNvPr id="2" name="직사각형 1"/>
-          <p:cNvSpPr/>
-          <p:nvPr/>
-        </p:nvSpPr>
-        <p:spPr>
-          <a:xfrm>
-            <a:off x="467544" y="404664"/>
-            <a:ext cx="2160240" cy="792088"/>
-          </a:xfrm>
-          <a:prstGeom prst="rect">
-            <a:avLst/>
-          </a:prstGeom>
-        </p:spPr>
-        <p:style>
-          <a:lnRef idx="2">
-            <a:schemeClr val="accent1">
-              <a:shade val="50000"/>
-            </a:schemeClr>
-          </a:lnRef>
-          <a:fillRef idx="1">
-            <a:schemeClr val="accent1"/>
-          </a:fillRef>
-          <a:effectRef idx="0">
-            <a:schemeClr val="accent1"/>
-          </a:effectRef>
-          <a:fontRef idx="minor">
-            <a:schemeClr val="lt1"/>
-          </a:fontRef>
-        </p:style>
-        <p:txBody>
-          <a:bodyPr rtlCol="0" anchor="ctr"/>
-          <a:lstStyle/>
-          <a:p>
-            <a:pPr algn="ctr"/>
-            <a:r>
-              <a:rPr lang="ko-KR" altLang="en-US" sz="1200" dirty="0" smtClean="0"/>
-              <a:t>리뷰단계에서 미공개 </a:t>
-            </a:r>
-            <a:r>
-              <a:rPr lang="ko-KR" altLang="en-US" sz="1200" dirty="0" err="1" smtClean="0"/>
-              <a:t>리본표시</a:t>
-            </a:r>
-            <a:r>
-              <a:rPr lang="ko-KR" altLang="en-US" sz="1200" dirty="0" smtClean="0"/>
-              <a:t> 로 수정</a:t>
-            </a:r>
-            <a:endParaRPr lang="ko-KR" altLang="en-US" sz="1200" dirty="0"/>
-          </a:p>
-        </p:txBody>
-      </p:sp>
-      <p:pic>
-        <p:nvPicPr>
-          <p:cNvPr id="3" name="그림 2"/>
-          <p:cNvPicPr>
-            <a:picLocks noChangeAspect="1"/>
-          </p:cNvPicPr>
-          <p:nvPr/>
-        </p:nvPicPr>
-        <p:blipFill>
-          <a:blip r:embed="rId2"/>
-          <a:stretch>
-            <a:fillRect/>
-          </a:stretch>
-        </p:blipFill>
-        <p:spPr>
-          <a:xfrm>
-            <a:off x="755576" y="1628800"/>
-            <a:ext cx="7671542" cy="4988044"/>
-          </a:xfrm>
-          <a:prstGeom prst="rect">
-            <a:avLst/>
-          </a:prstGeom>
-        </p:spPr>
-      </p:pic>
-    </p:spTree>
-    <p:extLst>
-      <p:ext uri="{BB962C8B-B14F-4D97-AF65-F5344CB8AC3E}">
-        <p14:creationId xmlns:p14="http://schemas.microsoft.com/office/powerpoint/2010/main" val="4250094322"/>
-      </p:ext>
-    </p:extLst>
-  </p:cSld>
-  <p:clrMapOvr>
-    <a:masterClrMapping/>
-  </p:clrMapOvr>
-</p:sld>
-</file>
-
-<file path=ppt/slides/slide6.xml><?xml version="1.0" encoding="utf-8"?>
-<p:sld xmlns:a="http://schemas.openxmlformats.org/drawingml/2006/main" xmlns:r="http://schemas.openxmlformats.org/officeDocument/2006/relationships" xmlns:p="http://schemas.openxmlformats.org/presentationml/2006/main">
-  <p:cSld>
-    <p:spTree>
-      <p:nvGrpSpPr>
-        <p:cNvPr id="1" name=""/>
-        <p:cNvGrpSpPr/>
-        <p:nvPr/>
-      </p:nvGrpSpPr>
-      <p:grpSpPr>
-        <a:xfrm>
-          <a:off x="0" y="0"/>
-          <a:ext cx="0" cy="0"/>
-          <a:chOff x="0" y="0"/>
-          <a:chExt cx="0" cy="0"/>
-        </a:xfrm>
-      </p:grpSpPr>
-      <p:pic>
-        <p:nvPicPr>
-          <p:cNvPr id="2" name="그림 1"/>
-          <p:cNvPicPr>
-            <a:picLocks noChangeAspect="1"/>
-          </p:cNvPicPr>
-          <p:nvPr/>
-        </p:nvPicPr>
-        <p:blipFill>
-          <a:blip r:embed="rId2"/>
-          <a:stretch>
-            <a:fillRect/>
-          </a:stretch>
-        </p:blipFill>
-        <p:spPr>
-          <a:xfrm>
-            <a:off x="251520" y="1412776"/>
-            <a:ext cx="4935238" cy="3208897"/>
-          </a:xfrm>
-          <a:prstGeom prst="rect">
-            <a:avLst/>
-          </a:prstGeom>
-        </p:spPr>
-      </p:pic>
-      <p:sp>
-        <p:nvSpPr>
-          <p:cNvPr id="3" name="TextBox 2"/>
-          <p:cNvSpPr txBox="1"/>
-          <p:nvPr/>
-        </p:nvSpPr>
-        <p:spPr>
-          <a:xfrm>
-            <a:off x="467544" y="188640"/>
-            <a:ext cx="3744416" cy="830997"/>
-          </a:xfrm>
-          <a:prstGeom prst="rect">
-            <a:avLst/>
-          </a:prstGeom>
-          <a:noFill/>
-        </p:spPr>
-        <p:txBody>
-          <a:bodyPr wrap="square" rtlCol="0">
-            <a:spAutoFit/>
-          </a:bodyPr>
-          <a:lstStyle/>
-          <a:p>
-            <a:r>
-              <a:rPr lang="ko-KR" altLang="en-US" sz="1200" dirty="0" smtClean="0"/>
-              <a:t>사이트 구조 점검</a:t>
-            </a:r>
-            <a:endParaRPr lang="en-US" altLang="ko-KR" sz="1200" dirty="0" smtClean="0"/>
-          </a:p>
-          <a:p>
-            <a:r>
-              <a:rPr lang="ko-KR" altLang="en-US" sz="1200" dirty="0" smtClean="0"/>
-              <a:t>홈과 게시판 </a:t>
-            </a:r>
-            <a:r>
-              <a:rPr lang="ko-KR" altLang="en-US" sz="1200" dirty="0" err="1" smtClean="0"/>
-              <a:t>버늩의</a:t>
-            </a:r>
-            <a:r>
-              <a:rPr lang="ko-KR" altLang="en-US" sz="1200" dirty="0" smtClean="0"/>
-              <a:t> 경우 사이트의 기능</a:t>
-            </a:r>
-            <a:endParaRPr lang="en-US" altLang="ko-KR" sz="1200" dirty="0" smtClean="0"/>
-          </a:p>
-          <a:p>
-            <a:r>
-              <a:rPr lang="ko-KR" altLang="en-US" sz="1200" dirty="0" err="1" smtClean="0"/>
-              <a:t>문의버튼은</a:t>
-            </a:r>
-            <a:r>
-              <a:rPr lang="ko-KR" altLang="en-US" sz="1200" dirty="0" smtClean="0"/>
-              <a:t> 사이트관리자의 기능 </a:t>
-            </a:r>
-            <a:r>
-              <a:rPr lang="en-US" altLang="ko-KR" sz="1200" dirty="0" smtClean="0"/>
-              <a:t>&gt;&gt; </a:t>
-            </a:r>
-            <a:r>
-              <a:rPr lang="ko-KR" altLang="en-US" sz="1200" dirty="0" smtClean="0"/>
-              <a:t>이상하다</a:t>
-            </a:r>
-            <a:r>
-              <a:rPr lang="en-US" altLang="ko-KR" sz="1200" dirty="0" smtClean="0"/>
-              <a:t>. </a:t>
-            </a:r>
-            <a:r>
-              <a:rPr lang="ko-KR" altLang="en-US" sz="1200" dirty="0" smtClean="0"/>
-              <a:t>사이트의 </a:t>
-            </a:r>
-            <a:r>
-              <a:rPr lang="ko-KR" altLang="en-US" sz="1200" dirty="0" err="1" smtClean="0"/>
-              <a:t>기능이여야한다</a:t>
-            </a:r>
-            <a:r>
-              <a:rPr lang="en-US" altLang="ko-KR" sz="1200" dirty="0" smtClean="0"/>
-              <a:t>. </a:t>
-            </a:r>
-            <a:endParaRPr lang="ko-KR" altLang="en-US" sz="1200" dirty="0"/>
-          </a:p>
-        </p:txBody>
-      </p:sp>
-      <p:sp>
-        <p:nvSpPr>
-          <p:cNvPr id="4" name="직사각형 3"/>
-          <p:cNvSpPr/>
-          <p:nvPr/>
-        </p:nvSpPr>
-        <p:spPr>
-          <a:xfrm>
-            <a:off x="7524328" y="1124744"/>
-            <a:ext cx="1512168" cy="576064"/>
-          </a:xfrm>
-          <a:prstGeom prst="rect">
-            <a:avLst/>
-          </a:prstGeom>
-        </p:spPr>
-        <p:style>
-          <a:lnRef idx="2">
-            <a:schemeClr val="accent1">
-              <a:shade val="50000"/>
-            </a:schemeClr>
-          </a:lnRef>
-          <a:fillRef idx="1">
-            <a:schemeClr val="accent1"/>
-          </a:fillRef>
-          <a:effectRef idx="0">
-            <a:schemeClr val="accent1"/>
-          </a:effectRef>
-          <a:fontRef idx="minor">
-            <a:schemeClr val="lt1"/>
-          </a:fontRef>
-        </p:style>
-        <p:txBody>
-          <a:bodyPr rtlCol="0" anchor="ctr"/>
-          <a:lstStyle/>
-          <a:p>
-            <a:pPr algn="ctr"/>
-            <a:r>
-              <a:rPr lang="ko-KR" altLang="en-US" sz="1400" dirty="0" smtClean="0"/>
-              <a:t>방문자</a:t>
-            </a:r>
-            <a:endParaRPr lang="ko-KR" altLang="en-US" sz="1400" dirty="0"/>
-          </a:p>
-        </p:txBody>
-      </p:sp>
-      <p:sp>
-        <p:nvSpPr>
-          <p:cNvPr id="5" name="직사각형 4"/>
-          <p:cNvSpPr/>
-          <p:nvPr/>
-        </p:nvSpPr>
-        <p:spPr>
-          <a:xfrm>
-            <a:off x="7524328" y="2708920"/>
-            <a:ext cx="1512168" cy="576064"/>
-          </a:xfrm>
-          <a:prstGeom prst="rect">
-            <a:avLst/>
-          </a:prstGeom>
-        </p:spPr>
-        <p:style>
-          <a:lnRef idx="2">
-            <a:schemeClr val="accent1">
-              <a:shade val="50000"/>
-            </a:schemeClr>
-          </a:lnRef>
-          <a:fillRef idx="1">
-            <a:schemeClr val="accent1"/>
-          </a:fillRef>
-          <a:effectRef idx="0">
-            <a:schemeClr val="accent1"/>
-          </a:effectRef>
-          <a:fontRef idx="minor">
-            <a:schemeClr val="lt1"/>
-          </a:fontRef>
-        </p:style>
-        <p:txBody>
-          <a:bodyPr rtlCol="0" anchor="ctr"/>
-          <a:lstStyle/>
-          <a:p>
-            <a:pPr algn="ctr"/>
-            <a:r>
-              <a:rPr lang="ko-KR" altLang="en-US" sz="1400" dirty="0" err="1" smtClean="0"/>
-              <a:t>사이트주인</a:t>
-            </a:r>
-            <a:endParaRPr lang="en-US" altLang="ko-KR" sz="1400" dirty="0" smtClean="0"/>
-          </a:p>
-          <a:p>
-            <a:pPr algn="ctr"/>
-            <a:r>
-              <a:rPr lang="en-US" altLang="ko-KR" sz="1400" dirty="0" smtClean="0"/>
-              <a:t>(</a:t>
-            </a:r>
-            <a:r>
-              <a:rPr lang="ko-KR" altLang="en-US" sz="1400" dirty="0" smtClean="0"/>
-              <a:t>관리자</a:t>
-            </a:r>
-            <a:r>
-              <a:rPr lang="en-US" altLang="ko-KR" sz="1400" dirty="0" smtClean="0"/>
-              <a:t>)</a:t>
-            </a:r>
-            <a:endParaRPr lang="ko-KR" altLang="en-US" sz="1400" dirty="0"/>
-          </a:p>
-        </p:txBody>
-      </p:sp>
-      <p:sp>
-        <p:nvSpPr>
-          <p:cNvPr id="6" name="직사각형 5"/>
-          <p:cNvSpPr/>
-          <p:nvPr/>
-        </p:nvSpPr>
-        <p:spPr>
-          <a:xfrm>
-            <a:off x="7524328" y="4221088"/>
-            <a:ext cx="1512168" cy="576064"/>
-          </a:xfrm>
-          <a:prstGeom prst="rect">
-            <a:avLst/>
-          </a:prstGeom>
-        </p:spPr>
-        <p:style>
-          <a:lnRef idx="2">
-            <a:schemeClr val="accent1">
-              <a:shade val="50000"/>
-            </a:schemeClr>
-          </a:lnRef>
-          <a:fillRef idx="1">
-            <a:schemeClr val="accent1"/>
-          </a:fillRef>
-          <a:effectRef idx="0">
-            <a:schemeClr val="accent1"/>
-          </a:effectRef>
-          <a:fontRef idx="minor">
-            <a:schemeClr val="lt1"/>
-          </a:fontRef>
-        </p:style>
-        <p:txBody>
-          <a:bodyPr rtlCol="0" anchor="ctr"/>
-          <a:lstStyle/>
-          <a:p>
-            <a:pPr algn="ctr"/>
-            <a:r>
-              <a:rPr lang="ko-KR" altLang="en-US" sz="1400" dirty="0" smtClean="0"/>
-              <a:t>본사 직원</a:t>
-            </a:r>
-            <a:endParaRPr lang="ko-KR" altLang="en-US" sz="1400" dirty="0"/>
-          </a:p>
-        </p:txBody>
-      </p:sp>
-      <p:sp>
-        <p:nvSpPr>
-          <p:cNvPr id="7" name="직사각형 6"/>
-          <p:cNvSpPr/>
-          <p:nvPr/>
-        </p:nvSpPr>
-        <p:spPr>
-          <a:xfrm>
-            <a:off x="6134373" y="767609"/>
-            <a:ext cx="648072" cy="504056"/>
-          </a:xfrm>
-          <a:prstGeom prst="rect">
-            <a:avLst/>
-          </a:prstGeom>
-          <a:solidFill>
-            <a:srgbClr val="C00000"/>
-          </a:solidFill>
-        </p:spPr>
-        <p:style>
-          <a:lnRef idx="2">
-            <a:schemeClr val="accent1">
-              <a:shade val="50000"/>
-            </a:schemeClr>
-          </a:lnRef>
-          <a:fillRef idx="1">
-            <a:schemeClr val="accent1"/>
-          </a:fillRef>
-          <a:effectRef idx="0">
-            <a:schemeClr val="accent1"/>
-          </a:effectRef>
-          <a:fontRef idx="minor">
-            <a:schemeClr val="lt1"/>
-          </a:fontRef>
-        </p:style>
-        <p:txBody>
-          <a:bodyPr rtlCol="0" anchor="ctr"/>
-          <a:lstStyle/>
-          <a:p>
-            <a:pPr algn="ctr"/>
-            <a:r>
-              <a:rPr lang="ko-KR" altLang="en-US" sz="1200" smtClean="0"/>
-              <a:t>홈</a:t>
-            </a:r>
-            <a:endParaRPr lang="ko-KR" altLang="en-US" sz="1200"/>
-          </a:p>
-        </p:txBody>
-      </p:sp>
-      <p:sp>
-        <p:nvSpPr>
-          <p:cNvPr id="8" name="직사각형 7"/>
-          <p:cNvSpPr/>
-          <p:nvPr/>
-        </p:nvSpPr>
-        <p:spPr>
-          <a:xfrm>
-            <a:off x="6134373" y="1523693"/>
-            <a:ext cx="648072" cy="504056"/>
-          </a:xfrm>
-          <a:prstGeom prst="rect">
-            <a:avLst/>
-          </a:prstGeom>
-          <a:solidFill>
-            <a:srgbClr val="C00000"/>
-          </a:solidFill>
-        </p:spPr>
-        <p:style>
-          <a:lnRef idx="2">
-            <a:schemeClr val="accent1">
-              <a:shade val="50000"/>
-            </a:schemeClr>
-          </a:lnRef>
-          <a:fillRef idx="1">
-            <a:schemeClr val="accent1"/>
-          </a:fillRef>
-          <a:effectRef idx="0">
-            <a:schemeClr val="accent1"/>
-          </a:effectRef>
-          <a:fontRef idx="minor">
-            <a:schemeClr val="lt1"/>
-          </a:fontRef>
-        </p:style>
-        <p:txBody>
-          <a:bodyPr rtlCol="0" anchor="ctr"/>
-          <a:lstStyle/>
-          <a:p>
-            <a:pPr algn="ctr"/>
-            <a:r>
-              <a:rPr lang="ko-KR" altLang="en-US" sz="1200" dirty="0" smtClean="0"/>
-              <a:t>게시판</a:t>
-            </a:r>
-            <a:endParaRPr lang="ko-KR" altLang="en-US" sz="1200" dirty="0"/>
-          </a:p>
-        </p:txBody>
-      </p:sp>
-      <p:sp>
-        <p:nvSpPr>
-          <p:cNvPr id="9" name="직사각형 8"/>
-          <p:cNvSpPr/>
-          <p:nvPr/>
-        </p:nvSpPr>
-        <p:spPr>
-          <a:xfrm>
-            <a:off x="6134373" y="3284984"/>
-            <a:ext cx="648072" cy="504056"/>
-          </a:xfrm>
-          <a:prstGeom prst="rect">
-            <a:avLst/>
-          </a:prstGeom>
-          <a:solidFill>
-            <a:srgbClr val="FFC000"/>
-          </a:solidFill>
-        </p:spPr>
-        <p:style>
-          <a:lnRef idx="2">
-            <a:schemeClr val="accent1">
-              <a:shade val="50000"/>
-            </a:schemeClr>
-          </a:lnRef>
-          <a:fillRef idx="1">
-            <a:schemeClr val="accent1"/>
-          </a:fillRef>
-          <a:effectRef idx="0">
-            <a:schemeClr val="accent1"/>
-          </a:effectRef>
-          <a:fontRef idx="minor">
-            <a:schemeClr val="lt1"/>
-          </a:fontRef>
-        </p:style>
-        <p:txBody>
-          <a:bodyPr rtlCol="0" anchor="ctr"/>
-          <a:lstStyle/>
-          <a:p>
-            <a:pPr algn="ctr"/>
-            <a:r>
-              <a:rPr lang="ko-KR" altLang="en-US" sz="1200" dirty="0" smtClean="0"/>
-              <a:t>문의</a:t>
-            </a:r>
-            <a:endParaRPr lang="ko-KR" altLang="en-US" sz="1200" dirty="0"/>
-          </a:p>
-        </p:txBody>
-      </p:sp>
-    </p:spTree>
-    <p:extLst>
-      <p:ext uri="{BB962C8B-B14F-4D97-AF65-F5344CB8AC3E}">
-        <p14:creationId xmlns:p14="http://schemas.microsoft.com/office/powerpoint/2010/main" val="4180930286"/>
-      </p:ext>
-    </p:extLst>
-  </p:cSld>
-  <p:clrMapOvr>
-    <a:masterClrMapping/>
-  </p:clrMapOvr>
-</p:sld>
-</file>
-
-<file path=ppt/slides/slide7.xml><?xml version="1.0" encoding="utf-8"?>
-<p:sld xmlns:a="http://schemas.openxmlformats.org/drawingml/2006/main" xmlns:r="http://schemas.openxmlformats.org/officeDocument/2006/relationships" xmlns:p="http://schemas.openxmlformats.org/presentationml/2006/main">
-  <p:cSld>
-    <p:spTree>
-      <p:nvGrpSpPr>
-        <p:cNvPr id="1" name=""/>
-        <p:cNvGrpSpPr/>
-        <p:nvPr/>
-      </p:nvGrpSpPr>
-      <p:grpSpPr>
-        <a:xfrm>
-          <a:off x="0" y="0"/>
-          <a:ext cx="0" cy="0"/>
-          <a:chOff x="0" y="0"/>
-          <a:chExt cx="0" cy="0"/>
-        </a:xfrm>
-      </p:grpSpPr>
-      <p:sp>
-        <p:nvSpPr>
-          <p:cNvPr id="2" name="TextBox 1"/>
-          <p:cNvSpPr txBox="1"/>
-          <p:nvPr/>
-        </p:nvSpPr>
-        <p:spPr>
-          <a:xfrm>
-            <a:off x="395536" y="404664"/>
-            <a:ext cx="4824536" cy="523220"/>
-          </a:xfrm>
-          <a:prstGeom prst="rect">
-            <a:avLst/>
-          </a:prstGeom>
-          <a:noFill/>
-        </p:spPr>
-        <p:txBody>
-          <a:bodyPr wrap="square" rtlCol="0">
-            <a:spAutoFit/>
-          </a:bodyPr>
-          <a:lstStyle/>
-          <a:p>
-            <a:r>
-              <a:rPr lang="ko-KR" altLang="en-US" sz="1400" dirty="0" err="1" smtClean="0"/>
-              <a:t>테이블명</a:t>
-            </a:r>
-            <a:r>
-              <a:rPr lang="ko-KR" altLang="en-US" sz="1400" dirty="0" smtClean="0"/>
-              <a:t> 사상 점검</a:t>
-            </a:r>
-            <a:endParaRPr lang="en-US" altLang="ko-KR" sz="1400" dirty="0" smtClean="0"/>
-          </a:p>
-          <a:p>
-            <a:r>
-              <a:rPr lang="ko-KR" altLang="en-US" sz="1400" dirty="0" smtClean="0"/>
-              <a:t>사용주최기준으로 명칭 변경필요검토</a:t>
-            </a:r>
-            <a:endParaRPr lang="ko-KR" altLang="en-US" sz="1400" dirty="0"/>
-          </a:p>
-        </p:txBody>
-      </p:sp>
-      <p:pic>
-        <p:nvPicPr>
-          <p:cNvPr id="3" name="그림 2"/>
-          <p:cNvPicPr>
-            <a:picLocks noChangeAspect="1"/>
-          </p:cNvPicPr>
-          <p:nvPr/>
-        </p:nvPicPr>
-        <p:blipFill>
-          <a:blip r:embed="rId2"/>
-          <a:stretch>
-            <a:fillRect/>
-          </a:stretch>
-        </p:blipFill>
-        <p:spPr>
-          <a:xfrm>
-            <a:off x="251520" y="1196752"/>
-            <a:ext cx="4159113" cy="3384376"/>
-          </a:xfrm>
-          <a:prstGeom prst="rect">
-            <a:avLst/>
-          </a:prstGeom>
-        </p:spPr>
-      </p:pic>
-      <p:pic>
-        <p:nvPicPr>
-          <p:cNvPr id="4" name="그림 3"/>
-          <p:cNvPicPr>
-            <a:picLocks noChangeAspect="1"/>
-          </p:cNvPicPr>
-          <p:nvPr/>
-        </p:nvPicPr>
-        <p:blipFill>
-          <a:blip r:embed="rId3"/>
-          <a:stretch>
-            <a:fillRect/>
-          </a:stretch>
-        </p:blipFill>
-        <p:spPr>
-          <a:xfrm>
-            <a:off x="3528833" y="2564904"/>
-            <a:ext cx="5598716" cy="3899352"/>
-          </a:xfrm>
-          <a:prstGeom prst="rect">
-            <a:avLst/>
-          </a:prstGeom>
-        </p:spPr>
-      </p:pic>
-      <p:sp>
-        <p:nvSpPr>
-          <p:cNvPr id="5" name="사각형 설명선 4"/>
-          <p:cNvSpPr/>
-          <p:nvPr/>
-        </p:nvSpPr>
-        <p:spPr>
-          <a:xfrm>
-            <a:off x="6444208" y="1628800"/>
-            <a:ext cx="1728192" cy="864096"/>
-          </a:xfrm>
-          <a:prstGeom prst="wedgeRectCallout">
-            <a:avLst/>
-          </a:prstGeom>
-        </p:spPr>
-        <p:style>
-          <a:lnRef idx="2">
-            <a:schemeClr val="accent1">
-              <a:shade val="50000"/>
-            </a:schemeClr>
-          </a:lnRef>
-          <a:fillRef idx="1">
-            <a:schemeClr val="accent1"/>
-          </a:fillRef>
-          <a:effectRef idx="0">
-            <a:schemeClr val="accent1"/>
-          </a:effectRef>
-          <a:fontRef idx="minor">
-            <a:schemeClr val="lt1"/>
-          </a:fontRef>
-        </p:style>
-        <p:txBody>
-          <a:bodyPr rtlCol="0" anchor="ctr"/>
-          <a:lstStyle/>
-          <a:p>
-            <a:pPr algn="ctr"/>
-            <a:r>
-              <a:rPr lang="ko-KR" altLang="en-US" dirty="0" smtClean="0"/>
-              <a:t>플랫폼기준으로 선정</a:t>
-            </a:r>
-            <a:endParaRPr lang="ko-KR" altLang="en-US" dirty="0"/>
-          </a:p>
-        </p:txBody>
-      </p:sp>
-    </p:spTree>
-    <p:extLst>
-      <p:ext uri="{BB962C8B-B14F-4D97-AF65-F5344CB8AC3E}">
-        <p14:creationId xmlns:p14="http://schemas.microsoft.com/office/powerpoint/2010/main" val="576452792"/>
-      </p:ext>
-    </p:extLst>
-  </p:cSld>
-  <p:clrMapOvr>
-    <a:masterClrMapping/>
-  </p:clrMapOvr>
-</p:sld>
-</file>
-
 <file path=ppt/slides/slide8.xml><?xml version="1.0" encoding="utf-8"?>
 <p:sld xmlns:a="http://schemas.openxmlformats.org/drawingml/2006/main" xmlns:r="http://schemas.openxmlformats.org/officeDocument/2006/relationships" xmlns:p="http://schemas.openxmlformats.org/presentationml/2006/main">
   <p:cSld>
@@ -9004,68 +9646,14 @@
       </p:grpSpPr>
       <p:sp>
         <p:nvSpPr>
-          <p:cNvPr id="2" name="TextBox 1"/>
-          <p:cNvSpPr txBox="1"/>
-          <p:nvPr/>
-        </p:nvSpPr>
-        <p:spPr>
-          <a:xfrm>
-            <a:off x="323528" y="404664"/>
-            <a:ext cx="2736304" cy="369332"/>
-          </a:xfrm>
-          <a:prstGeom prst="rect">
-            <a:avLst/>
-          </a:prstGeom>
-          <a:noFill/>
-        </p:spPr>
-        <p:txBody>
-          <a:bodyPr wrap="square" rtlCol="0">
-            <a:spAutoFit/>
-          </a:bodyPr>
-          <a:lstStyle/>
-          <a:p>
-            <a:r>
-              <a:rPr lang="ko-KR" altLang="en-US" dirty="0" smtClean="0"/>
-              <a:t>사이트 배포</a:t>
-            </a:r>
-            <a:endParaRPr lang="ko-KR" altLang="en-US" dirty="0"/>
-          </a:p>
-        </p:txBody>
-      </p:sp>
-      <p:pic>
-        <p:nvPicPr>
-          <p:cNvPr id="3" name="그림 2"/>
-          <p:cNvPicPr>
-            <a:picLocks noChangeAspect="1"/>
-          </p:cNvPicPr>
-          <p:nvPr/>
-        </p:nvPicPr>
-        <p:blipFill>
-          <a:blip r:embed="rId2"/>
-          <a:stretch>
-            <a:fillRect/>
-          </a:stretch>
-        </p:blipFill>
-        <p:spPr>
-          <a:xfrm>
-            <a:off x="19537" y="692696"/>
-            <a:ext cx="2720555" cy="1960225"/>
-          </a:xfrm>
-          <a:prstGeom prst="rect">
-            <a:avLst/>
-          </a:prstGeom>
-        </p:spPr>
-      </p:pic>
-      <p:sp>
-        <p:nvSpPr>
-          <p:cNvPr id="4" name="직사각형 3"/>
+          <p:cNvPr id="2" name="직사각형 1"/>
           <p:cNvSpPr/>
           <p:nvPr/>
         </p:nvSpPr>
         <p:spPr>
           <a:xfrm>
-            <a:off x="3059832" y="980728"/>
-            <a:ext cx="3816424" cy="1672193"/>
+            <a:off x="467544" y="404664"/>
+            <a:ext cx="2160240" cy="792088"/>
           </a:xfrm>
           <a:prstGeom prst="rect">
             <a:avLst/>
@@ -9093,44 +9681,16 @@
           <a:p>
             <a:pPr algn="ctr"/>
             <a:r>
+              <a:rPr lang="ko-KR" altLang="en-US" sz="1200" dirty="0" smtClean="0"/>
+              <a:t>리뷰단계에서 미공개 </a:t>
+            </a:r>
+            <a:r>
               <a:rPr lang="ko-KR" altLang="en-US" sz="1200" dirty="0" err="1" smtClean="0"/>
-              <a:t>카드등록해두면</a:t>
+              <a:t>리본표시</a:t>
             </a:r>
             <a:r>
               <a:rPr lang="ko-KR" altLang="en-US" sz="1200" dirty="0" smtClean="0"/>
-              <a:t> 배포되고 </a:t>
-            </a:r>
-            <a:r>
-              <a:rPr lang="en-US" altLang="ko-KR" sz="1200" dirty="0" smtClean="0"/>
-              <a:t>&gt; trial</a:t>
-            </a:r>
-            <a:r>
-              <a:rPr lang="ko-KR" altLang="en-US" sz="1200" dirty="0" smtClean="0"/>
-              <a:t>기간 들어가고 </a:t>
-            </a:r>
-            <a:r>
-              <a:rPr lang="en-US" altLang="ko-KR" sz="1200" dirty="0" smtClean="0"/>
-              <a:t>(14</a:t>
-            </a:r>
-            <a:r>
-              <a:rPr lang="ko-KR" altLang="en-US" sz="1200" dirty="0" smtClean="0"/>
-              <a:t>일</a:t>
-            </a:r>
-            <a:r>
-              <a:rPr lang="en-US" altLang="ko-KR" sz="1200" dirty="0" smtClean="0"/>
-              <a:t>) </a:t>
-            </a:r>
-            <a:r>
-              <a:rPr lang="ko-KR" altLang="en-US" sz="1200" dirty="0" smtClean="0"/>
-              <a:t>이후에는 </a:t>
-            </a:r>
-            <a:r>
-              <a:rPr lang="ko-KR" altLang="en-US" sz="1200" dirty="0" err="1" smtClean="0"/>
-              <a:t>자동결재되는건가</a:t>
-            </a:r>
-            <a:r>
-              <a:rPr lang="en-US" altLang="ko-KR" sz="1200" dirty="0" smtClean="0"/>
-              <a:t>?</a:t>
+              <a:t> 로 수정</a:t>
             </a:r>
             <a:endParaRPr lang="ko-KR" altLang="en-US" sz="1200" dirty="0"/>
           </a:p>
@@ -9138,22 +9698,22 @@
       </p:sp>
       <p:pic>
         <p:nvPicPr>
-          <p:cNvPr id="5" name="그림 4"/>
+          <p:cNvPr id="3" name="그림 2"/>
           <p:cNvPicPr>
             <a:picLocks noChangeAspect="1"/>
           </p:cNvPicPr>
           <p:nvPr/>
         </p:nvPicPr>
         <p:blipFill>
-          <a:blip r:embed="rId3"/>
+          <a:blip r:embed="rId2"/>
           <a:stretch>
             <a:fillRect/>
           </a:stretch>
         </p:blipFill>
         <p:spPr>
           <a:xfrm>
-            <a:off x="971600" y="3933056"/>
-            <a:ext cx="5567107" cy="2543564"/>
+            <a:off x="755576" y="1628800"/>
+            <a:ext cx="7671542" cy="4988044"/>
           </a:xfrm>
           <a:prstGeom prst="rect">
             <a:avLst/>
@@ -9163,7 +9723,7 @@
     </p:spTree>
     <p:extLst>
       <p:ext uri="{BB962C8B-B14F-4D97-AF65-F5344CB8AC3E}">
-        <p14:creationId xmlns:p14="http://schemas.microsoft.com/office/powerpoint/2010/main" val="3165312771"/>
+        <p14:creationId xmlns:p14="http://schemas.microsoft.com/office/powerpoint/2010/main" val="4250094322"/>
       </p:ext>
     </p:extLst>
   </p:cSld>
@@ -9190,16 +9750,40 @@
           <a:chExt cx="0" cy="0"/>
         </a:xfrm>
       </p:grpSpPr>
-      <p:sp>
-        <p:nvSpPr>
-          <p:cNvPr id="2" name="TextBox 1"/>
+      <p:pic>
+        <p:nvPicPr>
+          <p:cNvPr id="2" name="그림 1"/>
+          <p:cNvPicPr>
+            <a:picLocks noChangeAspect="1"/>
+          </p:cNvPicPr>
+          <p:nvPr/>
+        </p:nvPicPr>
+        <p:blipFill>
+          <a:blip r:embed="rId2"/>
+          <a:stretch>
+            <a:fillRect/>
+          </a:stretch>
+        </p:blipFill>
+        <p:spPr>
+          <a:xfrm>
+            <a:off x="251520" y="1412776"/>
+            <a:ext cx="4935238" cy="3208897"/>
+          </a:xfrm>
+          <a:prstGeom prst="rect">
+            <a:avLst/>
+          </a:prstGeom>
+        </p:spPr>
+      </p:pic>
+      <p:sp>
+        <p:nvSpPr>
+          <p:cNvPr id="3" name="TextBox 2"/>
           <p:cNvSpPr txBox="1"/>
           <p:nvPr/>
         </p:nvSpPr>
         <p:spPr>
           <a:xfrm>
-            <a:off x="539552" y="404664"/>
-            <a:ext cx="2448272" cy="523220"/>
+            <a:off x="467544" y="188640"/>
+            <a:ext cx="3744416" cy="830997"/>
           </a:xfrm>
           <a:prstGeom prst="rect">
             <a:avLst/>
@@ -9213,29 +9797,356 @@
           <a:lstStyle/>
           <a:p>
             <a:r>
+              <a:rPr lang="ko-KR" altLang="en-US" sz="1200" dirty="0" smtClean="0"/>
+              <a:t>사이트 구조 점검</a:t>
+            </a:r>
+            <a:endParaRPr lang="en-US" altLang="ko-KR" sz="1200" dirty="0" smtClean="0"/>
+          </a:p>
+          <a:p>
+            <a:r>
+              <a:rPr lang="ko-KR" altLang="en-US" sz="1200" dirty="0" smtClean="0"/>
+              <a:t>홈과 게시판 </a:t>
+            </a:r>
+            <a:r>
+              <a:rPr lang="ko-KR" altLang="en-US" sz="1200" dirty="0" err="1" smtClean="0"/>
+              <a:t>버늩의</a:t>
+            </a:r>
+            <a:r>
+              <a:rPr lang="ko-KR" altLang="en-US" sz="1200" dirty="0" smtClean="0"/>
+              <a:t> 경우 사이트의 기능</a:t>
+            </a:r>
+            <a:endParaRPr lang="en-US" altLang="ko-KR" sz="1200" dirty="0" smtClean="0"/>
+          </a:p>
+          <a:p>
+            <a:r>
+              <a:rPr lang="ko-KR" altLang="en-US" sz="1200" dirty="0" err="1" smtClean="0"/>
+              <a:t>문의버튼은</a:t>
+            </a:r>
+            <a:r>
+              <a:rPr lang="ko-KR" altLang="en-US" sz="1200" dirty="0" smtClean="0"/>
+              <a:t> 사이트관리자의 기능 </a:t>
+            </a:r>
+            <a:r>
+              <a:rPr lang="en-US" altLang="ko-KR" sz="1200" dirty="0" smtClean="0"/>
+              <a:t>&gt;&gt; </a:t>
+            </a:r>
+            <a:r>
+              <a:rPr lang="ko-KR" altLang="en-US" sz="1200" dirty="0" smtClean="0"/>
+              <a:t>이상하다</a:t>
+            </a:r>
+            <a:r>
+              <a:rPr lang="en-US" altLang="ko-KR" sz="1200" dirty="0" smtClean="0"/>
+              <a:t>. </a:t>
+            </a:r>
+            <a:r>
+              <a:rPr lang="ko-KR" altLang="en-US" sz="1200" dirty="0" smtClean="0"/>
+              <a:t>사이트의 </a:t>
+            </a:r>
+            <a:r>
+              <a:rPr lang="ko-KR" altLang="en-US" sz="1200" dirty="0" err="1" smtClean="0"/>
+              <a:t>기능이여야한다</a:t>
+            </a:r>
+            <a:r>
+              <a:rPr lang="en-US" altLang="ko-KR" sz="1200" dirty="0" smtClean="0"/>
+              <a:t>. </a:t>
+            </a:r>
+            <a:endParaRPr lang="ko-KR" altLang="en-US" sz="1200" dirty="0"/>
+          </a:p>
+        </p:txBody>
+      </p:sp>
+      <p:sp>
+        <p:nvSpPr>
+          <p:cNvPr id="4" name="직사각형 3"/>
+          <p:cNvSpPr/>
+          <p:nvPr/>
+        </p:nvSpPr>
+        <p:spPr>
+          <a:xfrm>
+            <a:off x="7524328" y="1124744"/>
+            <a:ext cx="1512168" cy="576064"/>
+          </a:xfrm>
+          <a:prstGeom prst="rect">
+            <a:avLst/>
+          </a:prstGeom>
+        </p:spPr>
+        <p:style>
+          <a:lnRef idx="2">
+            <a:schemeClr val="accent1">
+              <a:shade val="50000"/>
+            </a:schemeClr>
+          </a:lnRef>
+          <a:fillRef idx="1">
+            <a:schemeClr val="accent1"/>
+          </a:fillRef>
+          <a:effectRef idx="0">
+            <a:schemeClr val="accent1"/>
+          </a:effectRef>
+          <a:fontRef idx="minor">
+            <a:schemeClr val="lt1"/>
+          </a:fontRef>
+        </p:style>
+        <p:txBody>
+          <a:bodyPr rtlCol="0" anchor="ctr"/>
+          <a:lstStyle/>
+          <a:p>
+            <a:pPr algn="ctr"/>
+            <a:r>
+              <a:rPr lang="ko-KR" altLang="en-US" sz="1400" dirty="0" smtClean="0"/>
+              <a:t>방문자</a:t>
+            </a:r>
+            <a:endParaRPr lang="ko-KR" altLang="en-US" sz="1400" dirty="0"/>
+          </a:p>
+        </p:txBody>
+      </p:sp>
+      <p:sp>
+        <p:nvSpPr>
+          <p:cNvPr id="5" name="직사각형 4"/>
+          <p:cNvSpPr/>
+          <p:nvPr/>
+        </p:nvSpPr>
+        <p:spPr>
+          <a:xfrm>
+            <a:off x="7524328" y="2708920"/>
+            <a:ext cx="1512168" cy="576064"/>
+          </a:xfrm>
+          <a:prstGeom prst="rect">
+            <a:avLst/>
+          </a:prstGeom>
+        </p:spPr>
+        <p:style>
+          <a:lnRef idx="2">
+            <a:schemeClr val="accent1">
+              <a:shade val="50000"/>
+            </a:schemeClr>
+          </a:lnRef>
+          <a:fillRef idx="1">
+            <a:schemeClr val="accent1"/>
+          </a:fillRef>
+          <a:effectRef idx="0">
+            <a:schemeClr val="accent1"/>
+          </a:effectRef>
+          <a:fontRef idx="minor">
+            <a:schemeClr val="lt1"/>
+          </a:fontRef>
+        </p:style>
+        <p:txBody>
+          <a:bodyPr rtlCol="0" anchor="ctr"/>
+          <a:lstStyle/>
+          <a:p>
+            <a:pPr algn="ctr"/>
+            <a:r>
               <a:rPr lang="ko-KR" altLang="en-US" sz="1400" dirty="0" err="1" smtClean="0"/>
-              <a:t>공통코드</a:t>
+              <a:t>사이트주인</a:t>
+            </a:r>
+            <a:endParaRPr lang="en-US" altLang="ko-KR" sz="1400" dirty="0" smtClean="0"/>
+          </a:p>
+          <a:p>
+            <a:pPr algn="ctr"/>
+            <a:r>
+              <a:rPr lang="en-US" altLang="ko-KR" sz="1400" dirty="0" smtClean="0"/>
+              <a:t>(</a:t>
             </a:r>
             <a:r>
               <a:rPr lang="ko-KR" altLang="en-US" sz="1400" dirty="0" smtClean="0"/>
-              <a:t> </a:t>
-            </a:r>
-            <a:r>
-              <a:rPr lang="ko-KR" altLang="en-US" sz="1400" dirty="0" err="1" smtClean="0"/>
-              <a:t>디비</a:t>
-            </a:r>
+              <a:t>관리자</a:t>
+            </a:r>
+            <a:r>
+              <a:rPr lang="en-US" altLang="ko-KR" sz="1400" dirty="0" smtClean="0"/>
+              <a:t>)</a:t>
+            </a:r>
+            <a:endParaRPr lang="ko-KR" altLang="en-US" sz="1400" dirty="0"/>
+          </a:p>
+        </p:txBody>
+      </p:sp>
+      <p:sp>
+        <p:nvSpPr>
+          <p:cNvPr id="6" name="직사각형 5"/>
+          <p:cNvSpPr/>
+          <p:nvPr/>
+        </p:nvSpPr>
+        <p:spPr>
+          <a:xfrm>
+            <a:off x="7524328" y="4221088"/>
+            <a:ext cx="1512168" cy="576064"/>
+          </a:xfrm>
+          <a:prstGeom prst="rect">
+            <a:avLst/>
+          </a:prstGeom>
+        </p:spPr>
+        <p:style>
+          <a:lnRef idx="2">
+            <a:schemeClr val="accent1">
+              <a:shade val="50000"/>
+            </a:schemeClr>
+          </a:lnRef>
+          <a:fillRef idx="1">
+            <a:schemeClr val="accent1"/>
+          </a:fillRef>
+          <a:effectRef idx="0">
+            <a:schemeClr val="accent1"/>
+          </a:effectRef>
+          <a:fontRef idx="minor">
+            <a:schemeClr val="lt1"/>
+          </a:fontRef>
+        </p:style>
+        <p:txBody>
+          <a:bodyPr rtlCol="0" anchor="ctr"/>
+          <a:lstStyle/>
+          <a:p>
+            <a:pPr algn="ctr"/>
             <a:r>
               <a:rPr lang="ko-KR" altLang="en-US" sz="1400" dirty="0" smtClean="0"/>
-              <a:t> 구조 적용 완료</a:t>
+              <a:t>본사 직원</a:t>
             </a:r>
             <a:endParaRPr lang="ko-KR" altLang="en-US" sz="1400" dirty="0"/>
+          </a:p>
+        </p:txBody>
+      </p:sp>
+      <p:sp>
+        <p:nvSpPr>
+          <p:cNvPr id="7" name="직사각형 6"/>
+          <p:cNvSpPr/>
+          <p:nvPr/>
+        </p:nvSpPr>
+        <p:spPr>
+          <a:xfrm>
+            <a:off x="6134373" y="767609"/>
+            <a:ext cx="648072" cy="504056"/>
+          </a:xfrm>
+          <a:prstGeom prst="rect">
+            <a:avLst/>
+          </a:prstGeom>
+          <a:solidFill>
+            <a:srgbClr val="C00000"/>
+          </a:solidFill>
+        </p:spPr>
+        <p:style>
+          <a:lnRef idx="2">
+            <a:schemeClr val="accent1">
+              <a:shade val="50000"/>
+            </a:schemeClr>
+          </a:lnRef>
+          <a:fillRef idx="1">
+            <a:schemeClr val="accent1"/>
+          </a:fillRef>
+          <a:effectRef idx="0">
+            <a:schemeClr val="accent1"/>
+          </a:effectRef>
+          <a:fontRef idx="minor">
+            <a:schemeClr val="lt1"/>
+          </a:fontRef>
+        </p:style>
+        <p:txBody>
+          <a:bodyPr rtlCol="0" anchor="ctr"/>
+          <a:lstStyle/>
+          <a:p>
+            <a:pPr algn="ctr"/>
+            <a:r>
+              <a:rPr lang="ko-KR" altLang="en-US" sz="1200" smtClean="0"/>
+              <a:t>홈</a:t>
+            </a:r>
+            <a:endParaRPr lang="ko-KR" altLang="en-US" sz="1200"/>
+          </a:p>
+        </p:txBody>
+      </p:sp>
+      <p:sp>
+        <p:nvSpPr>
+          <p:cNvPr id="8" name="직사각형 7"/>
+          <p:cNvSpPr/>
+          <p:nvPr/>
+        </p:nvSpPr>
+        <p:spPr>
+          <a:xfrm>
+            <a:off x="6134373" y="1523693"/>
+            <a:ext cx="648072" cy="504056"/>
+          </a:xfrm>
+          <a:prstGeom prst="rect">
+            <a:avLst/>
+          </a:prstGeom>
+          <a:solidFill>
+            <a:srgbClr val="C00000"/>
+          </a:solidFill>
+        </p:spPr>
+        <p:style>
+          <a:lnRef idx="2">
+            <a:schemeClr val="accent1">
+              <a:shade val="50000"/>
+            </a:schemeClr>
+          </a:lnRef>
+          <a:fillRef idx="1">
+            <a:schemeClr val="accent1"/>
+          </a:fillRef>
+          <a:effectRef idx="0">
+            <a:schemeClr val="accent1"/>
+          </a:effectRef>
+          <a:fontRef idx="minor">
+            <a:schemeClr val="lt1"/>
+          </a:fontRef>
+        </p:style>
+        <p:txBody>
+          <a:bodyPr rtlCol="0" anchor="ctr"/>
+          <a:lstStyle/>
+          <a:p>
+            <a:pPr algn="ctr"/>
+            <a:r>
+              <a:rPr lang="ko-KR" altLang="en-US" sz="1200" dirty="0" smtClean="0"/>
+              <a:t>게시판</a:t>
+            </a:r>
+            <a:endParaRPr lang="ko-KR" altLang="en-US" sz="1200" dirty="0"/>
+          </a:p>
+        </p:txBody>
+      </p:sp>
+      <p:sp>
+        <p:nvSpPr>
+          <p:cNvPr id="9" name="직사각형 8"/>
+          <p:cNvSpPr/>
+          <p:nvPr/>
+        </p:nvSpPr>
+        <p:spPr>
+          <a:xfrm>
+            <a:off x="6134373" y="3284984"/>
+            <a:ext cx="648072" cy="504056"/>
+          </a:xfrm>
+          <a:prstGeom prst="rect">
+            <a:avLst/>
+          </a:prstGeom>
+          <a:solidFill>
+            <a:srgbClr val="FFC000"/>
+          </a:solidFill>
+        </p:spPr>
+        <p:style>
+          <a:lnRef idx="2">
+            <a:schemeClr val="accent1">
+              <a:shade val="50000"/>
+            </a:schemeClr>
+          </a:lnRef>
+          <a:fillRef idx="1">
+            <a:schemeClr val="accent1"/>
+          </a:fillRef>
+          <a:effectRef idx="0">
+            <a:schemeClr val="accent1"/>
+          </a:effectRef>
+          <a:fontRef idx="minor">
+            <a:schemeClr val="lt1"/>
+          </a:fontRef>
+        </p:style>
+        <p:txBody>
+          <a:bodyPr rtlCol="0" anchor="ctr"/>
+          <a:lstStyle/>
+          <a:p>
+            <a:pPr algn="ctr"/>
+            <a:r>
+              <a:rPr lang="ko-KR" altLang="en-US" sz="1200" dirty="0" smtClean="0"/>
+              <a:t>문의</a:t>
+            </a:r>
+            <a:endParaRPr lang="ko-KR" altLang="en-US" sz="1200" dirty="0"/>
           </a:p>
         </p:txBody>
       </p:sp>
     </p:spTree>
     <p:extLst>
       <p:ext uri="{BB962C8B-B14F-4D97-AF65-F5344CB8AC3E}">
-        <p14:creationId xmlns:p14="http://schemas.microsoft.com/office/powerpoint/2010/main" val="1140657134"/>
+        <p14:creationId xmlns:p14="http://schemas.microsoft.com/office/powerpoint/2010/main" val="4180930286"/>
       </p:ext>
     </p:extLst>
   </p:cSld>

--- a/My-plaform기획2.pptx
+++ b/My-plaform기획2.pptx
@@ -257,7 +257,7 @@
           <a:p>
             <a:fld id="{CA327A70-99B0-4C6B-97CA-130B17C8EC7F}" type="datetimeFigureOut">
               <a:rPr lang="ko-KR" altLang="en-US" smtClean="0"/>
-              <a:t>2026-09-17</a:t>
+              <a:t>2026-09-18</a:t>
             </a:fld>
             <a:endParaRPr lang="ko-KR" altLang="en-US"/>
           </a:p>
@@ -790,7 +790,7 @@
           <a:p>
             <a:fld id="{952AB49B-C0AE-447B-876C-1A453E2B644F}" type="datetimeFigureOut">
               <a:rPr lang="ko-KR" altLang="en-US" smtClean="0"/>
-              <a:t>2026-09-17</a:t>
+              <a:t>2026-09-18</a:t>
             </a:fld>
             <a:endParaRPr lang="ko-KR" altLang="en-US"/>
           </a:p>
@@ -960,7 +960,7 @@
           <a:p>
             <a:fld id="{952AB49B-C0AE-447B-876C-1A453E2B644F}" type="datetimeFigureOut">
               <a:rPr lang="ko-KR" altLang="en-US" smtClean="0"/>
-              <a:t>2026-09-17</a:t>
+              <a:t>2026-09-18</a:t>
             </a:fld>
             <a:endParaRPr lang="ko-KR" altLang="en-US"/>
           </a:p>
@@ -1140,7 +1140,7 @@
           <a:p>
             <a:fld id="{952AB49B-C0AE-447B-876C-1A453E2B644F}" type="datetimeFigureOut">
               <a:rPr lang="ko-KR" altLang="en-US" smtClean="0"/>
-              <a:t>2026-09-17</a:t>
+              <a:t>2026-09-18</a:t>
             </a:fld>
             <a:endParaRPr lang="ko-KR" altLang="en-US"/>
           </a:p>
@@ -1310,7 +1310,7 @@
           <a:p>
             <a:fld id="{952AB49B-C0AE-447B-876C-1A453E2B644F}" type="datetimeFigureOut">
               <a:rPr lang="ko-KR" altLang="en-US" smtClean="0"/>
-              <a:t>2026-09-17</a:t>
+              <a:t>2026-09-18</a:t>
             </a:fld>
             <a:endParaRPr lang="ko-KR" altLang="en-US"/>
           </a:p>
@@ -1556,7 +1556,7 @@
           <a:p>
             <a:fld id="{952AB49B-C0AE-447B-876C-1A453E2B644F}" type="datetimeFigureOut">
               <a:rPr lang="ko-KR" altLang="en-US" smtClean="0"/>
-              <a:t>2026-09-17</a:t>
+              <a:t>2026-09-18</a:t>
             </a:fld>
             <a:endParaRPr lang="ko-KR" altLang="en-US"/>
           </a:p>
@@ -1844,7 +1844,7 @@
           <a:p>
             <a:fld id="{952AB49B-C0AE-447B-876C-1A453E2B644F}" type="datetimeFigureOut">
               <a:rPr lang="ko-KR" altLang="en-US" smtClean="0"/>
-              <a:t>2026-09-17</a:t>
+              <a:t>2026-09-18</a:t>
             </a:fld>
             <a:endParaRPr lang="ko-KR" altLang="en-US"/>
           </a:p>
@@ -2266,7 +2266,7 @@
           <a:p>
             <a:fld id="{952AB49B-C0AE-447B-876C-1A453E2B644F}" type="datetimeFigureOut">
               <a:rPr lang="ko-KR" altLang="en-US" smtClean="0"/>
-              <a:t>2026-09-17</a:t>
+              <a:t>2026-09-18</a:t>
             </a:fld>
             <a:endParaRPr lang="ko-KR" altLang="en-US"/>
           </a:p>
@@ -2384,7 +2384,7 @@
           <a:p>
             <a:fld id="{952AB49B-C0AE-447B-876C-1A453E2B644F}" type="datetimeFigureOut">
               <a:rPr lang="ko-KR" altLang="en-US" smtClean="0"/>
-              <a:t>2026-09-17</a:t>
+              <a:t>2026-09-18</a:t>
             </a:fld>
             <a:endParaRPr lang="ko-KR" altLang="en-US"/>
           </a:p>
@@ -2479,7 +2479,7 @@
           <a:p>
             <a:fld id="{952AB49B-C0AE-447B-876C-1A453E2B644F}" type="datetimeFigureOut">
               <a:rPr lang="ko-KR" altLang="en-US" smtClean="0"/>
-              <a:t>2026-09-17</a:t>
+              <a:t>2026-09-18</a:t>
             </a:fld>
             <a:endParaRPr lang="ko-KR" altLang="en-US"/>
           </a:p>
@@ -2756,7 +2756,7 @@
           <a:p>
             <a:fld id="{952AB49B-C0AE-447B-876C-1A453E2B644F}" type="datetimeFigureOut">
               <a:rPr lang="ko-KR" altLang="en-US" smtClean="0"/>
-              <a:t>2026-09-17</a:t>
+              <a:t>2026-09-18</a:t>
             </a:fld>
             <a:endParaRPr lang="ko-KR" altLang="en-US"/>
           </a:p>
@@ -3009,7 +3009,7 @@
           <a:p>
             <a:fld id="{952AB49B-C0AE-447B-876C-1A453E2B644F}" type="datetimeFigureOut">
               <a:rPr lang="ko-KR" altLang="en-US" smtClean="0"/>
-              <a:t>2026-09-17</a:t>
+              <a:t>2026-09-18</a:t>
             </a:fld>
             <a:endParaRPr lang="ko-KR" altLang="en-US"/>
           </a:p>
@@ -3222,7 +3222,7 @@
           <a:p>
             <a:fld id="{952AB49B-C0AE-447B-876C-1A453E2B644F}" type="datetimeFigureOut">
               <a:rPr lang="ko-KR" altLang="en-US" smtClean="0"/>
-              <a:t>2026-09-17</a:t>
+              <a:t>2026-09-18</a:t>
             </a:fld>
             <a:endParaRPr lang="ko-KR" altLang="en-US"/>
           </a:p>
@@ -4618,7 +4618,7 @@
         </p:blipFill>
         <p:spPr>
           <a:xfrm>
-            <a:off x="-756592" y="256472"/>
+            <a:off x="-3971793" y="1996875"/>
             <a:ext cx="8376565" cy="4953622"/>
           </a:xfrm>
           <a:prstGeom prst="rect">
@@ -4853,6 +4853,50 @@
               <a:t>미공개</a:t>
             </a:r>
             <a:endParaRPr lang="ko-KR" altLang="en-US" sz="1000" dirty="0"/>
+          </a:p>
+        </p:txBody>
+      </p:sp>
+      <p:sp>
+        <p:nvSpPr>
+          <p:cNvPr id="34" name="직사각형 33"/>
+          <p:cNvSpPr/>
+          <p:nvPr/>
+        </p:nvSpPr>
+        <p:spPr>
+          <a:xfrm>
+            <a:off x="8244408" y="1996875"/>
+            <a:ext cx="828660" cy="254612"/>
+          </a:xfrm>
+          <a:prstGeom prst="rect">
+            <a:avLst/>
+          </a:prstGeom>
+        </p:spPr>
+        <p:style>
+          <a:lnRef idx="2">
+            <a:schemeClr val="accent1">
+              <a:shade val="50000"/>
+            </a:schemeClr>
+          </a:lnRef>
+          <a:fillRef idx="1">
+            <a:schemeClr val="accent1"/>
+          </a:fillRef>
+          <a:effectRef idx="0">
+            <a:schemeClr val="accent1"/>
+          </a:effectRef>
+          <a:fontRef idx="minor">
+            <a:schemeClr val="lt1"/>
+          </a:fontRef>
+        </p:style>
+        <p:txBody>
+          <a:bodyPr rtlCol="0" anchor="ctr"/>
+          <a:lstStyle/>
+          <a:p>
+            <a:pPr algn="ctr"/>
+            <a:r>
+              <a:rPr lang="ko-KR" altLang="en-US" sz="900" dirty="0" smtClean="0"/>
+              <a:t>제작하는 사람만 공개</a:t>
+            </a:r>
+            <a:endParaRPr lang="ko-KR" altLang="en-US" sz="900" dirty="0"/>
           </a:p>
         </p:txBody>
       </p:sp>

--- a/My-plaform기획2.pptx
+++ b/My-plaform기획2.pptx
@@ -4618,7 +4618,7 @@
         </p:blipFill>
         <p:spPr>
           <a:xfrm>
-            <a:off x="-3971793" y="1996875"/>
+            <a:off x="-3174429" y="-105550"/>
             <a:ext cx="8376565" cy="4953622"/>
           </a:xfrm>
           <a:prstGeom prst="rect">
@@ -4634,7 +4634,7 @@
         </p:nvSpPr>
         <p:spPr>
           <a:xfrm>
-            <a:off x="755576" y="4409371"/>
+            <a:off x="827584" y="5877272"/>
             <a:ext cx="3528392" cy="761747"/>
           </a:xfrm>
           <a:prstGeom prst="rect">
@@ -5112,50 +5112,6 @@
               <a:t>잔금</a:t>
             </a:r>
             <a:endParaRPr lang="ko-KR" altLang="en-US" sz="1000" dirty="0"/>
-          </a:p>
-        </p:txBody>
-      </p:sp>
-      <p:sp>
-        <p:nvSpPr>
-          <p:cNvPr id="7" name="직사각형 6"/>
-          <p:cNvSpPr/>
-          <p:nvPr/>
-        </p:nvSpPr>
-        <p:spPr>
-          <a:xfrm>
-            <a:off x="7134568" y="2063968"/>
-            <a:ext cx="853480" cy="221835"/>
-          </a:xfrm>
-          <a:prstGeom prst="rect">
-            <a:avLst/>
-          </a:prstGeom>
-        </p:spPr>
-        <p:style>
-          <a:lnRef idx="2">
-            <a:schemeClr val="accent1">
-              <a:shade val="50000"/>
-            </a:schemeClr>
-          </a:lnRef>
-          <a:fillRef idx="1">
-            <a:schemeClr val="accent1"/>
-          </a:fillRef>
-          <a:effectRef idx="0">
-            <a:schemeClr val="accent1"/>
-          </a:effectRef>
-          <a:fontRef idx="minor">
-            <a:schemeClr val="lt1"/>
-          </a:fontRef>
-        </p:style>
-        <p:txBody>
-          <a:bodyPr rtlCol="0" anchor="ctr"/>
-          <a:lstStyle/>
-          <a:p>
-            <a:pPr algn="ctr"/>
-            <a:r>
-              <a:rPr lang="ko-KR" altLang="en-US" sz="1000" smtClean="0"/>
-              <a:t>완료</a:t>
-            </a:r>
-            <a:endParaRPr lang="ko-KR" altLang="en-US" sz="1000"/>
           </a:p>
         </p:txBody>
       </p:sp>
